--- a/session1-adds-deck.pptx
+++ b/session1-adds-deck.pptx
@@ -27,6 +27,7 @@
     <p:sldId id="275" r:id="rId26"/>
     <p:sldId id="276" r:id="rId27"/>
     <p:sldId id="277" r:id="rId28"/>
+    <p:sldId id="278" r:id="rId29"/>
   </p:sldIdLst>
   <p:sldSz cx="12191695" cy="6858000" type="screen4x3"/>
   <p:notesSz cx="6858000" cy="9144000"/>
@@ -593,7 +594,7 @@
           <a:lstStyle/>
           <a:p>
             <a:r>
-              <a:t>Share-level options. Warning: DefaultSharePermission applies to ALL shares in the account. RBAC propagation up to ~30 min.</a:t>
+              <a:t>Line of sight demystified: DNS 53, Kerberos 88, LDAP 389, SMB 445. Domain JOIN needs RPC too. Non-joined machines CAN mount with explicit creds.</a:t>
             </a:r>
           </a:p>
         </p:txBody>
@@ -663,7 +664,7 @@
           <a:lstStyle/>
           <a:p>
             <a:r>
-              <a:t>Three doors: network, share RBAC, NTFS. Most 'Kerberos broken' tickets are doors 2-3.</a:t>
+              <a:t>This is live news - enforcement started with the 2026 waves. Ask who has pre-2023 storage accounts. Lab is AES-256 already. Ties back to mechanism 3 (key derivation).</a:t>
             </a:r>
           </a:p>
         </p:txBody>
@@ -733,7 +734,7 @@
           <a:lstStyle/>
           <a:p>
             <a:r>
-              <a:t>Effective access = MIN(RBAC, NTFS). ACL editing needs Elevated Contributor / Privileged Contributor / storage key.</a:t>
+              <a:t>Three doors: network, share RBAC, NTFS. Most 'Kerberos broken' tickets are doors 2-3.</a:t>
             </a:r>
           </a:p>
         </p:txBody>
@@ -803,7 +804,7 @@
           <a:lstStyle/>
           <a:p>
             <a:r>
-              <a:t>Cipher negotiation happens BEFORE auth - that's why it can't be per-account. Order the client list.</a:t>
+              <a:t>Effective access = MIN(RBAC, NTFS). Also covers the two ways to grant share level (per-identity RBAC vs DefaultSharePermission - the lab uses the latter).</a:t>
             </a:r>
           </a:p>
         </p:txBody>
@@ -873,7 +874,7 @@
           <a:lstStyle/>
           <a:p>
             <a:r>
-              <a:t>Recap what the automation did while it deployed - by now it should be nearly done. Poll for the green box.</a:t>
+              <a:t>Recap what the automation did while it deployed - map steps 5-6 back to mechanism slide 1. By now it should be nearly done; poll for the green box.</a:t>
             </a:r>
           </a:p>
         </p:txBody>
@@ -1013,7 +1014,7 @@
           <a:lstStyle/>
           <a:p>
             <a:r>
-              <a:t>Lab 1: healthy baseline. Insist on screenshots - the whole capstone depends on knowing 'good'.</a:t>
+              <a:t>Lab 1: healthy baseline. Have them screenshot the klist output - every fault is diagnosed against it.</a:t>
             </a:r>
           </a:p>
         </p:txBody>
@@ -1083,7 +1084,7 @@
           <a:lstStyle/>
           <a:p>
             <a:r>
-              <a:t>Lab 2 (you drive the injection): let them predict FIRST. The aha: ticket IS issued, mount still fails -&gt; AP stage.</a:t>
+              <a:t>Lab 2 (you drive the injection). The aha: ticket IS issued, mount still fails -&gt; the service can't decrypt it. Point back to mechanism slide 3.</a:t>
             </a:r>
           </a:p>
         </p:txBody>
@@ -1153,7 +1154,7 @@
           <a:lstStyle/>
           <a:p>
             <a:r>
-              <a:t>Lab 3 (they drive): contrast with Lab 2 - no ticket at all this time -&gt; TGS stage, setspn is the tool.</a:t>
+              <a:t>Lab 3 (they drive): contrast with Lab 2 - no ticket at all this time -&gt; the KDC can't find the SPN. setspn is the tool.</a:t>
             </a:r>
           </a:p>
         </p:txBody>
@@ -1363,7 +1364,7 @@
           <a:lstStyle/>
           <a:p>
             <a:r>
-              <a:t>Triage table = the takeaway. Point at the printed flowchart; capstone next if time.</a:t>
+              <a:t>Triage table = the takeaway. Point at the printed flowchart.</a:t>
             </a:r>
           </a:p>
         </p:txBody>
@@ -1433,7 +1434,7 @@
           <a:lstStyle/>
           <a:p>
             <a:r>
-              <a:t>Tear down NOW (idle VMs cost money). Session 2 prereqs: redeploy beforehand + Global Admin on a dev tenant.</a:t>
+              <a:t>Tear down NOW (idle VMs cost money). Session 2 prereqs: redeploy beforehand + Global Admin on a DEV tenant (app management policy!).</a:t>
             </a:r>
           </a:p>
         </p:txBody>
@@ -1528,6 +1529,76 @@
 </p:notes>
 </file>
 
+<file path=ppt/notesSlides/notesSlide23.xml><?xml version="1.0" encoding="utf-8"?>
+<p:notes xmlns:a="http://schemas.openxmlformats.org/drawingml/2006/main" xmlns:p="http://schemas.openxmlformats.org/presentationml/2006/main" xmlns:r="http://schemas.openxmlformats.org/officeDocument/2006/relationships">
+  <p:cSld>
+    <p:spTree>
+      <p:nvGrpSpPr>
+        <p:cNvPr id="1" name=""/>
+        <p:cNvGrpSpPr/>
+        <p:nvPr/>
+      </p:nvGrpSpPr>
+      <p:grpSpPr>
+        <a:xfrm>
+          <a:off x="0" y="0"/>
+          <a:ext cx="0" cy="0"/>
+          <a:chOff x="0" y="0"/>
+          <a:chExt cx="0" cy="0"/>
+        </a:xfrm>
+      </p:grpSpPr>
+      <p:sp>
+        <p:nvSpPr>
+          <p:cNvPr id="2" name="Slide Image Placeholder 1"/>
+          <p:cNvSpPr>
+            <a:spLocks noGrp="1"/>
+          </p:cNvSpPr>
+          <p:nvPr>
+            <p:ph type="sldImg" idx="2"/>
+          </p:nvPr>
+        </p:nvSpPr>
+        <p:spPr/>
+      </p:sp>
+      <p:sp>
+        <p:nvSpPr>
+          <p:cNvPr id="3" name="Notes Placeholder 2"/>
+          <p:cNvSpPr>
+            <a:spLocks noGrp="1"/>
+          </p:cNvSpPr>
+          <p:nvPr>
+            <p:ph type="body" idx="3" sz="quarter"/>
+          </p:nvPr>
+        </p:nvSpPr>
+        <p:spPr/>
+        <p:txBody>
+          <a:bodyPr/>
+          <a:lstStyle/>
+          <a:p>
+            <a:r>
+              <a:t>APPENDIX - only if asked about error 5 with correct permissions. Cipher negotiation happens BEFORE auth, so it can't be per-account; fix the client cipher order.</a:t>
+            </a:r>
+          </a:p>
+        </p:txBody>
+      </p:sp>
+      <p:sp>
+        <p:nvSpPr>
+          <p:cNvPr id="4" name="Slide Number Placeholder 3"/>
+          <p:cNvSpPr>
+            <a:spLocks noGrp="1"/>
+          </p:cNvSpPr>
+          <p:nvPr>
+            <p:ph type="sldNum" idx="5" sz="quarter"/>
+          </p:nvPr>
+        </p:nvSpPr>
+        <p:spPr/>
+      </p:sp>
+    </p:spTree>
+  </p:cSld>
+  <p:clrMapOvr>
+    <a:masterClrMapping/>
+  </p:clrMapOvr>
+</p:notes>
+</file>
+
 <file path=ppt/notesSlides/notesSlide3.xml><?xml version="1.0" encoding="utf-8"?>
 <p:notes xmlns:a="http://schemas.openxmlformats.org/drawingml/2006/main" xmlns:p="http://schemas.openxmlformats.org/presentationml/2006/main" xmlns:r="http://schemas.openxmlformats.org/officeDocument/2006/relationships">
   <p:cSld>
@@ -1573,7 +1644,7 @@
           <a:lstStyle/>
           <a:p>
             <a:r>
-              <a:t>Set expectations: concepts while it deploys (~25 min), then break/fix. Emphasize the capstone at the end - they will diagnose a mystery fault themselves.</a:t>
+              <a:t>Set expectations: concepts while it deploys (~25 min), then break/fix.</a:t>
             </a:r>
           </a:p>
         </p:txBody>
@@ -1713,7 +1784,7 @@
           <a:lstStyle/>
           <a:p>
             <a:r>
-              <a:t>Tell the kingdom story with energy - it maps 1:1 to AS/TGS/AP. Every fault later is 'which step of this story broke'.</a:t>
+              <a:t>Tell the kingdom story with energy - it maps 1:1 to AS/TGS/AP. The next three slides turn this story into the real mechanism.</a:t>
             </a:r>
           </a:p>
         </p:txBody>
@@ -1783,7 +1854,7 @@
           <a:lstStyle/>
           <a:p>
             <a:r>
-              <a:t>The core mental model. Repeat the mantra: computer object + SPN + kerb-key password. The account can be a computer OR a user object (AccountType).</a:t>
+              <a:t>MECHANISM 1 (take ~2.5 min). The five steps of a domain join. Land the mantra: AD account + password=kerb key + SPN. To the DC this is just another server - nothing Azure-specific.</a:t>
             </a:r>
           </a:p>
         </p:txBody>
@@ -1853,7 +1924,7 @@
           <a:lstStyle/>
           <a:p>
             <a:r>
-              <a:t>Matrix slide - don't read it; ask 'which column is your production?' Note Entra-only is GA now but needs Win11 25H2+/WS2025.</a:t>
+              <a:t>MECHANISM 2 (~2.5 min). Two moments: TGT at logon, service ticket at mount. The klist panel on the right explains the 'why so many tickets?' question they WILL ask in Lab 1.</a:t>
             </a:r>
           </a:p>
         </p:txBody>
@@ -1923,7 +1994,7 @@
           <a:lstStyle/>
           <a:p>
             <a:r>
-              <a:t>Line of sight demystified: DNS 53, Kerberos 88, LDAP 389, SMB 445. Domain JOIN needs RPC too. Non-joined machines CAN mount with explicit creds.</a:t>
+              <a:t>MECHANISM 3 (~2.5 min) - the payoff slide. Symmetric keys: TGT locked with krbtgt key, service ticket locked with the storage kerb key; Azure Files tries kerb1 then kerb2. If both fail = 1396. Say explicitly: 'this is exactly what we break in Lab 2.'</a:t>
             </a:r>
           </a:p>
         </p:txBody>
@@ -1993,7 +2064,7 @@
           <a:lstStyle/>
           <a:p>
             <a:r>
-              <a:t>This is live news - enforcement started with the 2026 waves. Ask who has pre-2023 storage accounts. Lab is AES-256 already.</a:t>
+              <a:t>Condensed comparison - don't read it. Ask 'which row is your production?' One storage account = one identity source; Session 2 flips this same account.</a:t>
             </a:r>
           </a:p>
         </p:txBody>
@@ -5485,262 +5556,27 @@
                 </a:solidFill>
                 <a:latin typeface="Cambria"/>
               </a:rPr>
-              <a:t>Layer 2 up close: who may enter the share?</a:t>
-            </a:r>
-          </a:p>
-        </p:txBody>
-      </p:sp>
-      <p:graphicFrame>
-        <p:nvGraphicFramePr>
-          <p:cNvPr id="5" name="Table 4"/>
-          <p:cNvGraphicFramePr>
-            <a:graphicFrameLocks noGrp="1"/>
-          </p:cNvGraphicFramePr>
-          <p:nvPr/>
-        </p:nvGraphicFramePr>
-        <p:xfrm>
-          <a:off x="548640" y="1508760"/>
-          <a:ext cx="11064240" cy="2514600"/>
-        </p:xfrm>
-        <a:graphic>
-          <a:graphicData uri="http://schemas.openxmlformats.org/drawingml/2006/table">
-            <a:tbl>
-              <a:tblPr firstRow="1" bandRow="1">
-                <a:tableStyleId>{5C22544A-7EE6-4342-B048-85BDC9FD1C3A}</a:tableStyleId>
-              </a:tblPr>
-              <a:tblGrid>
-                <a:gridCol w="2560320"/>
-                <a:gridCol w="4846320"/>
-                <a:gridCol w="3657600"/>
-              </a:tblGrid>
-              <a:tr h="411480">
-                <a:tc>
-                  <a:txBody>
-                    <a:bodyPr wrap="square"/>
-                    <a:lstStyle/>
-                    <a:p>
-                      <a:r>
-                        <a:rPr sz="1300" b="1">
-                          <a:solidFill>
-                            <a:srgbClr val="FFFFFF"/>
-                          </a:solidFill>
-                          <a:latin typeface="Calibri"/>
-                        </a:rPr>
-                        <a:t>Option</a:t>
-                      </a:r>
-                    </a:p>
-                  </a:txBody>
-                  <a:tcPr marL="73152" marR="73152" marT="27432" marB="27432" anchor="ctr">
-                    <a:solidFill>
-                      <a:srgbClr val="1E2761"/>
-                    </a:solidFill>
-                  </a:tcPr>
-                </a:tc>
-                <a:tc>
-                  <a:txBody>
-                    <a:bodyPr wrap="square"/>
-                    <a:lstStyle/>
-                    <a:p>
-                      <a:r>
-                        <a:rPr sz="1300" b="1">
-                          <a:solidFill>
-                            <a:srgbClr val="FFFFFF"/>
-                          </a:solidFill>
-                          <a:latin typeface="Calibri"/>
-                        </a:rPr>
-                        <a:t>How</a:t>
-                      </a:r>
-                    </a:p>
-                  </a:txBody>
-                  <a:tcPr marL="73152" marR="73152" marT="27432" marB="27432" anchor="ctr">
-                    <a:solidFill>
-                      <a:srgbClr val="1E2761"/>
-                    </a:solidFill>
-                  </a:tcPr>
-                </a:tc>
-                <a:tc>
-                  <a:txBody>
-                    <a:bodyPr wrap="square"/>
-                    <a:lstStyle/>
-                    <a:p>
-                      <a:r>
-                        <a:rPr sz="1300" b="1">
-                          <a:solidFill>
-                            <a:srgbClr val="FFFFFF"/>
-                          </a:solidFill>
-                          <a:latin typeface="Calibri"/>
-                        </a:rPr>
-                        <a:t>When to use</a:t>
-                      </a:r>
-                    </a:p>
-                  </a:txBody>
-                  <a:tcPr marL="73152" marR="73152" marT="27432" marB="27432" anchor="ctr">
-                    <a:solidFill>
-                      <a:srgbClr val="1E2761"/>
-                    </a:solidFill>
-                  </a:tcPr>
-                </a:tc>
-              </a:tr>
-              <a:tr h="1051560">
-                <a:tc>
-                  <a:txBody>
-                    <a:bodyPr wrap="square"/>
-                    <a:lstStyle/>
-                    <a:p>
-                      <a:r>
-                        <a:rPr sz="1300" b="0">
-                          <a:solidFill>
-                            <a:srgbClr val="202440"/>
-                          </a:solidFill>
-                          <a:latin typeface="Calibri"/>
-                        </a:rPr>
-                        <a:t>Per-identity RBAC</a:t>
-                      </a:r>
-                    </a:p>
-                  </a:txBody>
-                  <a:tcPr marL="73152" marR="73152" marT="27432" marB="27432" anchor="ctr">
-                    <a:solidFill>
-                      <a:srgbClr val="FFFFFF"/>
-                    </a:solidFill>
-                  </a:tcPr>
-                </a:tc>
-                <a:tc>
-                  <a:txBody>
-                    <a:bodyPr wrap="square"/>
-                    <a:lstStyle/>
-                    <a:p>
-                      <a:r>
-                        <a:rPr sz="1300" b="0">
-                          <a:solidFill>
-                            <a:srgbClr val="202440"/>
-                          </a:solidFill>
-                          <a:latin typeface="Calibri"/>
-                        </a:rPr>
-                        <a:t>Assign a built-in role to a user/group on the share:
-SMB Share Reader · Contributor · Elevated Contributor</a:t>
-                      </a:r>
-                    </a:p>
-                  </a:txBody>
-                  <a:tcPr marL="73152" marR="73152" marT="27432" marB="27432" anchor="ctr">
-                    <a:solidFill>
-                      <a:srgbClr val="FFFFFF"/>
-                    </a:solidFill>
-                  </a:tcPr>
-                </a:tc>
-                <a:tc>
-                  <a:txBody>
-                    <a:bodyPr wrap="square"/>
-                    <a:lstStyle/>
-                    <a:p>
-                      <a:r>
-                        <a:rPr sz="1300" b="0">
-                          <a:solidFill>
-                            <a:srgbClr val="202440"/>
-                          </a:solidFill>
-                          <a:latin typeface="Calibri"/>
-                        </a:rPr>
-                        <a:t>Production — but the identity must EXIST in Entra (synced/hybrid for AD DS auth)</a:t>
-                      </a:r>
-                    </a:p>
-                  </a:txBody>
-                  <a:tcPr marL="73152" marR="73152" marT="27432" marB="27432" anchor="ctr">
-                    <a:solidFill>
-                      <a:srgbClr val="FFFFFF"/>
-                    </a:solidFill>
-                  </a:tcPr>
-                </a:tc>
-              </a:tr>
-              <a:tr h="1051560">
-                <a:tc>
-                  <a:txBody>
-                    <a:bodyPr wrap="square"/>
-                    <a:lstStyle/>
-                    <a:p>
-                      <a:r>
-                        <a:rPr sz="1300" b="0">
-                          <a:solidFill>
-                            <a:srgbClr val="202440"/>
-                          </a:solidFill>
-                          <a:latin typeface="Calibri"/>
-                        </a:rPr>
-                        <a:t>Default share permission</a:t>
-                      </a:r>
-                    </a:p>
-                  </a:txBody>
-                  <a:tcPr marL="73152" marR="73152" marT="27432" marB="27432" anchor="ctr">
-                    <a:solidFill>
-                      <a:srgbClr val="F3F6FD"/>
-                    </a:solidFill>
-                  </a:tcPr>
-                </a:tc>
-                <a:tc>
-                  <a:txBody>
-                    <a:bodyPr wrap="square"/>
-                    <a:lstStyle/>
-                    <a:p>
-                      <a:r>
-                        <a:rPr sz="1300" b="0">
-                          <a:solidFill>
-                            <a:srgbClr val="202440"/>
-                          </a:solidFill>
-                          <a:latin typeface="Calibri"/>
-                        </a:rPr>
-                        <a:t>One implicit role for every authenticated identity
-(DefaultSharePermission on the storage account)</a:t>
-                      </a:r>
-                    </a:p>
-                  </a:txBody>
-                  <a:tcPr marL="73152" marR="73152" marT="27432" marB="27432" anchor="ctr">
-                    <a:solidFill>
-                      <a:srgbClr val="F3F6FD"/>
-                    </a:solidFill>
-                  </a:tcPr>
-                </a:tc>
-                <a:tc>
-                  <a:txBody>
-                    <a:bodyPr wrap="square"/>
-                    <a:lstStyle/>
-                    <a:p>
-                      <a:r>
-                        <a:rPr sz="1300" b="0">
-                          <a:solidFill>
-                            <a:srgbClr val="202440"/>
-                          </a:solidFill>
-                          <a:latin typeface="Calibri"/>
-                        </a:rPr>
-                        <a:t>Labs, AVD/FSLogix fleets, or when users aren't synced to Entra — our lab uses this</a:t>
-                      </a:r>
-                    </a:p>
-                  </a:txBody>
-                  <a:tcPr marL="73152" marR="73152" marT="27432" marB="27432" anchor="ctr">
-                    <a:solidFill>
-                      <a:srgbClr val="F3F6FD"/>
-                    </a:solidFill>
-                  </a:tcPr>
-                </a:tc>
-              </a:tr>
-            </a:tbl>
-          </a:graphicData>
-        </a:graphic>
-      </p:graphicFrame>
-      <p:sp>
-        <p:nvSpPr>
-          <p:cNvPr id="6" name="Rounded Rectangle 5"/>
+              <a:t>"Line of sight" — what it actually means</a:t>
+            </a:r>
+          </a:p>
+        </p:txBody>
+      </p:sp>
+      <p:sp>
+        <p:nvSpPr>
+          <p:cNvPr id="5" name="Oval 4"/>
           <p:cNvSpPr/>
           <p:nvPr/>
         </p:nvSpPr>
         <p:spPr>
           <a:xfrm>
-            <a:off x="548640" y="4160520"/>
-            <a:ext cx="11064240" cy="1737360"/>
-          </a:xfrm>
-          <a:prstGeom prst="roundRect">
-            <a:avLst>
-              <a:gd name="adj" fmla="val 8000"/>
-            </a:avLst>
+            <a:off x="640080" y="1554480"/>
+            <a:ext cx="548640" cy="548640"/>
+          </a:xfrm>
+          <a:prstGeom prst="ellipse">
+            <a:avLst/>
           </a:prstGeom>
           <a:solidFill>
-            <a:srgbClr val="F3F6FD"/>
+            <a:srgbClr val="2A367E"/>
           </a:solidFill>
           <a:ln>
             <a:noFill/>
@@ -5762,10 +5598,61 @@
           </a:fontRef>
         </p:style>
         <p:txBody>
-          <a:bodyPr rtlCol="0" anchor="ctr"/>
+          <a:bodyPr rtlCol="0" anchor="ctr" wrap="none" lIns="0" rIns="0"/>
           <a:lstStyle/>
           <a:p>
             <a:pPr algn="ctr"/>
+            <a:r>
+              <a:rPr sz="1500" b="1">
+                <a:solidFill>
+                  <a:srgbClr val="FFFFFF"/>
+                </a:solidFill>
+                <a:latin typeface="Calibri"/>
+              </a:rPr>
+              <a:t>1</a:t>
+            </a:r>
+          </a:p>
+        </p:txBody>
+      </p:sp>
+      <p:sp>
+        <p:nvSpPr>
+          <p:cNvPr id="6" name="TextBox 5"/>
+          <p:cNvSpPr txBox="1"/>
+          <p:nvPr/>
+        </p:nvSpPr>
+        <p:spPr>
+          <a:xfrm>
+            <a:off x="1417320" y="1463040"/>
+            <a:ext cx="2377440" cy="960120"/>
+          </a:xfrm>
+          <a:prstGeom prst="rect">
+            <a:avLst/>
+          </a:prstGeom>
+          <a:noFill/>
+        </p:spPr>
+        <p:txBody>
+          <a:bodyPr wrap="square" anchor="ctr" lIns="0" rIns="0" tIns="0" bIns="0">
+            <a:spAutoFit/>
+          </a:bodyPr>
+          <a:lstStyle/>
+          <a:p>
+            <a:pPr algn="l">
+              <a:lnSpc>
+                <a:spcPct val="100000"/>
+              </a:lnSpc>
+              <a:spcAft>
+                <a:spcPts val="600"/>
+              </a:spcAft>
+            </a:pPr>
+            <a:r>
+              <a:rPr sz="1550" b="1" i="0">
+                <a:solidFill>
+                  <a:srgbClr val="1E2761"/>
+                </a:solidFill>
+                <a:latin typeface="Calibri"/>
+              </a:rPr>
+              <a:t>DNS</a:t>
+            </a:r>
           </a:p>
         </p:txBody>
       </p:sp>
@@ -5777,8 +5664,461 @@
         </p:nvSpPr>
         <p:spPr>
           <a:xfrm>
-            <a:off x="868680" y="4343400"/>
-            <a:ext cx="10424160" cy="1371600"/>
+            <a:off x="3977639" y="1463040"/>
+            <a:ext cx="7635240" cy="960120"/>
+          </a:xfrm>
+          <a:prstGeom prst="rect">
+            <a:avLst/>
+          </a:prstGeom>
+          <a:noFill/>
+        </p:spPr>
+        <p:txBody>
+          <a:bodyPr wrap="square" anchor="ctr" lIns="0" rIns="0" tIns="0" bIns="0">
+            <a:spAutoFit/>
+          </a:bodyPr>
+          <a:lstStyle/>
+          <a:p>
+            <a:pPr algn="l">
+              <a:lnSpc>
+                <a:spcPct val="108000"/>
+              </a:lnSpc>
+              <a:spcAft>
+                <a:spcPts val="600"/>
+              </a:spcAft>
+            </a:pPr>
+            <a:r>
+              <a:rPr sz="1300" b="0" i="0">
+                <a:solidFill>
+                  <a:srgbClr val="5A5A6E"/>
+                </a:solidFill>
+                <a:latin typeface="Calibri"/>
+              </a:rPr>
+              <a:t>The client must RESOLVE the AD domain — its DNS must point at (or forward to) a DC. In our lab the VNet's DNS server is the DC itself.</a:t>
+            </a:r>
+          </a:p>
+        </p:txBody>
+      </p:sp>
+      <p:sp>
+        <p:nvSpPr>
+          <p:cNvPr id="8" name="Oval 7"/>
+          <p:cNvSpPr/>
+          <p:nvPr/>
+        </p:nvSpPr>
+        <p:spPr>
+          <a:xfrm>
+            <a:off x="640080" y="2670048"/>
+            <a:ext cx="548640" cy="548640"/>
+          </a:xfrm>
+          <a:prstGeom prst="ellipse">
+            <a:avLst/>
+          </a:prstGeom>
+          <a:solidFill>
+            <a:srgbClr val="2A367E"/>
+          </a:solidFill>
+          <a:ln>
+            <a:noFill/>
+          </a:ln>
+          <a:effectLst/>
+        </p:spPr>
+        <p:style>
+          <a:lnRef idx="1">
+            <a:schemeClr val="accent1"/>
+          </a:lnRef>
+          <a:fillRef idx="3">
+            <a:schemeClr val="accent1"/>
+          </a:fillRef>
+          <a:effectRef idx="2">
+            <a:schemeClr val="accent1"/>
+          </a:effectRef>
+          <a:fontRef idx="minor">
+            <a:schemeClr val="lt1"/>
+          </a:fontRef>
+        </p:style>
+        <p:txBody>
+          <a:bodyPr rtlCol="0" anchor="ctr" wrap="none" lIns="0" rIns="0"/>
+          <a:lstStyle/>
+          <a:p>
+            <a:pPr algn="ctr"/>
+            <a:r>
+              <a:rPr sz="1500" b="1">
+                <a:solidFill>
+                  <a:srgbClr val="FFFFFF"/>
+                </a:solidFill>
+                <a:latin typeface="Calibri"/>
+              </a:rPr>
+              <a:t>2</a:t>
+            </a:r>
+          </a:p>
+        </p:txBody>
+      </p:sp>
+      <p:sp>
+        <p:nvSpPr>
+          <p:cNvPr id="9" name="TextBox 8"/>
+          <p:cNvSpPr txBox="1"/>
+          <p:nvPr/>
+        </p:nvSpPr>
+        <p:spPr>
+          <a:xfrm>
+            <a:off x="1417320" y="2578608"/>
+            <a:ext cx="2377440" cy="960120"/>
+          </a:xfrm>
+          <a:prstGeom prst="rect">
+            <a:avLst/>
+          </a:prstGeom>
+          <a:noFill/>
+        </p:spPr>
+        <p:txBody>
+          <a:bodyPr wrap="square" anchor="ctr" lIns="0" rIns="0" tIns="0" bIns="0">
+            <a:spAutoFit/>
+          </a:bodyPr>
+          <a:lstStyle/>
+          <a:p>
+            <a:pPr algn="l">
+              <a:lnSpc>
+                <a:spcPct val="100000"/>
+              </a:lnSpc>
+              <a:spcAft>
+                <a:spcPts val="600"/>
+              </a:spcAft>
+            </a:pPr>
+            <a:r>
+              <a:rPr sz="1550" b="1" i="0">
+                <a:solidFill>
+                  <a:srgbClr val="1E2761"/>
+                </a:solidFill>
+                <a:latin typeface="Calibri"/>
+              </a:rPr>
+              <a:t>DC locator</a:t>
+            </a:r>
+          </a:p>
+        </p:txBody>
+      </p:sp>
+      <p:sp>
+        <p:nvSpPr>
+          <p:cNvPr id="10" name="TextBox 9"/>
+          <p:cNvSpPr txBox="1"/>
+          <p:nvPr/>
+        </p:nvSpPr>
+        <p:spPr>
+          <a:xfrm>
+            <a:off x="3977639" y="2578608"/>
+            <a:ext cx="7635240" cy="960120"/>
+          </a:xfrm>
+          <a:prstGeom prst="rect">
+            <a:avLst/>
+          </a:prstGeom>
+          <a:noFill/>
+        </p:spPr>
+        <p:txBody>
+          <a:bodyPr wrap="square" anchor="ctr" lIns="0" rIns="0" tIns="0" bIns="0">
+            <a:spAutoFit/>
+          </a:bodyPr>
+          <a:lstStyle/>
+          <a:p>
+            <a:pPr algn="l">
+              <a:lnSpc>
+                <a:spcPct val="108000"/>
+              </a:lnSpc>
+              <a:spcAft>
+                <a:spcPts val="600"/>
+              </a:spcAft>
+            </a:pPr>
+            <a:r>
+              <a:rPr sz="1300" b="0" i="0">
+                <a:solidFill>
+                  <a:srgbClr val="5A5A6E"/>
+                </a:solidFill>
+                <a:latin typeface="Calibri"/>
+              </a:rPr>
+              <a:t>Windows finds a DC via DNS SRV records (_ldap._tcp.dc._msdcs.&lt;domain&gt;) — nltest /dsgetdc:&lt;domain&gt; shows the result.</a:t>
+            </a:r>
+          </a:p>
+        </p:txBody>
+      </p:sp>
+      <p:sp>
+        <p:nvSpPr>
+          <p:cNvPr id="11" name="Oval 10"/>
+          <p:cNvSpPr/>
+          <p:nvPr/>
+        </p:nvSpPr>
+        <p:spPr>
+          <a:xfrm>
+            <a:off x="640080" y="3785615"/>
+            <a:ext cx="548640" cy="548640"/>
+          </a:xfrm>
+          <a:prstGeom prst="ellipse">
+            <a:avLst/>
+          </a:prstGeom>
+          <a:solidFill>
+            <a:srgbClr val="2A367E"/>
+          </a:solidFill>
+          <a:ln>
+            <a:noFill/>
+          </a:ln>
+          <a:effectLst/>
+        </p:spPr>
+        <p:style>
+          <a:lnRef idx="1">
+            <a:schemeClr val="accent1"/>
+          </a:lnRef>
+          <a:fillRef idx="3">
+            <a:schemeClr val="accent1"/>
+          </a:fillRef>
+          <a:effectRef idx="2">
+            <a:schemeClr val="accent1"/>
+          </a:effectRef>
+          <a:fontRef idx="minor">
+            <a:schemeClr val="lt1"/>
+          </a:fontRef>
+        </p:style>
+        <p:txBody>
+          <a:bodyPr rtlCol="0" anchor="ctr" wrap="none" lIns="0" rIns="0"/>
+          <a:lstStyle/>
+          <a:p>
+            <a:pPr algn="ctr"/>
+            <a:r>
+              <a:rPr sz="1500" b="1">
+                <a:solidFill>
+                  <a:srgbClr val="FFFFFF"/>
+                </a:solidFill>
+                <a:latin typeface="Calibri"/>
+              </a:rPr>
+              <a:t>3</a:t>
+            </a:r>
+          </a:p>
+        </p:txBody>
+      </p:sp>
+      <p:sp>
+        <p:nvSpPr>
+          <p:cNvPr id="12" name="TextBox 11"/>
+          <p:cNvSpPr txBox="1"/>
+          <p:nvPr/>
+        </p:nvSpPr>
+        <p:spPr>
+          <a:xfrm>
+            <a:off x="1417320" y="3694176"/>
+            <a:ext cx="2377440" cy="960120"/>
+          </a:xfrm>
+          <a:prstGeom prst="rect">
+            <a:avLst/>
+          </a:prstGeom>
+          <a:noFill/>
+        </p:spPr>
+        <p:txBody>
+          <a:bodyPr wrap="square" anchor="ctr" lIns="0" rIns="0" tIns="0" bIns="0">
+            <a:spAutoFit/>
+          </a:bodyPr>
+          <a:lstStyle/>
+          <a:p>
+            <a:pPr algn="l">
+              <a:lnSpc>
+                <a:spcPct val="100000"/>
+              </a:lnSpc>
+              <a:spcAft>
+                <a:spcPts val="600"/>
+              </a:spcAft>
+            </a:pPr>
+            <a:r>
+              <a:rPr sz="1550" b="1" i="0">
+                <a:solidFill>
+                  <a:srgbClr val="1E2761"/>
+                </a:solidFill>
+                <a:latin typeface="Calibri"/>
+              </a:rPr>
+              <a:t>The ports</a:t>
+            </a:r>
+          </a:p>
+        </p:txBody>
+      </p:sp>
+      <p:sp>
+        <p:nvSpPr>
+          <p:cNvPr id="13" name="TextBox 12"/>
+          <p:cNvSpPr txBox="1"/>
+          <p:nvPr/>
+        </p:nvSpPr>
+        <p:spPr>
+          <a:xfrm>
+            <a:off x="3977639" y="3694176"/>
+            <a:ext cx="7635240" cy="960120"/>
+          </a:xfrm>
+          <a:prstGeom prst="rect">
+            <a:avLst/>
+          </a:prstGeom>
+          <a:noFill/>
+        </p:spPr>
+        <p:txBody>
+          <a:bodyPr wrap="square" anchor="ctr" lIns="0" rIns="0" tIns="0" bIns="0">
+            <a:spAutoFit/>
+          </a:bodyPr>
+          <a:lstStyle/>
+          <a:p>
+            <a:pPr algn="l">
+              <a:lnSpc>
+                <a:spcPct val="108000"/>
+              </a:lnSpc>
+              <a:spcAft>
+                <a:spcPts val="600"/>
+              </a:spcAft>
+            </a:pPr>
+            <a:r>
+              <a:rPr sz="1300" b="0" i="0">
+                <a:solidFill>
+                  <a:srgbClr val="5A5A6E"/>
+                </a:solidFill>
+                <a:latin typeface="Calibri"/>
+              </a:rPr>
+              <a:t>DNS 53 · Kerberos 88 · LDAP 389 · SMB 445 must be reachable (VPN/ExpressRoute for remote clients). Domain JOIN and GPO additionally need RPC 135 + dynamic ports.</a:t>
+            </a:r>
+          </a:p>
+        </p:txBody>
+      </p:sp>
+      <p:sp>
+        <p:nvSpPr>
+          <p:cNvPr id="14" name="Oval 13"/>
+          <p:cNvSpPr/>
+          <p:nvPr/>
+        </p:nvSpPr>
+        <p:spPr>
+          <a:xfrm>
+            <a:off x="640080" y="4901183"/>
+            <a:ext cx="548640" cy="548640"/>
+          </a:xfrm>
+          <a:prstGeom prst="ellipse">
+            <a:avLst/>
+          </a:prstGeom>
+          <a:solidFill>
+            <a:srgbClr val="2A367E"/>
+          </a:solidFill>
+          <a:ln>
+            <a:noFill/>
+          </a:ln>
+          <a:effectLst/>
+        </p:spPr>
+        <p:style>
+          <a:lnRef idx="1">
+            <a:schemeClr val="accent1"/>
+          </a:lnRef>
+          <a:fillRef idx="3">
+            <a:schemeClr val="accent1"/>
+          </a:fillRef>
+          <a:effectRef idx="2">
+            <a:schemeClr val="accent1"/>
+          </a:effectRef>
+          <a:fontRef idx="minor">
+            <a:schemeClr val="lt1"/>
+          </a:fontRef>
+        </p:style>
+        <p:txBody>
+          <a:bodyPr rtlCol="0" anchor="ctr" wrap="none" lIns="0" rIns="0"/>
+          <a:lstStyle/>
+          <a:p>
+            <a:pPr algn="ctr"/>
+            <a:r>
+              <a:rPr sz="1500" b="1">
+                <a:solidFill>
+                  <a:srgbClr val="FFFFFF"/>
+                </a:solidFill>
+                <a:latin typeface="Calibri"/>
+              </a:rPr>
+              <a:t>4</a:t>
+            </a:r>
+          </a:p>
+        </p:txBody>
+      </p:sp>
+      <p:sp>
+        <p:nvSpPr>
+          <p:cNvPr id="15" name="TextBox 14"/>
+          <p:cNvSpPr txBox="1"/>
+          <p:nvPr/>
+        </p:nvSpPr>
+        <p:spPr>
+          <a:xfrm>
+            <a:off x="1417320" y="4809744"/>
+            <a:ext cx="2377440" cy="960120"/>
+          </a:xfrm>
+          <a:prstGeom prst="rect">
+            <a:avLst/>
+          </a:prstGeom>
+          <a:noFill/>
+        </p:spPr>
+        <p:txBody>
+          <a:bodyPr wrap="square" anchor="ctr" lIns="0" rIns="0" tIns="0" bIns="0">
+            <a:spAutoFit/>
+          </a:bodyPr>
+          <a:lstStyle/>
+          <a:p>
+            <a:pPr algn="l">
+              <a:lnSpc>
+                <a:spcPct val="100000"/>
+              </a:lnSpc>
+              <a:spcAft>
+                <a:spcPts val="600"/>
+              </a:spcAft>
+            </a:pPr>
+            <a:r>
+              <a:rPr sz="1550" b="1" i="0">
+                <a:solidFill>
+                  <a:srgbClr val="1E2761"/>
+                </a:solidFill>
+                <a:latin typeface="Calibri"/>
+              </a:rPr>
+              <a:t>No domain join needed</a:t>
+            </a:r>
+          </a:p>
+        </p:txBody>
+      </p:sp>
+      <p:sp>
+        <p:nvSpPr>
+          <p:cNvPr id="16" name="TextBox 15"/>
+          <p:cNvSpPr txBox="1"/>
+          <p:nvPr/>
+        </p:nvSpPr>
+        <p:spPr>
+          <a:xfrm>
+            <a:off x="3977639" y="4809744"/>
+            <a:ext cx="7635240" cy="960120"/>
+          </a:xfrm>
+          <a:prstGeom prst="rect">
+            <a:avLst/>
+          </a:prstGeom>
+          <a:noFill/>
+        </p:spPr>
+        <p:txBody>
+          <a:bodyPr wrap="square" anchor="ctr" lIns="0" rIns="0" tIns="0" bIns="0">
+            <a:spAutoFit/>
+          </a:bodyPr>
+          <a:lstStyle/>
+          <a:p>
+            <a:pPr algn="l">
+              <a:lnSpc>
+                <a:spcPct val="108000"/>
+              </a:lnSpc>
+              <a:spcAft>
+                <a:spcPts val="600"/>
+              </a:spcAft>
+            </a:pPr>
+            <a:r>
+              <a:rPr sz="1300" b="0" i="0">
+                <a:solidFill>
+                  <a:srgbClr val="5A5A6E"/>
+                </a:solidFill>
+                <a:latin typeface="Calibri"/>
+              </a:rPr>
+              <a:t>A non-joined machine CAN mount with explicit AD credentials — as long as steps 1–3 work. Domain join is about the machine, line of sight is about the network.</a:t>
+            </a:r>
+          </a:p>
+        </p:txBody>
+      </p:sp>
+      <p:sp>
+        <p:nvSpPr>
+          <p:cNvPr id="17" name="TextBox 16"/>
+          <p:cNvSpPr txBox="1"/>
+          <p:nvPr/>
+        </p:nvSpPr>
+        <p:spPr>
+          <a:xfrm>
+            <a:off x="548640" y="6446520"/>
+            <a:ext cx="11064240" cy="320040"/>
           </a:xfrm>
           <a:prstGeom prst="rect">
             <a:avLst/>
@@ -5793,57 +6133,6 @@
           <a:p>
             <a:pPr algn="l">
               <a:lnSpc>
-                <a:spcPct val="115000"/>
-              </a:lnSpc>
-              <a:spcAft>
-                <a:spcPts val="600"/>
-              </a:spcAft>
-            </a:pPr>
-            <a:r>
-              <a:rPr sz="1450" b="1" i="0">
-                <a:solidFill>
-                  <a:srgbClr val="1E2761"/>
-                </a:solidFill>
-                <a:latin typeface="Calibri"/>
-              </a:rPr>
-              <a:t>Why this matters for troubleshooting: </a:t>
-            </a:r>
-            <a:r>
-              <a:rPr sz="1450" b="0" i="0">
-                <a:solidFill>
-                  <a:srgbClr val="202440"/>
-                </a:solidFill>
-                <a:latin typeface="Calibri"/>
-              </a:rPr>
-              <a:t>with AD DS auth, per-identity RBAC is matched via the user's SID synced to Entra. Unsynced user → no role → access denied even though Kerberos succeeded. Default share permission sidesteps the sync requirement — but note it applies to EVERY file share in the storage account, so treat it as a deliberate security decision. NTFS (layer 3) still applies either way.</a:t>
-            </a:r>
-          </a:p>
-        </p:txBody>
-      </p:sp>
-      <p:sp>
-        <p:nvSpPr>
-          <p:cNvPr id="8" name="TextBox 7"/>
-          <p:cNvSpPr txBox="1"/>
-          <p:nvPr/>
-        </p:nvSpPr>
-        <p:spPr>
-          <a:xfrm>
-            <a:off x="548640" y="6446520"/>
-            <a:ext cx="11064240" cy="320040"/>
-          </a:xfrm>
-          <a:prstGeom prst="rect">
-            <a:avLst/>
-          </a:prstGeom>
-          <a:noFill/>
-        </p:spPr>
-        <p:txBody>
-          <a:bodyPr wrap="square" anchor="t" lIns="0" rIns="0" tIns="0" bIns="0">
-            <a:spAutoFit/>
-          </a:bodyPr>
-          <a:lstStyle/>
-          <a:p>
-            <a:pPr algn="l">
-              <a:lnSpc>
                 <a:spcPct val="100000"/>
               </a:lnSpc>
               <a:spcAft>
@@ -5857,7 +6146,7 @@
                 </a:solidFill>
                 <a:latin typeface="Calibri"/>
               </a:rPr>
-              <a:t>RBAC changes typically take up to ~30 minutes to propagate — "it still fails" right after assignment is usually just that</a:t>
+              <a:t>Multi-forest bonus: the share joins ONE domain in ONE forest — other forests need a trust + name-suffix routing (or an SPN alias + CNAME)</a:t>
             </a:r>
           </a:p>
         </p:txBody>
@@ -5961,7 +6250,7 @@
                 </a:solidFill>
                 <a:latin typeface="Calibri"/>
               </a:rPr>
-              <a:t>CONCEPTS</a:t>
+              <a:t>CONCEPTS · 2026 HARDENING</a:t>
             </a:r>
           </a:p>
         </p:txBody>
@@ -6003,7 +6292,7 @@
                 </a:solidFill>
                 <a:latin typeface="Cambria"/>
               </a:rPr>
-              <a:t>Auth is only step one: three doors to the data</a:t>
+              <a:t>Happening right now: the RC4 retirement</a:t>
             </a:r>
           </a:p>
         </p:txBody>
@@ -6016,8 +6305,8 @@
         </p:nvSpPr>
         <p:spPr>
           <a:xfrm>
-            <a:off x="548640" y="1508760"/>
-            <a:ext cx="11091672" cy="1371600"/>
+            <a:off x="548640" y="1463040"/>
+            <a:ext cx="11064240" cy="1600200"/>
           </a:xfrm>
           <a:prstGeom prst="roundRect">
             <a:avLst>
@@ -6025,7 +6314,7 @@
             </a:avLst>
           </a:prstGeom>
           <a:solidFill>
-            <a:srgbClr val="F3F6FD"/>
+            <a:srgbClr val="FDF4E0"/>
           </a:solidFill>
           <a:ln>
             <a:noFill/>
@@ -6056,67 +6345,14 @@
       </p:sp>
       <p:sp>
         <p:nvSpPr>
-          <p:cNvPr id="6" name="Oval 5"/>
-          <p:cNvSpPr/>
-          <p:nvPr/>
-        </p:nvSpPr>
-        <p:spPr>
-          <a:xfrm>
-            <a:off x="822960" y="1874519"/>
-            <a:ext cx="640080" cy="640080"/>
-          </a:xfrm>
-          <a:prstGeom prst="ellipse">
-            <a:avLst/>
-          </a:prstGeom>
-          <a:solidFill>
-            <a:srgbClr val="2A367E"/>
-          </a:solidFill>
-          <a:ln>
-            <a:noFill/>
-          </a:ln>
-          <a:effectLst/>
-        </p:spPr>
-        <p:style>
-          <a:lnRef idx="1">
-            <a:schemeClr val="accent1"/>
-          </a:lnRef>
-          <a:fillRef idx="3">
-            <a:schemeClr val="accent1"/>
-          </a:fillRef>
-          <a:effectRef idx="2">
-            <a:schemeClr val="accent1"/>
-          </a:effectRef>
-          <a:fontRef idx="minor">
-            <a:schemeClr val="lt1"/>
-          </a:fontRef>
-        </p:style>
-        <p:txBody>
-          <a:bodyPr rtlCol="0" anchor="ctr" wrap="none" lIns="0" rIns="0"/>
-          <a:lstStyle/>
-          <a:p>
-            <a:pPr algn="ctr"/>
-            <a:r>
-              <a:rPr sz="1800" b="1">
-                <a:solidFill>
-                  <a:srgbClr val="FFFFFF"/>
-                </a:solidFill>
-                <a:latin typeface="Calibri"/>
-              </a:rPr>
-              <a:t>1</a:t>
-            </a:r>
-          </a:p>
-        </p:txBody>
-      </p:sp>
-      <p:sp>
-        <p:nvSpPr>
-          <p:cNvPr id="7" name="TextBox 6"/>
+          <p:cNvPr id="6" name="TextBox 5"/>
           <p:cNvSpPr txBox="1"/>
           <p:nvPr/>
         </p:nvSpPr>
         <p:spPr>
           <a:xfrm>
-            <a:off x="1737360" y="1673351"/>
-            <a:ext cx="4023360" cy="1097280"/>
+            <a:off x="868680" y="1664208"/>
+            <a:ext cx="10424160" cy="1234440"/>
           </a:xfrm>
           <a:prstGeom prst="rect">
             <a:avLst/>
@@ -6131,53 +6367,219 @@
           <a:p>
             <a:pPr algn="l">
               <a:lnSpc>
-                <a:spcPct val="105000"/>
+                <a:spcPct val="118000"/>
               </a:lnSpc>
               <a:spcAft>
                 <a:spcPts val="600"/>
               </a:spcAft>
             </a:pPr>
             <a:r>
-              <a:rPr sz="1650" b="1" i="0">
+              <a:rPr sz="1550" b="1" i="0">
                 <a:solidFill>
                   <a:srgbClr val="1E2761"/>
                 </a:solidFill>
                 <a:latin typeface="Calibri"/>
               </a:rPr>
-              <a:t>Storage firewall / network</a:t>
-            </a:r>
-          </a:p>
-          <a:p>
-            <a:pPr algn="l">
+              <a:t>Windows hardening has been phasing out RC4-HMAC since April 2026, and the July 2026 servicing wave flipped AD DS defaults to AES-256 — enforcement is live now. </a:t>
+            </a:r>
+            <a:r>
+              <a:rPr sz="1500" b="0" i="0">
+                <a:solidFill>
+                  <a:srgbClr val="202440"/>
+                </a:solidFill>
+                <a:latin typeface="Calibri"/>
+              </a:rPr>
+              <a:t>Storage accounts domain-joined before 2023 — or joined manually with RC4 — are failing mounts as patched clients and DCs refuse RC4 tickets.</a:t>
+            </a:r>
+          </a:p>
+        </p:txBody>
+      </p:sp>
+      <p:sp>
+        <p:nvSpPr>
+          <p:cNvPr id="7" name="TextBox 6"/>
+          <p:cNvSpPr txBox="1"/>
+          <p:nvPr/>
+        </p:nvSpPr>
+        <p:spPr>
+          <a:xfrm>
+            <a:off x="548640" y="3291840"/>
+            <a:ext cx="5394960" cy="365760"/>
+          </a:xfrm>
+          <a:prstGeom prst="rect">
+            <a:avLst/>
+          </a:prstGeom>
+          <a:noFill/>
+        </p:spPr>
+        <p:txBody>
+          <a:bodyPr wrap="square" anchor="t" lIns="0" rIns="0" tIns="0" bIns="0">
+            <a:spAutoFit/>
+          </a:bodyPr>
+          <a:lstStyle/>
+          <a:p>
+            <a:pPr algn="l">
+              <a:lnSpc>
+                <a:spcPct val="100000"/>
+              </a:lnSpc>
+              <a:spcAft>
+                <a:spcPts val="600"/>
+              </a:spcAft>
+            </a:pPr>
+            <a:r>
+              <a:rPr sz="1600" b="1" i="0">
+                <a:solidFill>
+                  <a:srgbClr val="1E2761"/>
+                </a:solidFill>
+                <a:latin typeface="Calibri"/>
+              </a:rPr>
+              <a:t>Am I affected? (AD DS auth only)</a:t>
+            </a:r>
+          </a:p>
+        </p:txBody>
+      </p:sp>
+      <p:sp>
+        <p:nvSpPr>
+          <p:cNvPr id="8" name="TextBox 7"/>
+          <p:cNvSpPr txBox="1"/>
+          <p:nvPr/>
+        </p:nvSpPr>
+        <p:spPr>
+          <a:xfrm>
+            <a:off x="548640" y="3703320"/>
+            <a:ext cx="5394960" cy="2194560"/>
+          </a:xfrm>
+          <a:prstGeom prst="rect">
+            <a:avLst/>
+          </a:prstGeom>
+          <a:noFill/>
+        </p:spPr>
+        <p:txBody>
+          <a:bodyPr wrap="square" lIns="0" rIns="0" tIns="0">
+            <a:spAutoFit/>
+          </a:bodyPr>
+          <a:lstStyle/>
+          <a:p>
+            <a:pPr>
               <a:lnSpc>
                 <a:spcPct val="105000"/>
               </a:lnSpc>
               <a:spcAft>
-                <a:spcPts val="600"/>
-              </a:spcAft>
-            </a:pPr>
-            <a:r>
-              <a:rPr sz="1250" b="0" i="0">
-                <a:solidFill>
-                  <a:srgbClr val="5A5A6E"/>
-                </a:solidFill>
-                <a:latin typeface="Calibri"/>
-              </a:rPr>
-              <a:t>Public endpoint rules, VNets, private endpoints — and port 445 must be open</a:t>
-            </a:r>
-          </a:p>
-        </p:txBody>
-      </p:sp>
-      <p:sp>
-        <p:nvSpPr>
-          <p:cNvPr id="8" name="TextBox 7"/>
+                <a:spcPts val="1000"/>
+              </a:spcAft>
+            </a:pPr>
+            <a:r>
+              <a:rPr sz="1300">
+                <a:solidFill>
+                  <a:srgbClr val="2A367E"/>
+                </a:solidFill>
+                <a:latin typeface="Calibri"/>
+              </a:rPr>
+              <a:t>▪  </a:t>
+            </a:r>
+            <a:r>
+              <a:rPr b="1" sz="1300">
+                <a:solidFill>
+                  <a:srgbClr val="202440"/>
+                </a:solidFill>
+                <a:latin typeface="Calibri"/>
+              </a:rPr>
+              <a:t>Check the AD object:</a:t>
+            </a:r>
+            <a:r>
+              <a:rPr sz="1300">
+                <a:solidFill>
+                  <a:srgbClr val="202440"/>
+                </a:solidFill>
+                <a:latin typeface="Calibri"/>
+              </a:rPr>
+              <a:t> Get-ADComputer &lt;sa&gt; -Properties msDS-SupportedEncryptionTypes · KerberosEncryptionType</a:t>
+            </a:r>
+          </a:p>
+          <a:p>
+            <a:pPr>
+              <a:lnSpc>
+                <a:spcPct val="105000"/>
+              </a:lnSpc>
+              <a:spcAft>
+                <a:spcPts val="1000"/>
+              </a:spcAft>
+            </a:pPr>
+            <a:r>
+              <a:rPr sz="1300">
+                <a:solidFill>
+                  <a:srgbClr val="2A367E"/>
+                </a:solidFill>
+                <a:latin typeface="Calibri"/>
+              </a:rPr>
+              <a:t>▪  </a:t>
+            </a:r>
+            <a:r>
+              <a:rPr b="1" sz="1300">
+                <a:solidFill>
+                  <a:srgbClr val="202440"/>
+                </a:solidFill>
+                <a:latin typeface="Calibri"/>
+              </a:rPr>
+              <a:t>Check the ticket:</a:t>
+            </a:r>
+            <a:r>
+              <a:rPr sz="1300">
+                <a:solidFill>
+                  <a:srgbClr val="202440"/>
+                </a:solidFill>
+                <a:latin typeface="Calibri"/>
+              </a:rPr>
+              <a:t> klist → the cifs ticket's etype after a mount</a:t>
+            </a:r>
+          </a:p>
+          <a:p>
+            <a:pPr>
+              <a:lnSpc>
+                <a:spcPct val="105000"/>
+              </a:lnSpc>
+              <a:spcAft>
+                <a:spcPts val="1000"/>
+              </a:spcAft>
+            </a:pPr>
+            <a:r>
+              <a:rPr sz="1300">
+                <a:solidFill>
+                  <a:srgbClr val="2A367E"/>
+                </a:solidFill>
+                <a:latin typeface="Calibri"/>
+              </a:rPr>
+              <a:t>▪  </a:t>
+            </a:r>
+            <a:r>
+              <a:rPr b="1" sz="1300">
+                <a:solidFill>
+                  <a:srgbClr val="202440"/>
+                </a:solidFill>
+                <a:latin typeface="Calibri"/>
+              </a:rPr>
+              <a:t>Check the SA:</a:t>
+            </a:r>
+            <a:r>
+              <a:rPr sz="1300">
+                <a:solidFill>
+                  <a:srgbClr val="202440"/>
+                </a:solidFill>
+                <a:latin typeface="Calibri"/>
+              </a:rPr>
+              <a:t> old deployments may miss SamAccountName — required for AES-256</a:t>
+            </a:r>
+          </a:p>
+        </p:txBody>
+      </p:sp>
+      <p:sp>
+        <p:nvSpPr>
+          <p:cNvPr id="9" name="TextBox 8"/>
           <p:cNvSpPr txBox="1"/>
           <p:nvPr/>
         </p:nvSpPr>
         <p:spPr>
           <a:xfrm>
-            <a:off x="6126480" y="1673351"/>
-            <a:ext cx="5257800" cy="1097280"/>
+            <a:off x="6309360" y="3291840"/>
+            <a:ext cx="5303520" cy="365760"/>
           </a:xfrm>
           <a:prstGeom prst="rect">
             <a:avLst/>
@@ -6192,138 +6594,154 @@
           <a:p>
             <a:pPr algn="l">
               <a:lnSpc>
-                <a:spcPct val="105000"/>
+                <a:spcPct val="100000"/>
               </a:lnSpc>
               <a:spcAft>
                 <a:spcPts val="600"/>
               </a:spcAft>
             </a:pPr>
             <a:r>
-              <a:rPr sz="1200" b="1" i="0">
-                <a:solidFill>
-                  <a:srgbClr val="F96167"/>
-                </a:solidFill>
-                <a:latin typeface="Calibri"/>
-              </a:rPr>
-              <a:t>When it's the culprit:</a:t>
-            </a:r>
-          </a:p>
-          <a:p>
-            <a:pPr algn="l">
+              <a:rPr sz="1600" b="1" i="0">
+                <a:solidFill>
+                  <a:srgbClr val="1E2761"/>
+                </a:solidFill>
+                <a:latin typeface="Calibri"/>
+              </a:rPr>
+              <a:t>Migrate</a:t>
+            </a:r>
+          </a:p>
+        </p:txBody>
+      </p:sp>
+      <p:sp>
+        <p:nvSpPr>
+          <p:cNvPr id="10" name="TextBox 9"/>
+          <p:cNvSpPr txBox="1"/>
+          <p:nvPr/>
+        </p:nvSpPr>
+        <p:spPr>
+          <a:xfrm>
+            <a:off x="6309360" y="3703320"/>
+            <a:ext cx="5303520" cy="2194560"/>
+          </a:xfrm>
+          <a:prstGeom prst="rect">
+            <a:avLst/>
+          </a:prstGeom>
+          <a:noFill/>
+        </p:spPr>
+        <p:txBody>
+          <a:bodyPr wrap="square" lIns="0" rIns="0" tIns="0">
+            <a:spAutoFit/>
+          </a:bodyPr>
+          <a:lstStyle/>
+          <a:p>
+            <a:pPr>
               <a:lnSpc>
                 <a:spcPct val="105000"/>
               </a:lnSpc>
               <a:spcAft>
-                <a:spcPts val="600"/>
-              </a:spcAft>
-            </a:pPr>
-            <a:r>
-              <a:rPr sz="1250" b="0" i="0">
+                <a:spcPts val="1000"/>
+              </a:spcAft>
+            </a:pPr>
+            <a:r>
+              <a:rPr sz="1300">
+                <a:solidFill>
+                  <a:srgbClr val="2A367E"/>
+                </a:solidFill>
+                <a:latin typeface="Calibri"/>
+              </a:rPr>
+              <a:t>▪  </a:t>
+            </a:r>
+            <a:r>
+              <a:rPr b="1" sz="1300">
                 <a:solidFill>
                   <a:srgbClr val="202440"/>
                 </a:solidFill>
                 <a:latin typeface="Calibri"/>
               </a:rPr>
-              <a:t>System error 64 / 53 · connection timeouts</a:t>
-            </a:r>
-          </a:p>
-        </p:txBody>
-      </p:sp>
-      <p:sp>
-        <p:nvSpPr>
-          <p:cNvPr id="9" name="Rounded Rectangle 8"/>
-          <p:cNvSpPr/>
-          <p:nvPr/>
-        </p:nvSpPr>
-        <p:spPr>
-          <a:xfrm>
-            <a:off x="548640" y="3044952"/>
-            <a:ext cx="11091672" cy="1371600"/>
-          </a:xfrm>
-          <a:prstGeom prst="roundRect">
-            <a:avLst>
-              <a:gd name="adj" fmla="val 8000"/>
-            </a:avLst>
-          </a:prstGeom>
-          <a:solidFill>
-            <a:srgbClr val="F3F6FD"/>
-          </a:solidFill>
-          <a:ln>
-            <a:noFill/>
-          </a:ln>
-          <a:effectLst/>
-        </p:spPr>
-        <p:style>
-          <a:lnRef idx="1">
-            <a:schemeClr val="accent1"/>
-          </a:lnRef>
-          <a:fillRef idx="3">
-            <a:schemeClr val="accent1"/>
-          </a:fillRef>
-          <a:effectRef idx="2">
-            <a:schemeClr val="accent1"/>
-          </a:effectRef>
-          <a:fontRef idx="minor">
-            <a:schemeClr val="lt1"/>
-          </a:fontRef>
-        </p:style>
-        <p:txBody>
-          <a:bodyPr rtlCol="0" anchor="ctr"/>
-          <a:lstStyle/>
-          <a:p>
-            <a:pPr algn="ctr"/>
-          </a:p>
-        </p:txBody>
-      </p:sp>
-      <p:sp>
-        <p:nvSpPr>
-          <p:cNvPr id="10" name="Oval 9"/>
-          <p:cNvSpPr/>
-          <p:nvPr/>
-        </p:nvSpPr>
-        <p:spPr>
-          <a:xfrm>
-            <a:off x="822960" y="3410712"/>
-            <a:ext cx="640080" cy="640080"/>
-          </a:xfrm>
-          <a:prstGeom prst="ellipse">
-            <a:avLst/>
-          </a:prstGeom>
-          <a:solidFill>
-            <a:srgbClr val="F2C14E"/>
-          </a:solidFill>
-          <a:ln>
-            <a:noFill/>
-          </a:ln>
-          <a:effectLst/>
-        </p:spPr>
-        <p:style>
-          <a:lnRef idx="1">
-            <a:schemeClr val="accent1"/>
-          </a:lnRef>
-          <a:fillRef idx="3">
-            <a:schemeClr val="accent1"/>
-          </a:fillRef>
-          <a:effectRef idx="2">
-            <a:schemeClr val="accent1"/>
-          </a:effectRef>
-          <a:fontRef idx="minor">
-            <a:schemeClr val="lt1"/>
-          </a:fontRef>
-        </p:style>
-        <p:txBody>
-          <a:bodyPr rtlCol="0" anchor="ctr" wrap="none" lIns="0" rIns="0"/>
-          <a:lstStyle/>
-          <a:p>
-            <a:pPr algn="ctr"/>
-            <a:r>
-              <a:rPr sz="1800" b="1">
-                <a:solidFill>
-                  <a:srgbClr val="FFFFFF"/>
-                </a:solidFill>
-                <a:latin typeface="Calibri"/>
-              </a:rPr>
-              <a:t>2</a:t>
+              <a:t>AzFilesHybrid:</a:t>
+            </a:r>
+            <a:r>
+              <a:rPr sz="1300">
+                <a:solidFill>
+                  <a:srgbClr val="202440"/>
+                </a:solidFill>
+                <a:latin typeface="Calibri"/>
+              </a:rPr>
+              <a:t> Update-AzStorageAccountAuthForAES256 does the whole dance</a:t>
+            </a:r>
+          </a:p>
+          <a:p>
+            <a:pPr>
+              <a:lnSpc>
+                <a:spcPct val="105000"/>
+              </a:lnSpc>
+              <a:spcAft>
+                <a:spcPts val="1000"/>
+              </a:spcAft>
+            </a:pPr>
+            <a:r>
+              <a:rPr sz="1300">
+                <a:solidFill>
+                  <a:srgbClr val="2A367E"/>
+                </a:solidFill>
+                <a:latin typeface="Calibri"/>
+              </a:rPr>
+              <a:t>▪  </a:t>
+            </a:r>
+            <a:r>
+              <a:rPr b="1" sz="1300">
+                <a:solidFill>
+                  <a:srgbClr val="202440"/>
+                </a:solidFill>
+                <a:latin typeface="Calibri"/>
+              </a:rPr>
+              <a:t>Manually:</a:t>
+            </a:r>
+            <a:r>
+              <a:rPr sz="1300">
+                <a:solidFill>
+                  <a:srgbClr val="202440"/>
+                </a:solidFill>
+                <a:latin typeface="Calibri"/>
+              </a:rPr>
+              <a:t> set AES256 on the account, register SamAccountName, THEN rotate the kerb key — order matters (AES keys derive from the password at set time)</a:t>
+            </a:r>
+          </a:p>
+          <a:p>
+            <a:pPr>
+              <a:lnSpc>
+                <a:spcPct val="105000"/>
+              </a:lnSpc>
+              <a:spcAft>
+                <a:spcPts val="1000"/>
+              </a:spcAft>
+            </a:pPr>
+            <a:r>
+              <a:rPr sz="1300">
+                <a:solidFill>
+                  <a:srgbClr val="2A367E"/>
+                </a:solidFill>
+                <a:latin typeface="Calibri"/>
+              </a:rPr>
+              <a:t>▪  </a:t>
+            </a:r>
+            <a:r>
+              <a:rPr b="1" sz="1300">
+                <a:solidFill>
+                  <a:srgbClr val="202440"/>
+                </a:solidFill>
+                <a:latin typeface="Calibri"/>
+              </a:rPr>
+              <a:t>Our lab</a:t>
+            </a:r>
+            <a:r>
+              <a:rPr sz="1300">
+                <a:solidFill>
+                  <a:srgbClr val="202440"/>
+                </a:solidFill>
+                <a:latin typeface="Calibri"/>
+              </a:rPr>
+              <a:t> deploys AES-256 from the start — you'll see it in klist</a:t>
             </a:r>
           </a:p>
         </p:txBody>
@@ -6336,8 +6754,8 @@
         </p:nvSpPr>
         <p:spPr>
           <a:xfrm>
-            <a:off x="1737360" y="3209544"/>
-            <a:ext cx="4023360" cy="1097280"/>
+            <a:off x="548640" y="6446520"/>
+            <a:ext cx="11064240" cy="320040"/>
           </a:xfrm>
           <a:prstGeom prst="rect">
             <a:avLst/>
@@ -6352,349 +6770,6 @@
           <a:p>
             <a:pPr algn="l">
               <a:lnSpc>
-                <a:spcPct val="105000"/>
-              </a:lnSpc>
-              <a:spcAft>
-                <a:spcPts val="600"/>
-              </a:spcAft>
-            </a:pPr>
-            <a:r>
-              <a:rPr sz="1650" b="1" i="0">
-                <a:solidFill>
-                  <a:srgbClr val="1E2761"/>
-                </a:solidFill>
-                <a:latin typeface="Calibri"/>
-              </a:rPr>
-              <a:t>Share-level (RBAC)</a:t>
-            </a:r>
-          </a:p>
-          <a:p>
-            <a:pPr algn="l">
-              <a:lnSpc>
-                <a:spcPct val="105000"/>
-              </a:lnSpc>
-              <a:spcAft>
-                <a:spcPts val="600"/>
-              </a:spcAft>
-            </a:pPr>
-            <a:r>
-              <a:rPr sz="1250" b="0" i="0">
-                <a:solidFill>
-                  <a:srgbClr val="5A5A6E"/>
-                </a:solidFill>
-                <a:latin typeface="Calibri"/>
-              </a:rPr>
-              <a:t>Azure role or DefaultSharePermission decides who may enter the share</a:t>
-            </a:r>
-          </a:p>
-        </p:txBody>
-      </p:sp>
-      <p:sp>
-        <p:nvSpPr>
-          <p:cNvPr id="12" name="TextBox 11"/>
-          <p:cNvSpPr txBox="1"/>
-          <p:nvPr/>
-        </p:nvSpPr>
-        <p:spPr>
-          <a:xfrm>
-            <a:off x="6126480" y="3209544"/>
-            <a:ext cx="5257800" cy="1097280"/>
-          </a:xfrm>
-          <a:prstGeom prst="rect">
-            <a:avLst/>
-          </a:prstGeom>
-          <a:noFill/>
-        </p:spPr>
-        <p:txBody>
-          <a:bodyPr wrap="square" anchor="t" lIns="0" rIns="0" tIns="0" bIns="0">
-            <a:spAutoFit/>
-          </a:bodyPr>
-          <a:lstStyle/>
-          <a:p>
-            <a:pPr algn="l">
-              <a:lnSpc>
-                <a:spcPct val="105000"/>
-              </a:lnSpc>
-              <a:spcAft>
-                <a:spcPts val="600"/>
-              </a:spcAft>
-            </a:pPr>
-            <a:r>
-              <a:rPr sz="1200" b="1" i="0">
-                <a:solidFill>
-                  <a:srgbClr val="F96167"/>
-                </a:solidFill>
-                <a:latin typeface="Calibri"/>
-              </a:rPr>
-              <a:t>When it's the culprit:</a:t>
-            </a:r>
-          </a:p>
-          <a:p>
-            <a:pPr algn="l">
-              <a:lnSpc>
-                <a:spcPct val="105000"/>
-              </a:lnSpc>
-              <a:spcAft>
-                <a:spcPts val="600"/>
-              </a:spcAft>
-            </a:pPr>
-            <a:r>
-              <a:rPr sz="1250" b="0" i="0">
-                <a:solidFill>
-                  <a:srgbClr val="202440"/>
-                </a:solidFill>
-                <a:latin typeface="Calibri"/>
-              </a:rPr>
-              <a:t>Access denied at mount — even with a perfect Kerberos ticket</a:t>
-            </a:r>
-          </a:p>
-        </p:txBody>
-      </p:sp>
-      <p:sp>
-        <p:nvSpPr>
-          <p:cNvPr id="13" name="Rounded Rectangle 12"/>
-          <p:cNvSpPr/>
-          <p:nvPr/>
-        </p:nvSpPr>
-        <p:spPr>
-          <a:xfrm>
-            <a:off x="548640" y="4581144"/>
-            <a:ext cx="11091672" cy="1371600"/>
-          </a:xfrm>
-          <a:prstGeom prst="roundRect">
-            <a:avLst>
-              <a:gd name="adj" fmla="val 8000"/>
-            </a:avLst>
-          </a:prstGeom>
-          <a:solidFill>
-            <a:srgbClr val="F3F6FD"/>
-          </a:solidFill>
-          <a:ln>
-            <a:noFill/>
-          </a:ln>
-          <a:effectLst/>
-        </p:spPr>
-        <p:style>
-          <a:lnRef idx="1">
-            <a:schemeClr val="accent1"/>
-          </a:lnRef>
-          <a:fillRef idx="3">
-            <a:schemeClr val="accent1"/>
-          </a:fillRef>
-          <a:effectRef idx="2">
-            <a:schemeClr val="accent1"/>
-          </a:effectRef>
-          <a:fontRef idx="minor">
-            <a:schemeClr val="lt1"/>
-          </a:fontRef>
-        </p:style>
-        <p:txBody>
-          <a:bodyPr rtlCol="0" anchor="ctr"/>
-          <a:lstStyle/>
-          <a:p>
-            <a:pPr algn="ctr"/>
-          </a:p>
-        </p:txBody>
-      </p:sp>
-      <p:sp>
-        <p:nvSpPr>
-          <p:cNvPr id="14" name="Oval 13"/>
-          <p:cNvSpPr/>
-          <p:nvPr/>
-        </p:nvSpPr>
-        <p:spPr>
-          <a:xfrm>
-            <a:off x="822960" y="4946904"/>
-            <a:ext cx="640080" cy="640080"/>
-          </a:xfrm>
-          <a:prstGeom prst="ellipse">
-            <a:avLst/>
-          </a:prstGeom>
-          <a:solidFill>
-            <a:srgbClr val="3DA56E"/>
-          </a:solidFill>
-          <a:ln>
-            <a:noFill/>
-          </a:ln>
-          <a:effectLst/>
-        </p:spPr>
-        <p:style>
-          <a:lnRef idx="1">
-            <a:schemeClr val="accent1"/>
-          </a:lnRef>
-          <a:fillRef idx="3">
-            <a:schemeClr val="accent1"/>
-          </a:fillRef>
-          <a:effectRef idx="2">
-            <a:schemeClr val="accent1"/>
-          </a:effectRef>
-          <a:fontRef idx="minor">
-            <a:schemeClr val="lt1"/>
-          </a:fontRef>
-        </p:style>
-        <p:txBody>
-          <a:bodyPr rtlCol="0" anchor="ctr" wrap="none" lIns="0" rIns="0"/>
-          <a:lstStyle/>
-          <a:p>
-            <a:pPr algn="ctr"/>
-            <a:r>
-              <a:rPr sz="1800" b="1">
-                <a:solidFill>
-                  <a:srgbClr val="FFFFFF"/>
-                </a:solidFill>
-                <a:latin typeface="Calibri"/>
-              </a:rPr>
-              <a:t>3</a:t>
-            </a:r>
-          </a:p>
-        </p:txBody>
-      </p:sp>
-      <p:sp>
-        <p:nvSpPr>
-          <p:cNvPr id="15" name="TextBox 14"/>
-          <p:cNvSpPr txBox="1"/>
-          <p:nvPr/>
-        </p:nvSpPr>
-        <p:spPr>
-          <a:xfrm>
-            <a:off x="1737360" y="4745736"/>
-            <a:ext cx="4023360" cy="1097280"/>
-          </a:xfrm>
-          <a:prstGeom prst="rect">
-            <a:avLst/>
-          </a:prstGeom>
-          <a:noFill/>
-        </p:spPr>
-        <p:txBody>
-          <a:bodyPr wrap="square" anchor="t" lIns="0" rIns="0" tIns="0" bIns="0">
-            <a:spAutoFit/>
-          </a:bodyPr>
-          <a:lstStyle/>
-          <a:p>
-            <a:pPr algn="l">
-              <a:lnSpc>
-                <a:spcPct val="105000"/>
-              </a:lnSpc>
-              <a:spcAft>
-                <a:spcPts val="600"/>
-              </a:spcAft>
-            </a:pPr>
-            <a:r>
-              <a:rPr sz="1650" b="1" i="0">
-                <a:solidFill>
-                  <a:srgbClr val="1E2761"/>
-                </a:solidFill>
-                <a:latin typeface="Calibri"/>
-              </a:rPr>
-              <a:t>File/directory (NTFS ACLs)</a:t>
-            </a:r>
-          </a:p>
-          <a:p>
-            <a:pPr algn="l">
-              <a:lnSpc>
-                <a:spcPct val="105000"/>
-              </a:lnSpc>
-              <a:spcAft>
-                <a:spcPts val="600"/>
-              </a:spcAft>
-            </a:pPr>
-            <a:r>
-              <a:rPr sz="1250" b="0" i="0">
-                <a:solidFill>
-                  <a:srgbClr val="5A5A6E"/>
-                </a:solidFill>
-                <a:latin typeface="Calibri"/>
-              </a:rPr>
-              <a:t>Windows-style ACLs on folders and files inside the share</a:t>
-            </a:r>
-          </a:p>
-        </p:txBody>
-      </p:sp>
-      <p:sp>
-        <p:nvSpPr>
-          <p:cNvPr id="16" name="TextBox 15"/>
-          <p:cNvSpPr txBox="1"/>
-          <p:nvPr/>
-        </p:nvSpPr>
-        <p:spPr>
-          <a:xfrm>
-            <a:off x="6126480" y="4745736"/>
-            <a:ext cx="5257800" cy="1097280"/>
-          </a:xfrm>
-          <a:prstGeom prst="rect">
-            <a:avLst/>
-          </a:prstGeom>
-          <a:noFill/>
-        </p:spPr>
-        <p:txBody>
-          <a:bodyPr wrap="square" anchor="t" lIns="0" rIns="0" tIns="0" bIns="0">
-            <a:spAutoFit/>
-          </a:bodyPr>
-          <a:lstStyle/>
-          <a:p>
-            <a:pPr algn="l">
-              <a:lnSpc>
-                <a:spcPct val="105000"/>
-              </a:lnSpc>
-              <a:spcAft>
-                <a:spcPts val="600"/>
-              </a:spcAft>
-            </a:pPr>
-            <a:r>
-              <a:rPr sz="1200" b="1" i="0">
-                <a:solidFill>
-                  <a:srgbClr val="F96167"/>
-                </a:solidFill>
-                <a:latin typeface="Calibri"/>
-              </a:rPr>
-              <a:t>When it's the culprit:</a:t>
-            </a:r>
-          </a:p>
-          <a:p>
-            <a:pPr algn="l">
-              <a:lnSpc>
-                <a:spcPct val="105000"/>
-              </a:lnSpc>
-              <a:spcAft>
-                <a:spcPts val="600"/>
-              </a:spcAft>
-            </a:pPr>
-            <a:r>
-              <a:rPr sz="1250" b="0" i="0">
-                <a:solidFill>
-                  <a:srgbClr val="202440"/>
-                </a:solidFill>
-                <a:latin typeface="Calibri"/>
-              </a:rPr>
-              <a:t>Access denied on specific paths after a successful mount</a:t>
-            </a:r>
-          </a:p>
-        </p:txBody>
-      </p:sp>
-      <p:sp>
-        <p:nvSpPr>
-          <p:cNvPr id="17" name="TextBox 16"/>
-          <p:cNvSpPr txBox="1"/>
-          <p:nvPr/>
-        </p:nvSpPr>
-        <p:spPr>
-          <a:xfrm>
-            <a:off x="548640" y="6446520"/>
-            <a:ext cx="11064240" cy="320040"/>
-          </a:xfrm>
-          <a:prstGeom prst="rect">
-            <a:avLst/>
-          </a:prstGeom>
-          <a:noFill/>
-        </p:spPr>
-        <p:txBody>
-          <a:bodyPr wrap="square" anchor="t" lIns="0" rIns="0" tIns="0" bIns="0">
-            <a:spAutoFit/>
-          </a:bodyPr>
-          <a:lstStyle/>
-          <a:p>
-            <a:pPr algn="l">
-              <a:lnSpc>
                 <a:spcPct val="100000"/>
               </a:lnSpc>
               <a:spcAft>
@@ -6708,7 +6783,7 @@
                 </a:solidFill>
                 <a:latin typeface="Calibri"/>
               </a:rPr>
-              <a:t>Most "Kerberos is broken!" tickets are actually a layer-2 or layer-3 authorization problem. Always ask: which door?</a:t>
+              <a:t>Entra Kerberos / Entra DS accounts are not affected — this hardening only bites the on-prem AD DS path</a:t>
             </a:r>
           </a:p>
         </p:txBody>
@@ -6722,6 +6797,857 @@
 </file>
 
 <file path=ppt/slides/slide12.xml><?xml version="1.0" encoding="utf-8"?>
+<p:sld xmlns:a="http://schemas.openxmlformats.org/drawingml/2006/main" xmlns:p="http://schemas.openxmlformats.org/presentationml/2006/main" xmlns:r="http://schemas.openxmlformats.org/officeDocument/2006/relationships">
+  <p:cSld>
+    <p:spTree>
+      <p:nvGrpSpPr>
+        <p:cNvPr id="1" name=""/>
+        <p:cNvGrpSpPr/>
+        <p:nvPr/>
+      </p:nvGrpSpPr>
+      <p:grpSpPr/>
+      <p:sp>
+        <p:nvSpPr>
+          <p:cNvPr id="2" name="Rectangle 1"/>
+          <p:cNvSpPr/>
+          <p:nvPr/>
+        </p:nvSpPr>
+        <p:spPr>
+          <a:xfrm>
+            <a:off x="0" y="0"/>
+            <a:ext cx="12191695" cy="6858000"/>
+          </a:xfrm>
+          <a:prstGeom prst="rect">
+            <a:avLst/>
+          </a:prstGeom>
+          <a:solidFill>
+            <a:srgbClr val="FFFFFF"/>
+          </a:solidFill>
+          <a:ln>
+            <a:noFill/>
+          </a:ln>
+          <a:effectLst/>
+        </p:spPr>
+        <p:style>
+          <a:lnRef idx="1">
+            <a:schemeClr val="accent1"/>
+          </a:lnRef>
+          <a:fillRef idx="3">
+            <a:schemeClr val="accent1"/>
+          </a:fillRef>
+          <a:effectRef idx="2">
+            <a:schemeClr val="accent1"/>
+          </a:effectRef>
+          <a:fontRef idx="minor">
+            <a:schemeClr val="lt1"/>
+          </a:fontRef>
+        </p:style>
+        <p:txBody>
+          <a:bodyPr rtlCol="0" anchor="ctr"/>
+          <a:lstStyle/>
+          <a:p>
+            <a:pPr algn="ctr"/>
+          </a:p>
+        </p:txBody>
+      </p:sp>
+      <p:sp>
+        <p:nvSpPr>
+          <p:cNvPr id="3" name="TextBox 2"/>
+          <p:cNvSpPr txBox="1"/>
+          <p:nvPr/>
+        </p:nvSpPr>
+        <p:spPr>
+          <a:xfrm>
+            <a:off x="548640" y="292608"/>
+            <a:ext cx="11064240" cy="320040"/>
+          </a:xfrm>
+          <a:prstGeom prst="rect">
+            <a:avLst/>
+          </a:prstGeom>
+          <a:noFill/>
+        </p:spPr>
+        <p:txBody>
+          <a:bodyPr wrap="square" anchor="t" lIns="0" rIns="0" tIns="0" bIns="0">
+            <a:spAutoFit/>
+          </a:bodyPr>
+          <a:lstStyle/>
+          <a:p>
+            <a:pPr algn="l">
+              <a:lnSpc>
+                <a:spcPct val="100000"/>
+              </a:lnSpc>
+              <a:spcAft>
+                <a:spcPts val="600"/>
+              </a:spcAft>
+            </a:pPr>
+            <a:r>
+              <a:rPr sz="1300" b="1" i="0">
+                <a:solidFill>
+                  <a:srgbClr val="2A367E"/>
+                </a:solidFill>
+                <a:latin typeface="Calibri"/>
+              </a:rPr>
+              <a:t>CONCEPTS</a:t>
+            </a:r>
+          </a:p>
+        </p:txBody>
+      </p:sp>
+      <p:sp>
+        <p:nvSpPr>
+          <p:cNvPr id="4" name="TextBox 3"/>
+          <p:cNvSpPr txBox="1"/>
+          <p:nvPr/>
+        </p:nvSpPr>
+        <p:spPr>
+          <a:xfrm>
+            <a:off x="548640" y="566928"/>
+            <a:ext cx="11064240" cy="777240"/>
+          </a:xfrm>
+          <a:prstGeom prst="rect">
+            <a:avLst/>
+          </a:prstGeom>
+          <a:noFill/>
+        </p:spPr>
+        <p:txBody>
+          <a:bodyPr wrap="square" anchor="t" lIns="0" rIns="0" tIns="0" bIns="0">
+            <a:spAutoFit/>
+          </a:bodyPr>
+          <a:lstStyle/>
+          <a:p>
+            <a:pPr algn="l">
+              <a:lnSpc>
+                <a:spcPct val="100000"/>
+              </a:lnSpc>
+              <a:spcAft>
+                <a:spcPts val="600"/>
+              </a:spcAft>
+            </a:pPr>
+            <a:r>
+              <a:rPr sz="3300" b="1" i="0">
+                <a:solidFill>
+                  <a:srgbClr val="1E2761"/>
+                </a:solidFill>
+                <a:latin typeface="Cambria"/>
+              </a:rPr>
+              <a:t>Auth is only step one: three doors to the data</a:t>
+            </a:r>
+          </a:p>
+        </p:txBody>
+      </p:sp>
+      <p:sp>
+        <p:nvSpPr>
+          <p:cNvPr id="5" name="Rounded Rectangle 4"/>
+          <p:cNvSpPr/>
+          <p:nvPr/>
+        </p:nvSpPr>
+        <p:spPr>
+          <a:xfrm>
+            <a:off x="548640" y="1508760"/>
+            <a:ext cx="11091672" cy="1371600"/>
+          </a:xfrm>
+          <a:prstGeom prst="roundRect">
+            <a:avLst>
+              <a:gd name="adj" fmla="val 8000"/>
+            </a:avLst>
+          </a:prstGeom>
+          <a:solidFill>
+            <a:srgbClr val="F3F6FD"/>
+          </a:solidFill>
+          <a:ln>
+            <a:noFill/>
+          </a:ln>
+          <a:effectLst/>
+        </p:spPr>
+        <p:style>
+          <a:lnRef idx="1">
+            <a:schemeClr val="accent1"/>
+          </a:lnRef>
+          <a:fillRef idx="3">
+            <a:schemeClr val="accent1"/>
+          </a:fillRef>
+          <a:effectRef idx="2">
+            <a:schemeClr val="accent1"/>
+          </a:effectRef>
+          <a:fontRef idx="minor">
+            <a:schemeClr val="lt1"/>
+          </a:fontRef>
+        </p:style>
+        <p:txBody>
+          <a:bodyPr rtlCol="0" anchor="ctr"/>
+          <a:lstStyle/>
+          <a:p>
+            <a:pPr algn="ctr"/>
+          </a:p>
+        </p:txBody>
+      </p:sp>
+      <p:sp>
+        <p:nvSpPr>
+          <p:cNvPr id="6" name="Oval 5"/>
+          <p:cNvSpPr/>
+          <p:nvPr/>
+        </p:nvSpPr>
+        <p:spPr>
+          <a:xfrm>
+            <a:off x="822960" y="1874519"/>
+            <a:ext cx="640080" cy="640080"/>
+          </a:xfrm>
+          <a:prstGeom prst="ellipse">
+            <a:avLst/>
+          </a:prstGeom>
+          <a:solidFill>
+            <a:srgbClr val="2A367E"/>
+          </a:solidFill>
+          <a:ln>
+            <a:noFill/>
+          </a:ln>
+          <a:effectLst/>
+        </p:spPr>
+        <p:style>
+          <a:lnRef idx="1">
+            <a:schemeClr val="accent1"/>
+          </a:lnRef>
+          <a:fillRef idx="3">
+            <a:schemeClr val="accent1"/>
+          </a:fillRef>
+          <a:effectRef idx="2">
+            <a:schemeClr val="accent1"/>
+          </a:effectRef>
+          <a:fontRef idx="minor">
+            <a:schemeClr val="lt1"/>
+          </a:fontRef>
+        </p:style>
+        <p:txBody>
+          <a:bodyPr rtlCol="0" anchor="ctr" wrap="none" lIns="0" rIns="0"/>
+          <a:lstStyle/>
+          <a:p>
+            <a:pPr algn="ctr"/>
+            <a:r>
+              <a:rPr sz="1800" b="1">
+                <a:solidFill>
+                  <a:srgbClr val="FFFFFF"/>
+                </a:solidFill>
+                <a:latin typeface="Calibri"/>
+              </a:rPr>
+              <a:t>1</a:t>
+            </a:r>
+          </a:p>
+        </p:txBody>
+      </p:sp>
+      <p:sp>
+        <p:nvSpPr>
+          <p:cNvPr id="7" name="TextBox 6"/>
+          <p:cNvSpPr txBox="1"/>
+          <p:nvPr/>
+        </p:nvSpPr>
+        <p:spPr>
+          <a:xfrm>
+            <a:off x="1737360" y="1673351"/>
+            <a:ext cx="4023360" cy="1097280"/>
+          </a:xfrm>
+          <a:prstGeom prst="rect">
+            <a:avLst/>
+          </a:prstGeom>
+          <a:noFill/>
+        </p:spPr>
+        <p:txBody>
+          <a:bodyPr wrap="square" anchor="t" lIns="0" rIns="0" tIns="0" bIns="0">
+            <a:spAutoFit/>
+          </a:bodyPr>
+          <a:lstStyle/>
+          <a:p>
+            <a:pPr algn="l">
+              <a:lnSpc>
+                <a:spcPct val="105000"/>
+              </a:lnSpc>
+              <a:spcAft>
+                <a:spcPts val="600"/>
+              </a:spcAft>
+            </a:pPr>
+            <a:r>
+              <a:rPr sz="1650" b="1" i="0">
+                <a:solidFill>
+                  <a:srgbClr val="1E2761"/>
+                </a:solidFill>
+                <a:latin typeface="Calibri"/>
+              </a:rPr>
+              <a:t>Storage firewall / network</a:t>
+            </a:r>
+          </a:p>
+          <a:p>
+            <a:pPr algn="l">
+              <a:lnSpc>
+                <a:spcPct val="105000"/>
+              </a:lnSpc>
+              <a:spcAft>
+                <a:spcPts val="600"/>
+              </a:spcAft>
+            </a:pPr>
+            <a:r>
+              <a:rPr sz="1250" b="0" i="0">
+                <a:solidFill>
+                  <a:srgbClr val="5A5A6E"/>
+                </a:solidFill>
+                <a:latin typeface="Calibri"/>
+              </a:rPr>
+              <a:t>Public endpoint rules, VNets, private endpoints — and port 445 must be open</a:t>
+            </a:r>
+          </a:p>
+        </p:txBody>
+      </p:sp>
+      <p:sp>
+        <p:nvSpPr>
+          <p:cNvPr id="8" name="TextBox 7"/>
+          <p:cNvSpPr txBox="1"/>
+          <p:nvPr/>
+        </p:nvSpPr>
+        <p:spPr>
+          <a:xfrm>
+            <a:off x="6126480" y="1673351"/>
+            <a:ext cx="5257800" cy="1097280"/>
+          </a:xfrm>
+          <a:prstGeom prst="rect">
+            <a:avLst/>
+          </a:prstGeom>
+          <a:noFill/>
+        </p:spPr>
+        <p:txBody>
+          <a:bodyPr wrap="square" anchor="t" lIns="0" rIns="0" tIns="0" bIns="0">
+            <a:spAutoFit/>
+          </a:bodyPr>
+          <a:lstStyle/>
+          <a:p>
+            <a:pPr algn="l">
+              <a:lnSpc>
+                <a:spcPct val="105000"/>
+              </a:lnSpc>
+              <a:spcAft>
+                <a:spcPts val="600"/>
+              </a:spcAft>
+            </a:pPr>
+            <a:r>
+              <a:rPr sz="1200" b="1" i="0">
+                <a:solidFill>
+                  <a:srgbClr val="F96167"/>
+                </a:solidFill>
+                <a:latin typeface="Calibri"/>
+              </a:rPr>
+              <a:t>When it's the culprit:</a:t>
+            </a:r>
+          </a:p>
+          <a:p>
+            <a:pPr algn="l">
+              <a:lnSpc>
+                <a:spcPct val="105000"/>
+              </a:lnSpc>
+              <a:spcAft>
+                <a:spcPts val="600"/>
+              </a:spcAft>
+            </a:pPr>
+            <a:r>
+              <a:rPr sz="1250" b="0" i="0">
+                <a:solidFill>
+                  <a:srgbClr val="202440"/>
+                </a:solidFill>
+                <a:latin typeface="Calibri"/>
+              </a:rPr>
+              <a:t>System error 64 / 53 · connection timeouts</a:t>
+            </a:r>
+          </a:p>
+        </p:txBody>
+      </p:sp>
+      <p:sp>
+        <p:nvSpPr>
+          <p:cNvPr id="9" name="Rounded Rectangle 8"/>
+          <p:cNvSpPr/>
+          <p:nvPr/>
+        </p:nvSpPr>
+        <p:spPr>
+          <a:xfrm>
+            <a:off x="548640" y="3044952"/>
+            <a:ext cx="11091672" cy="1371600"/>
+          </a:xfrm>
+          <a:prstGeom prst="roundRect">
+            <a:avLst>
+              <a:gd name="adj" fmla="val 8000"/>
+            </a:avLst>
+          </a:prstGeom>
+          <a:solidFill>
+            <a:srgbClr val="F3F6FD"/>
+          </a:solidFill>
+          <a:ln>
+            <a:noFill/>
+          </a:ln>
+          <a:effectLst/>
+        </p:spPr>
+        <p:style>
+          <a:lnRef idx="1">
+            <a:schemeClr val="accent1"/>
+          </a:lnRef>
+          <a:fillRef idx="3">
+            <a:schemeClr val="accent1"/>
+          </a:fillRef>
+          <a:effectRef idx="2">
+            <a:schemeClr val="accent1"/>
+          </a:effectRef>
+          <a:fontRef idx="minor">
+            <a:schemeClr val="lt1"/>
+          </a:fontRef>
+        </p:style>
+        <p:txBody>
+          <a:bodyPr rtlCol="0" anchor="ctr"/>
+          <a:lstStyle/>
+          <a:p>
+            <a:pPr algn="ctr"/>
+          </a:p>
+        </p:txBody>
+      </p:sp>
+      <p:sp>
+        <p:nvSpPr>
+          <p:cNvPr id="10" name="Oval 9"/>
+          <p:cNvSpPr/>
+          <p:nvPr/>
+        </p:nvSpPr>
+        <p:spPr>
+          <a:xfrm>
+            <a:off x="822960" y="3410712"/>
+            <a:ext cx="640080" cy="640080"/>
+          </a:xfrm>
+          <a:prstGeom prst="ellipse">
+            <a:avLst/>
+          </a:prstGeom>
+          <a:solidFill>
+            <a:srgbClr val="F2C14E"/>
+          </a:solidFill>
+          <a:ln>
+            <a:noFill/>
+          </a:ln>
+          <a:effectLst/>
+        </p:spPr>
+        <p:style>
+          <a:lnRef idx="1">
+            <a:schemeClr val="accent1"/>
+          </a:lnRef>
+          <a:fillRef idx="3">
+            <a:schemeClr val="accent1"/>
+          </a:fillRef>
+          <a:effectRef idx="2">
+            <a:schemeClr val="accent1"/>
+          </a:effectRef>
+          <a:fontRef idx="minor">
+            <a:schemeClr val="lt1"/>
+          </a:fontRef>
+        </p:style>
+        <p:txBody>
+          <a:bodyPr rtlCol="0" anchor="ctr" wrap="none" lIns="0" rIns="0"/>
+          <a:lstStyle/>
+          <a:p>
+            <a:pPr algn="ctr"/>
+            <a:r>
+              <a:rPr sz="1800" b="1">
+                <a:solidFill>
+                  <a:srgbClr val="FFFFFF"/>
+                </a:solidFill>
+                <a:latin typeface="Calibri"/>
+              </a:rPr>
+              <a:t>2</a:t>
+            </a:r>
+          </a:p>
+        </p:txBody>
+      </p:sp>
+      <p:sp>
+        <p:nvSpPr>
+          <p:cNvPr id="11" name="TextBox 10"/>
+          <p:cNvSpPr txBox="1"/>
+          <p:nvPr/>
+        </p:nvSpPr>
+        <p:spPr>
+          <a:xfrm>
+            <a:off x="1737360" y="3209544"/>
+            <a:ext cx="4023360" cy="1097280"/>
+          </a:xfrm>
+          <a:prstGeom prst="rect">
+            <a:avLst/>
+          </a:prstGeom>
+          <a:noFill/>
+        </p:spPr>
+        <p:txBody>
+          <a:bodyPr wrap="square" anchor="t" lIns="0" rIns="0" tIns="0" bIns="0">
+            <a:spAutoFit/>
+          </a:bodyPr>
+          <a:lstStyle/>
+          <a:p>
+            <a:pPr algn="l">
+              <a:lnSpc>
+                <a:spcPct val="105000"/>
+              </a:lnSpc>
+              <a:spcAft>
+                <a:spcPts val="600"/>
+              </a:spcAft>
+            </a:pPr>
+            <a:r>
+              <a:rPr sz="1650" b="1" i="0">
+                <a:solidFill>
+                  <a:srgbClr val="1E2761"/>
+                </a:solidFill>
+                <a:latin typeface="Calibri"/>
+              </a:rPr>
+              <a:t>Share-level (RBAC)</a:t>
+            </a:r>
+          </a:p>
+          <a:p>
+            <a:pPr algn="l">
+              <a:lnSpc>
+                <a:spcPct val="105000"/>
+              </a:lnSpc>
+              <a:spcAft>
+                <a:spcPts val="600"/>
+              </a:spcAft>
+            </a:pPr>
+            <a:r>
+              <a:rPr sz="1250" b="0" i="0">
+                <a:solidFill>
+                  <a:srgbClr val="5A5A6E"/>
+                </a:solidFill>
+                <a:latin typeface="Calibri"/>
+              </a:rPr>
+              <a:t>Azure role or DefaultSharePermission decides who may enter the share</a:t>
+            </a:r>
+          </a:p>
+        </p:txBody>
+      </p:sp>
+      <p:sp>
+        <p:nvSpPr>
+          <p:cNvPr id="12" name="TextBox 11"/>
+          <p:cNvSpPr txBox="1"/>
+          <p:nvPr/>
+        </p:nvSpPr>
+        <p:spPr>
+          <a:xfrm>
+            <a:off x="6126480" y="3209544"/>
+            <a:ext cx="5257800" cy="1097280"/>
+          </a:xfrm>
+          <a:prstGeom prst="rect">
+            <a:avLst/>
+          </a:prstGeom>
+          <a:noFill/>
+        </p:spPr>
+        <p:txBody>
+          <a:bodyPr wrap="square" anchor="t" lIns="0" rIns="0" tIns="0" bIns="0">
+            <a:spAutoFit/>
+          </a:bodyPr>
+          <a:lstStyle/>
+          <a:p>
+            <a:pPr algn="l">
+              <a:lnSpc>
+                <a:spcPct val="105000"/>
+              </a:lnSpc>
+              <a:spcAft>
+                <a:spcPts val="600"/>
+              </a:spcAft>
+            </a:pPr>
+            <a:r>
+              <a:rPr sz="1200" b="1" i="0">
+                <a:solidFill>
+                  <a:srgbClr val="F96167"/>
+                </a:solidFill>
+                <a:latin typeface="Calibri"/>
+              </a:rPr>
+              <a:t>When it's the culprit:</a:t>
+            </a:r>
+          </a:p>
+          <a:p>
+            <a:pPr algn="l">
+              <a:lnSpc>
+                <a:spcPct val="105000"/>
+              </a:lnSpc>
+              <a:spcAft>
+                <a:spcPts val="600"/>
+              </a:spcAft>
+            </a:pPr>
+            <a:r>
+              <a:rPr sz="1250" b="0" i="0">
+                <a:solidFill>
+                  <a:srgbClr val="202440"/>
+                </a:solidFill>
+                <a:latin typeface="Calibri"/>
+              </a:rPr>
+              <a:t>Access denied at mount — even with a perfect Kerberos ticket</a:t>
+            </a:r>
+          </a:p>
+        </p:txBody>
+      </p:sp>
+      <p:sp>
+        <p:nvSpPr>
+          <p:cNvPr id="13" name="Rounded Rectangle 12"/>
+          <p:cNvSpPr/>
+          <p:nvPr/>
+        </p:nvSpPr>
+        <p:spPr>
+          <a:xfrm>
+            <a:off x="548640" y="4581144"/>
+            <a:ext cx="11091672" cy="1371600"/>
+          </a:xfrm>
+          <a:prstGeom prst="roundRect">
+            <a:avLst>
+              <a:gd name="adj" fmla="val 8000"/>
+            </a:avLst>
+          </a:prstGeom>
+          <a:solidFill>
+            <a:srgbClr val="F3F6FD"/>
+          </a:solidFill>
+          <a:ln>
+            <a:noFill/>
+          </a:ln>
+          <a:effectLst/>
+        </p:spPr>
+        <p:style>
+          <a:lnRef idx="1">
+            <a:schemeClr val="accent1"/>
+          </a:lnRef>
+          <a:fillRef idx="3">
+            <a:schemeClr val="accent1"/>
+          </a:fillRef>
+          <a:effectRef idx="2">
+            <a:schemeClr val="accent1"/>
+          </a:effectRef>
+          <a:fontRef idx="minor">
+            <a:schemeClr val="lt1"/>
+          </a:fontRef>
+        </p:style>
+        <p:txBody>
+          <a:bodyPr rtlCol="0" anchor="ctr"/>
+          <a:lstStyle/>
+          <a:p>
+            <a:pPr algn="ctr"/>
+          </a:p>
+        </p:txBody>
+      </p:sp>
+      <p:sp>
+        <p:nvSpPr>
+          <p:cNvPr id="14" name="Oval 13"/>
+          <p:cNvSpPr/>
+          <p:nvPr/>
+        </p:nvSpPr>
+        <p:spPr>
+          <a:xfrm>
+            <a:off x="822960" y="4946904"/>
+            <a:ext cx="640080" cy="640080"/>
+          </a:xfrm>
+          <a:prstGeom prst="ellipse">
+            <a:avLst/>
+          </a:prstGeom>
+          <a:solidFill>
+            <a:srgbClr val="3DA56E"/>
+          </a:solidFill>
+          <a:ln>
+            <a:noFill/>
+          </a:ln>
+          <a:effectLst/>
+        </p:spPr>
+        <p:style>
+          <a:lnRef idx="1">
+            <a:schemeClr val="accent1"/>
+          </a:lnRef>
+          <a:fillRef idx="3">
+            <a:schemeClr val="accent1"/>
+          </a:fillRef>
+          <a:effectRef idx="2">
+            <a:schemeClr val="accent1"/>
+          </a:effectRef>
+          <a:fontRef idx="minor">
+            <a:schemeClr val="lt1"/>
+          </a:fontRef>
+        </p:style>
+        <p:txBody>
+          <a:bodyPr rtlCol="0" anchor="ctr" wrap="none" lIns="0" rIns="0"/>
+          <a:lstStyle/>
+          <a:p>
+            <a:pPr algn="ctr"/>
+            <a:r>
+              <a:rPr sz="1800" b="1">
+                <a:solidFill>
+                  <a:srgbClr val="FFFFFF"/>
+                </a:solidFill>
+                <a:latin typeface="Calibri"/>
+              </a:rPr>
+              <a:t>3</a:t>
+            </a:r>
+          </a:p>
+        </p:txBody>
+      </p:sp>
+      <p:sp>
+        <p:nvSpPr>
+          <p:cNvPr id="15" name="TextBox 14"/>
+          <p:cNvSpPr txBox="1"/>
+          <p:nvPr/>
+        </p:nvSpPr>
+        <p:spPr>
+          <a:xfrm>
+            <a:off x="1737360" y="4745736"/>
+            <a:ext cx="4023360" cy="1097280"/>
+          </a:xfrm>
+          <a:prstGeom prst="rect">
+            <a:avLst/>
+          </a:prstGeom>
+          <a:noFill/>
+        </p:spPr>
+        <p:txBody>
+          <a:bodyPr wrap="square" anchor="t" lIns="0" rIns="0" tIns="0" bIns="0">
+            <a:spAutoFit/>
+          </a:bodyPr>
+          <a:lstStyle/>
+          <a:p>
+            <a:pPr algn="l">
+              <a:lnSpc>
+                <a:spcPct val="105000"/>
+              </a:lnSpc>
+              <a:spcAft>
+                <a:spcPts val="600"/>
+              </a:spcAft>
+            </a:pPr>
+            <a:r>
+              <a:rPr sz="1650" b="1" i="0">
+                <a:solidFill>
+                  <a:srgbClr val="1E2761"/>
+                </a:solidFill>
+                <a:latin typeface="Calibri"/>
+              </a:rPr>
+              <a:t>File/directory (NTFS ACLs)</a:t>
+            </a:r>
+          </a:p>
+          <a:p>
+            <a:pPr algn="l">
+              <a:lnSpc>
+                <a:spcPct val="105000"/>
+              </a:lnSpc>
+              <a:spcAft>
+                <a:spcPts val="600"/>
+              </a:spcAft>
+            </a:pPr>
+            <a:r>
+              <a:rPr sz="1250" b="0" i="0">
+                <a:solidFill>
+                  <a:srgbClr val="5A5A6E"/>
+                </a:solidFill>
+                <a:latin typeface="Calibri"/>
+              </a:rPr>
+              <a:t>Windows-style ACLs on folders and files inside the share</a:t>
+            </a:r>
+          </a:p>
+        </p:txBody>
+      </p:sp>
+      <p:sp>
+        <p:nvSpPr>
+          <p:cNvPr id="16" name="TextBox 15"/>
+          <p:cNvSpPr txBox="1"/>
+          <p:nvPr/>
+        </p:nvSpPr>
+        <p:spPr>
+          <a:xfrm>
+            <a:off x="6126480" y="4745736"/>
+            <a:ext cx="5257800" cy="1097280"/>
+          </a:xfrm>
+          <a:prstGeom prst="rect">
+            <a:avLst/>
+          </a:prstGeom>
+          <a:noFill/>
+        </p:spPr>
+        <p:txBody>
+          <a:bodyPr wrap="square" anchor="t" lIns="0" rIns="0" tIns="0" bIns="0">
+            <a:spAutoFit/>
+          </a:bodyPr>
+          <a:lstStyle/>
+          <a:p>
+            <a:pPr algn="l">
+              <a:lnSpc>
+                <a:spcPct val="105000"/>
+              </a:lnSpc>
+              <a:spcAft>
+                <a:spcPts val="600"/>
+              </a:spcAft>
+            </a:pPr>
+            <a:r>
+              <a:rPr sz="1200" b="1" i="0">
+                <a:solidFill>
+                  <a:srgbClr val="F96167"/>
+                </a:solidFill>
+                <a:latin typeface="Calibri"/>
+              </a:rPr>
+              <a:t>When it's the culprit:</a:t>
+            </a:r>
+          </a:p>
+          <a:p>
+            <a:pPr algn="l">
+              <a:lnSpc>
+                <a:spcPct val="105000"/>
+              </a:lnSpc>
+              <a:spcAft>
+                <a:spcPts val="600"/>
+              </a:spcAft>
+            </a:pPr>
+            <a:r>
+              <a:rPr sz="1250" b="0" i="0">
+                <a:solidFill>
+                  <a:srgbClr val="202440"/>
+                </a:solidFill>
+                <a:latin typeface="Calibri"/>
+              </a:rPr>
+              <a:t>Access denied on specific paths after a successful mount</a:t>
+            </a:r>
+          </a:p>
+        </p:txBody>
+      </p:sp>
+      <p:sp>
+        <p:nvSpPr>
+          <p:cNvPr id="17" name="TextBox 16"/>
+          <p:cNvSpPr txBox="1"/>
+          <p:nvPr/>
+        </p:nvSpPr>
+        <p:spPr>
+          <a:xfrm>
+            <a:off x="548640" y="6446520"/>
+            <a:ext cx="11064240" cy="320040"/>
+          </a:xfrm>
+          <a:prstGeom prst="rect">
+            <a:avLst/>
+          </a:prstGeom>
+          <a:noFill/>
+        </p:spPr>
+        <p:txBody>
+          <a:bodyPr wrap="square" anchor="t" lIns="0" rIns="0" tIns="0" bIns="0">
+            <a:spAutoFit/>
+          </a:bodyPr>
+          <a:lstStyle/>
+          <a:p>
+            <a:pPr algn="l">
+              <a:lnSpc>
+                <a:spcPct val="100000"/>
+              </a:lnSpc>
+              <a:spcAft>
+                <a:spcPts val="0"/>
+              </a:spcAft>
+            </a:pPr>
+            <a:r>
+              <a:rPr sz="1100" b="0" i="0">
+                <a:solidFill>
+                  <a:srgbClr val="5A5A6E"/>
+                </a:solidFill>
+                <a:latin typeface="Calibri"/>
+              </a:rPr>
+              <a:t>Most "Kerberos is broken!" tickets are actually a layer-2 or layer-3 authorization problem. Always ask: which door?</a:t>
+            </a:r>
+          </a:p>
+        </p:txBody>
+      </p:sp>
+    </p:spTree>
+  </p:cSld>
+  <p:clrMapOvr>
+    <a:masterClrMapping/>
+  </p:clrMapOvr>
+</p:sld>
+</file>
+
+<file path=ppt/slides/slide13.xml><?xml version="1.0" encoding="utf-8"?>
 <p:sld xmlns:a="http://schemas.openxmlformats.org/drawingml/2006/main" xmlns:p="http://schemas.openxmlformats.org/presentationml/2006/main" xmlns:r="http://schemas.openxmlformats.org/officeDocument/2006/relationships">
   <p:cSld>
     <p:spTree>
@@ -7457,7 +8383,7 @@
         <p:spPr>
           <a:xfrm>
             <a:off x="548640" y="4892040"/>
-            <a:ext cx="11064240" cy="1234440"/>
+            <a:ext cx="11064240" cy="1600200"/>
           </a:xfrm>
           <a:prstGeom prst="roundRect">
             <a:avLst>
@@ -7502,8 +8428,8 @@
         </p:nvSpPr>
         <p:spPr>
           <a:xfrm>
-            <a:off x="822960" y="5074920"/>
-            <a:ext cx="10515600" cy="914400"/>
+            <a:off x="822960" y="5029200"/>
+            <a:ext cx="10515600" cy="1371600"/>
           </a:xfrm>
           <a:prstGeom prst="rect">
             <a:avLst/>
@@ -7521,11 +8447,11 @@
                 <a:spcPct val="112000"/>
               </a:lnSpc>
               <a:spcAft>
-                <a:spcPts val="600"/>
-              </a:spcAft>
-            </a:pPr>
-            <a:r>
-              <a:rPr sz="1400" b="1" i="0">
+                <a:spcPts val="800"/>
+              </a:spcAft>
+            </a:pPr>
+            <a:r>
+              <a:rPr sz="1350" b="1" i="0">
                 <a:solidFill>
                   <a:srgbClr val="1E2761"/>
                 </a:solidFill>
@@ -7534,49 +8460,59 @@
               <a:t>Read the two layers together: </a:t>
             </a:r>
             <a:r>
-              <a:rPr sz="1400" b="0" i="0">
+              <a:rPr sz="1350" b="0" i="0">
                 <a:solidFill>
                   <a:srgbClr val="202440"/>
                 </a:solidFill>
                 <a:latin typeface="Calibri"/>
               </a:rPr>
-              <a:t>share-level RBAC sets the ceiling, NTFS sets the floor — a user gets the MORE restrictive of the two. "NTFS says Modify but access is denied" almost always means the RBAC role is None or missing. Changing NTFS ACLs needs </a:t>
-            </a:r>
-            <a:r>
-              <a:rPr sz="1400" b="1" i="0">
+              <a:t>a user gets the MORE restrictive of the two. "NTFS says Modify but access is denied" almost always means the share-level role is None.</a:t>
+            </a:r>
+          </a:p>
+          <a:p>
+            <a:pPr algn="l">
+              <a:lnSpc>
+                <a:spcPct val="112000"/>
+              </a:lnSpc>
+              <a:spcAft>
+                <a:spcPts val="800"/>
+              </a:spcAft>
+            </a:pPr>
+            <a:r>
+              <a:rPr sz="1350" b="1" i="0">
+                <a:solidFill>
+                  <a:srgbClr val="1E2761"/>
+                </a:solidFill>
+                <a:latin typeface="Calibri"/>
+              </a:rPr>
+              <a:t>Two ways to grant the share level: </a:t>
+            </a:r>
+            <a:r>
+              <a:rPr sz="1350" b="0" i="0">
                 <a:solidFill>
                   <a:srgbClr val="202440"/>
                 </a:solidFill>
                 <a:latin typeface="Calibri"/>
               </a:rPr>
-              <a:t>SMB Elevated Contributor</a:t>
-            </a:r>
-            <a:r>
-              <a:rPr sz="1400" b="0" i="0">
+              <a:t>per-identity RBAC (the user must exist in Entra), or </a:t>
+            </a:r>
+            <a:r>
+              <a:rPr sz="1350" b="1" i="0">
                 <a:solidFill>
                   <a:srgbClr val="202440"/>
                 </a:solidFill>
                 <a:latin typeface="Calibri"/>
               </a:rPr>
-              <a:t> (over SMB), </a:t>
-            </a:r>
-            <a:r>
-              <a:rPr sz="1400" b="1" i="0">
+              <a:t>DefaultSharePermission</a:t>
+            </a:r>
+            <a:r>
+              <a:rPr sz="1350" b="0" i="0">
                 <a:solidFill>
                   <a:srgbClr val="202440"/>
                 </a:solidFill>
                 <a:latin typeface="Calibri"/>
               </a:rPr>
-              <a:t>Privileged Contributor</a:t>
-            </a:r>
-            <a:r>
-              <a:rPr sz="1400" b="0" i="0">
-                <a:solidFill>
-                  <a:srgbClr val="202440"/>
-                </a:solidFill>
-                <a:latin typeface="Calibri"/>
-              </a:rPr>
-              <a:t> (over REST), or the storage key.</a:t>
+              <a:t> — one implicit role for every authenticated identity, which is what our lab uses. Note it applies to EVERY share in the account.</a:t>
             </a:r>
           </a:p>
         </p:txBody>
@@ -7618,590 +8554,7 @@
                 </a:solidFill>
                 <a:latin typeface="Calibri"/>
               </a:rPr>
-              <a:t>This is the table behind the NoShareAccess lab — we'll flip the RBAC column to None and watch a perfect NTFS setup go dark</a:t>
-            </a:r>
-          </a:p>
-        </p:txBody>
-      </p:sp>
-    </p:spTree>
-  </p:cSld>
-  <p:clrMapOvr>
-    <a:masterClrMapping/>
-  </p:clrMapOvr>
-</p:sld>
-</file>
-
-<file path=ppt/slides/slide13.xml><?xml version="1.0" encoding="utf-8"?>
-<p:sld xmlns:a="http://schemas.openxmlformats.org/drawingml/2006/main" xmlns:p="http://schemas.openxmlformats.org/presentationml/2006/main" xmlns:r="http://schemas.openxmlformats.org/officeDocument/2006/relationships">
-  <p:cSld>
-    <p:spTree>
-      <p:nvGrpSpPr>
-        <p:cNvPr id="1" name=""/>
-        <p:cNvGrpSpPr/>
-        <p:nvPr/>
-      </p:nvGrpSpPr>
-      <p:grpSpPr/>
-      <p:sp>
-        <p:nvSpPr>
-          <p:cNvPr id="2" name="Rectangle 1"/>
-          <p:cNvSpPr/>
-          <p:nvPr/>
-        </p:nvSpPr>
-        <p:spPr>
-          <a:xfrm>
-            <a:off x="0" y="0"/>
-            <a:ext cx="12191695" cy="6858000"/>
-          </a:xfrm>
-          <a:prstGeom prst="rect">
-            <a:avLst/>
-          </a:prstGeom>
-          <a:solidFill>
-            <a:srgbClr val="FFFFFF"/>
-          </a:solidFill>
-          <a:ln>
-            <a:noFill/>
-          </a:ln>
-          <a:effectLst/>
-        </p:spPr>
-        <p:style>
-          <a:lnRef idx="1">
-            <a:schemeClr val="accent1"/>
-          </a:lnRef>
-          <a:fillRef idx="3">
-            <a:schemeClr val="accent1"/>
-          </a:fillRef>
-          <a:effectRef idx="2">
-            <a:schemeClr val="accent1"/>
-          </a:effectRef>
-          <a:fontRef idx="minor">
-            <a:schemeClr val="lt1"/>
-          </a:fontRef>
-        </p:style>
-        <p:txBody>
-          <a:bodyPr rtlCol="0" anchor="ctr"/>
-          <a:lstStyle/>
-          <a:p>
-            <a:pPr algn="ctr"/>
-          </a:p>
-        </p:txBody>
-      </p:sp>
-      <p:sp>
-        <p:nvSpPr>
-          <p:cNvPr id="3" name="TextBox 2"/>
-          <p:cNvSpPr txBox="1"/>
-          <p:nvPr/>
-        </p:nvSpPr>
-        <p:spPr>
-          <a:xfrm>
-            <a:off x="548640" y="292608"/>
-            <a:ext cx="11064240" cy="320040"/>
-          </a:xfrm>
-          <a:prstGeom prst="rect">
-            <a:avLst/>
-          </a:prstGeom>
-          <a:noFill/>
-        </p:spPr>
-        <p:txBody>
-          <a:bodyPr wrap="square" anchor="t" lIns="0" rIns="0" tIns="0" bIns="0">
-            <a:spAutoFit/>
-          </a:bodyPr>
-          <a:lstStyle/>
-          <a:p>
-            <a:pPr algn="l">
-              <a:lnSpc>
-                <a:spcPct val="100000"/>
-              </a:lnSpc>
-              <a:spcAft>
-                <a:spcPts val="600"/>
-              </a:spcAft>
-            </a:pPr>
-            <a:r>
-              <a:rPr sz="1300" b="1" i="0">
-                <a:solidFill>
-                  <a:srgbClr val="2A367E"/>
-                </a:solidFill>
-                <a:latin typeface="Calibri"/>
-              </a:rPr>
-              <a:t>CONCEPTS · MODERN GOTCHA</a:t>
-            </a:r>
-          </a:p>
-        </p:txBody>
-      </p:sp>
-      <p:sp>
-        <p:nvSpPr>
-          <p:cNvPr id="4" name="TextBox 3"/>
-          <p:cNvSpPr txBox="1"/>
-          <p:nvPr/>
-        </p:nvSpPr>
-        <p:spPr>
-          <a:xfrm>
-            <a:off x="548640" y="566928"/>
-            <a:ext cx="11064240" cy="777240"/>
-          </a:xfrm>
-          <a:prstGeom prst="rect">
-            <a:avLst/>
-          </a:prstGeom>
-          <a:noFill/>
-        </p:spPr>
-        <p:txBody>
-          <a:bodyPr wrap="square" anchor="t" lIns="0" rIns="0" tIns="0" bIns="0">
-            <a:spAutoFit/>
-          </a:bodyPr>
-          <a:lstStyle/>
-          <a:p>
-            <a:pPr algn="l">
-              <a:lnSpc>
-                <a:spcPct val="100000"/>
-              </a:lnSpc>
-              <a:spcAft>
-                <a:spcPts val="600"/>
-              </a:spcAft>
-            </a:pPr>
-            <a:r>
-              <a:rPr sz="3300" b="1" i="0">
-                <a:solidFill>
-                  <a:srgbClr val="1E2761"/>
-                </a:solidFill>
-                <a:latin typeface="Cambria"/>
-              </a:rPr>
-              <a:t>A sneaky error 5: SMB cipher negotiation</a:t>
-            </a:r>
-          </a:p>
-        </p:txBody>
-      </p:sp>
-      <p:sp>
-        <p:nvSpPr>
-          <p:cNvPr id="5" name="Rounded Rectangle 4"/>
-          <p:cNvSpPr/>
-          <p:nvPr/>
-        </p:nvSpPr>
-        <p:spPr>
-          <a:xfrm>
-            <a:off x="548640" y="1463040"/>
-            <a:ext cx="11064240" cy="1463040"/>
-          </a:xfrm>
-          <a:prstGeom prst="roundRect">
-            <a:avLst>
-              <a:gd name="adj" fmla="val 8000"/>
-            </a:avLst>
-          </a:prstGeom>
-          <a:solidFill>
-            <a:srgbClr val="FDECEC"/>
-          </a:solidFill>
-          <a:ln>
-            <a:noFill/>
-          </a:ln>
-          <a:effectLst/>
-        </p:spPr>
-        <p:style>
-          <a:lnRef idx="1">
-            <a:schemeClr val="accent1"/>
-          </a:lnRef>
-          <a:fillRef idx="3">
-            <a:schemeClr val="accent1"/>
-          </a:fillRef>
-          <a:effectRef idx="2">
-            <a:schemeClr val="accent1"/>
-          </a:effectRef>
-          <a:fontRef idx="minor">
-            <a:schemeClr val="lt1"/>
-          </a:fontRef>
-        </p:style>
-        <p:txBody>
-          <a:bodyPr rtlCol="0" anchor="ctr"/>
-          <a:lstStyle/>
-          <a:p>
-            <a:pPr algn="ctr"/>
-          </a:p>
-        </p:txBody>
-      </p:sp>
-      <p:sp>
-        <p:nvSpPr>
-          <p:cNvPr id="6" name="TextBox 5"/>
-          <p:cNvSpPr txBox="1"/>
-          <p:nvPr/>
-        </p:nvSpPr>
-        <p:spPr>
-          <a:xfrm>
-            <a:off x="868680" y="1664208"/>
-            <a:ext cx="10424160" cy="1097280"/>
-          </a:xfrm>
-          <a:prstGeom prst="rect">
-            <a:avLst/>
-          </a:prstGeom>
-          <a:noFill/>
-        </p:spPr>
-        <p:txBody>
-          <a:bodyPr wrap="square" anchor="t" lIns="0" rIns="0" tIns="0" bIns="0">
-            <a:spAutoFit/>
-          </a:bodyPr>
-          <a:lstStyle/>
-          <a:p>
-            <a:pPr algn="l">
-              <a:lnSpc>
-                <a:spcPct val="114000"/>
-              </a:lnSpc>
-              <a:spcAft>
-                <a:spcPts val="600"/>
-              </a:spcAft>
-            </a:pPr>
-            <a:r>
-              <a:rPr sz="1550" b="1" i="0">
-                <a:solidFill>
-                  <a:srgbClr val="1E2761"/>
-                </a:solidFill>
-                <a:latin typeface="Calibri"/>
-              </a:rPr>
-              <a:t>Access is denied (System error 5) — but every permission is correct. </a:t>
-            </a:r>
-            <a:r>
-              <a:rPr sz="1450" b="0" i="0">
-                <a:solidFill>
-                  <a:srgbClr val="202440"/>
-                </a:solidFill>
-                <a:latin typeface="Calibri"/>
-              </a:rPr>
-              <a:t>Cipher negotiation happens in the SMB Negotiate, BEFORE the client names the storage account — so Azure Files can't pick a per-account cipher. If the account allows only AES-256-GCM and the client offers a different one first, the connection dies before auth even starts.</a:t>
-            </a:r>
-          </a:p>
-        </p:txBody>
-      </p:sp>
-      <p:sp>
-        <p:nvSpPr>
-          <p:cNvPr id="7" name="TextBox 6"/>
-          <p:cNvSpPr txBox="1"/>
-          <p:nvPr/>
-        </p:nvSpPr>
-        <p:spPr>
-          <a:xfrm>
-            <a:off x="548640" y="3200400"/>
-            <a:ext cx="5394960" cy="365760"/>
-          </a:xfrm>
-          <a:prstGeom prst="rect">
-            <a:avLst/>
-          </a:prstGeom>
-          <a:noFill/>
-        </p:spPr>
-        <p:txBody>
-          <a:bodyPr wrap="square" anchor="t" lIns="0" rIns="0" tIns="0" bIns="0">
-            <a:spAutoFit/>
-          </a:bodyPr>
-          <a:lstStyle/>
-          <a:p>
-            <a:pPr algn="l">
-              <a:lnSpc>
-                <a:spcPct val="100000"/>
-              </a:lnSpc>
-              <a:spcAft>
-                <a:spcPts val="600"/>
-              </a:spcAft>
-            </a:pPr>
-            <a:r>
-              <a:rPr sz="1600" b="1" i="0">
-                <a:solidFill>
-                  <a:srgbClr val="1E2761"/>
-                </a:solidFill>
-                <a:latin typeface="Calibri"/>
-              </a:rPr>
-              <a:t>Detect</a:t>
-            </a:r>
-          </a:p>
-        </p:txBody>
-      </p:sp>
-      <p:sp>
-        <p:nvSpPr>
-          <p:cNvPr id="8" name="Rounded Rectangle 7"/>
-          <p:cNvSpPr/>
-          <p:nvPr/>
-        </p:nvSpPr>
-        <p:spPr>
-          <a:xfrm>
-            <a:off x="548640" y="3611880"/>
-            <a:ext cx="5394960" cy="1371600"/>
-          </a:xfrm>
-          <a:prstGeom prst="roundRect">
-            <a:avLst>
-              <a:gd name="adj" fmla="val 5000"/>
-            </a:avLst>
-          </a:prstGeom>
-          <a:solidFill>
-            <a:srgbClr val="161B38"/>
-          </a:solidFill>
-          <a:ln>
-            <a:noFill/>
-          </a:ln>
-          <a:effectLst/>
-        </p:spPr>
-        <p:style>
-          <a:lnRef idx="1">
-            <a:schemeClr val="accent1"/>
-          </a:lnRef>
-          <a:fillRef idx="3">
-            <a:schemeClr val="accent1"/>
-          </a:fillRef>
-          <a:effectRef idx="2">
-            <a:schemeClr val="accent1"/>
-          </a:effectRef>
-          <a:fontRef idx="minor">
-            <a:schemeClr val="lt1"/>
-          </a:fontRef>
-        </p:style>
-        <p:txBody>
-          <a:bodyPr rtlCol="0" anchor="t" wrap="square" lIns="201168" rIns="164592" tIns="128016" bIns="109728"/>
-          <a:lstStyle/>
-          <a:p>
-            <a:pPr algn="l">
-              <a:spcAft>
-                <a:spcPts val="200"/>
-              </a:spcAft>
-            </a:pPr>
-            <a:r>
-              <a:rPr sz="1200" b="0">
-                <a:solidFill>
-                  <a:srgbClr val="F2C14E"/>
-                </a:solidFill>
-                <a:latin typeface="Courier New"/>
-              </a:rPr>
-              <a:t># storage: Portal &gt; File service &gt; Security</a:t>
-            </a:r>
-          </a:p>
-          <a:p>
-            <a:pPr algn="l">
-              <a:spcAft>
-                <a:spcPts val="200"/>
-              </a:spcAft>
-            </a:pPr>
-            <a:r>
-              <a:rPr sz="1200" b="0">
-                <a:solidFill>
-                  <a:srgbClr val="F2C14E"/>
-                </a:solidFill>
-                <a:latin typeface="Courier New"/>
-              </a:rPr>
-              <a:t># client: which ciphers, in what order?</a:t>
-            </a:r>
-          </a:p>
-          <a:p>
-            <a:pPr algn="l">
-              <a:spcAft>
-                <a:spcPts val="200"/>
-              </a:spcAft>
-            </a:pPr>
-            <a:r>
-              <a:rPr sz="1200" b="0">
-                <a:solidFill>
-                  <a:srgbClr val="D8E4FF"/>
-                </a:solidFill>
-                <a:latin typeface="Courier New"/>
-              </a:rPr>
-              <a:t>Get-SmbClientConfiguration |</a:t>
-            </a:r>
-          </a:p>
-          <a:p>
-            <a:pPr algn="l">
-              <a:spcAft>
-                <a:spcPts val="200"/>
-              </a:spcAft>
-            </a:pPr>
-            <a:r>
-              <a:rPr sz="1200" b="0">
-                <a:solidFill>
-                  <a:srgbClr val="D8E4FF"/>
-                </a:solidFill>
-                <a:latin typeface="Courier New"/>
-              </a:rPr>
-              <a:t>  select EncryptionCiphers</a:t>
-            </a:r>
-          </a:p>
-        </p:txBody>
-      </p:sp>
-      <p:sp>
-        <p:nvSpPr>
-          <p:cNvPr id="9" name="TextBox 8"/>
-          <p:cNvSpPr txBox="1"/>
-          <p:nvPr/>
-        </p:nvSpPr>
-        <p:spPr>
-          <a:xfrm>
-            <a:off x="6217920" y="3200400"/>
-            <a:ext cx="5394960" cy="365760"/>
-          </a:xfrm>
-          <a:prstGeom prst="rect">
-            <a:avLst/>
-          </a:prstGeom>
-          <a:noFill/>
-        </p:spPr>
-        <p:txBody>
-          <a:bodyPr wrap="square" anchor="t" lIns="0" rIns="0" tIns="0" bIns="0">
-            <a:spAutoFit/>
-          </a:bodyPr>
-          <a:lstStyle/>
-          <a:p>
-            <a:pPr algn="l">
-              <a:lnSpc>
-                <a:spcPct val="100000"/>
-              </a:lnSpc>
-              <a:spcAft>
-                <a:spcPts val="600"/>
-              </a:spcAft>
-            </a:pPr>
-            <a:r>
-              <a:rPr sz="1600" b="1" i="0">
-                <a:solidFill>
-                  <a:srgbClr val="1E2761"/>
-                </a:solidFill>
-                <a:latin typeface="Calibri"/>
-              </a:rPr>
-              <a:t>Fix</a:t>
-            </a:r>
-          </a:p>
-        </p:txBody>
-      </p:sp>
-      <p:sp>
-        <p:nvSpPr>
-          <p:cNvPr id="10" name="Rounded Rectangle 9"/>
-          <p:cNvSpPr/>
-          <p:nvPr/>
-        </p:nvSpPr>
-        <p:spPr>
-          <a:xfrm>
-            <a:off x="6217920" y="3611880"/>
-            <a:ext cx="5394960" cy="1371600"/>
-          </a:xfrm>
-          <a:prstGeom prst="roundRect">
-            <a:avLst>
-              <a:gd name="adj" fmla="val 5000"/>
-            </a:avLst>
-          </a:prstGeom>
-          <a:solidFill>
-            <a:srgbClr val="161B38"/>
-          </a:solidFill>
-          <a:ln>
-            <a:noFill/>
-          </a:ln>
-          <a:effectLst/>
-        </p:spPr>
-        <p:style>
-          <a:lnRef idx="1">
-            <a:schemeClr val="accent1"/>
-          </a:lnRef>
-          <a:fillRef idx="3">
-            <a:schemeClr val="accent1"/>
-          </a:fillRef>
-          <a:effectRef idx="2">
-            <a:schemeClr val="accent1"/>
-          </a:effectRef>
-          <a:fontRef idx="minor">
-            <a:schemeClr val="lt1"/>
-          </a:fontRef>
-        </p:style>
-        <p:txBody>
-          <a:bodyPr rtlCol="0" anchor="t" wrap="square" lIns="201168" rIns="164592" tIns="128016" bIns="109728"/>
-          <a:lstStyle/>
-          <a:p>
-            <a:pPr algn="l">
-              <a:spcAft>
-                <a:spcPts val="200"/>
-              </a:spcAft>
-            </a:pPr>
-            <a:r>
-              <a:rPr sz="1200" b="0">
-                <a:solidFill>
-                  <a:srgbClr val="F2C14E"/>
-                </a:solidFill>
-                <a:latin typeface="Courier New"/>
-              </a:rPr>
-              <a:t># put the account's cipher first</a:t>
-            </a:r>
-          </a:p>
-          <a:p>
-            <a:pPr algn="l">
-              <a:spcAft>
-                <a:spcPts val="200"/>
-              </a:spcAft>
-            </a:pPr>
-            <a:r>
-              <a:rPr sz="1200" b="0">
-                <a:solidFill>
-                  <a:srgbClr val="D8E4FF"/>
-                </a:solidFill>
-                <a:latin typeface="Courier New"/>
-              </a:rPr>
-              <a:t>Set-SmbClientConfiguration `</a:t>
-            </a:r>
-          </a:p>
-          <a:p>
-            <a:pPr algn="l">
-              <a:spcAft>
-                <a:spcPts val="200"/>
-              </a:spcAft>
-            </a:pPr>
-            <a:r>
-              <a:rPr sz="1200" b="0">
-                <a:solidFill>
-                  <a:srgbClr val="D8E4FF"/>
-                </a:solidFill>
-                <a:latin typeface="Courier New"/>
-              </a:rPr>
-              <a:t>  -EncryptionCiphers `</a:t>
-            </a:r>
-          </a:p>
-          <a:p>
-            <a:pPr algn="l">
-              <a:spcAft>
-                <a:spcPts val="200"/>
-              </a:spcAft>
-            </a:pPr>
-            <a:r>
-              <a:rPr sz="1200" b="0">
-                <a:solidFill>
-                  <a:srgbClr val="D8E4FF"/>
-                </a:solidFill>
-                <a:latin typeface="Courier New"/>
-              </a:rPr>
-              <a:t>  "AES_256_GCM,AES_128_GCM,AES_128_CCM"</a:t>
-            </a:r>
-          </a:p>
-        </p:txBody>
-      </p:sp>
-      <p:sp>
-        <p:nvSpPr>
-          <p:cNvPr id="11" name="TextBox 10"/>
-          <p:cNvSpPr txBox="1"/>
-          <p:nvPr/>
-        </p:nvSpPr>
-        <p:spPr>
-          <a:xfrm>
-            <a:off x="548640" y="6446520"/>
-            <a:ext cx="11064240" cy="320040"/>
-          </a:xfrm>
-          <a:prstGeom prst="rect">
-            <a:avLst/>
-          </a:prstGeom>
-          <a:noFill/>
-        </p:spPr>
-        <p:txBody>
-          <a:bodyPr wrap="square" anchor="t" lIns="0" rIns="0" tIns="0" bIns="0">
-            <a:spAutoFit/>
-          </a:bodyPr>
-          <a:lstStyle/>
-          <a:p>
-            <a:pPr algn="l">
-              <a:lnSpc>
-                <a:spcPct val="100000"/>
-              </a:lnSpc>
-              <a:spcAft>
-                <a:spcPts val="0"/>
-              </a:spcAft>
-            </a:pPr>
-            <a:r>
-              <a:rPr sz="1100" b="0" i="0">
-                <a:solidFill>
-                  <a:srgbClr val="5A5A6E"/>
-                </a:solidFill>
-                <a:latin typeface="Calibri"/>
-              </a:rPr>
-              <a:t>AES-256-GCM needs Win 11 / WS2022+. The ORDER is what matters — put the account's allowed cipher first.</a:t>
+              <a:t>This is the table behind the NoShareAccess lab. RBAC changes can take up to ~30 min to propagate — a failure right after assignment is usually just that.</a:t>
             </a:r>
           </a:p>
         </p:txBody>
@@ -16637,6 +16990,589 @@
 </p:sld>
 </file>
 
+<file path=ppt/slides/slide23.xml><?xml version="1.0" encoding="utf-8"?>
+<p:sld xmlns:a="http://schemas.openxmlformats.org/drawingml/2006/main" xmlns:p="http://schemas.openxmlformats.org/presentationml/2006/main" xmlns:r="http://schemas.openxmlformats.org/officeDocument/2006/relationships">
+  <p:cSld>
+    <p:spTree>
+      <p:nvGrpSpPr>
+        <p:cNvPr id="1" name=""/>
+        <p:cNvGrpSpPr/>
+        <p:nvPr/>
+      </p:nvGrpSpPr>
+      <p:grpSpPr/>
+      <p:sp>
+        <p:nvSpPr>
+          <p:cNvPr id="2" name="Rectangle 1"/>
+          <p:cNvSpPr/>
+          <p:nvPr/>
+        </p:nvSpPr>
+        <p:spPr>
+          <a:xfrm>
+            <a:off x="0" y="0"/>
+            <a:ext cx="12191695" cy="6858000"/>
+          </a:xfrm>
+          <a:prstGeom prst="rect">
+            <a:avLst/>
+          </a:prstGeom>
+          <a:solidFill>
+            <a:srgbClr val="FFFFFF"/>
+          </a:solidFill>
+          <a:ln>
+            <a:noFill/>
+          </a:ln>
+          <a:effectLst/>
+        </p:spPr>
+        <p:style>
+          <a:lnRef idx="1">
+            <a:schemeClr val="accent1"/>
+          </a:lnRef>
+          <a:fillRef idx="3">
+            <a:schemeClr val="accent1"/>
+          </a:fillRef>
+          <a:effectRef idx="2">
+            <a:schemeClr val="accent1"/>
+          </a:effectRef>
+          <a:fontRef idx="minor">
+            <a:schemeClr val="lt1"/>
+          </a:fontRef>
+        </p:style>
+        <p:txBody>
+          <a:bodyPr rtlCol="0" anchor="ctr"/>
+          <a:lstStyle/>
+          <a:p>
+            <a:pPr algn="ctr"/>
+          </a:p>
+        </p:txBody>
+      </p:sp>
+      <p:sp>
+        <p:nvSpPr>
+          <p:cNvPr id="3" name="TextBox 2"/>
+          <p:cNvSpPr txBox="1"/>
+          <p:nvPr/>
+        </p:nvSpPr>
+        <p:spPr>
+          <a:xfrm>
+            <a:off x="548640" y="292608"/>
+            <a:ext cx="11064240" cy="320040"/>
+          </a:xfrm>
+          <a:prstGeom prst="rect">
+            <a:avLst/>
+          </a:prstGeom>
+          <a:noFill/>
+        </p:spPr>
+        <p:txBody>
+          <a:bodyPr wrap="square" anchor="t" lIns="0" rIns="0" tIns="0" bIns="0">
+            <a:spAutoFit/>
+          </a:bodyPr>
+          <a:lstStyle/>
+          <a:p>
+            <a:pPr algn="l">
+              <a:lnSpc>
+                <a:spcPct val="100000"/>
+              </a:lnSpc>
+              <a:spcAft>
+                <a:spcPts val="600"/>
+              </a:spcAft>
+            </a:pPr>
+            <a:r>
+              <a:rPr sz="1300" b="1" i="0">
+                <a:solidFill>
+                  <a:srgbClr val="2A367E"/>
+                </a:solidFill>
+                <a:latin typeface="Calibri"/>
+              </a:rPr>
+              <a:t>KEEP IN YOUR BACK POCKET</a:t>
+            </a:r>
+          </a:p>
+        </p:txBody>
+      </p:sp>
+      <p:sp>
+        <p:nvSpPr>
+          <p:cNvPr id="4" name="TextBox 3"/>
+          <p:cNvSpPr txBox="1"/>
+          <p:nvPr/>
+        </p:nvSpPr>
+        <p:spPr>
+          <a:xfrm>
+            <a:off x="548640" y="566928"/>
+            <a:ext cx="11064240" cy="777240"/>
+          </a:xfrm>
+          <a:prstGeom prst="rect">
+            <a:avLst/>
+          </a:prstGeom>
+          <a:noFill/>
+        </p:spPr>
+        <p:txBody>
+          <a:bodyPr wrap="square" anchor="t" lIns="0" rIns="0" tIns="0" bIns="0">
+            <a:spAutoFit/>
+          </a:bodyPr>
+          <a:lstStyle/>
+          <a:p>
+            <a:pPr algn="l">
+              <a:lnSpc>
+                <a:spcPct val="100000"/>
+              </a:lnSpc>
+              <a:spcAft>
+                <a:spcPts val="600"/>
+              </a:spcAft>
+            </a:pPr>
+            <a:r>
+              <a:rPr sz="3300" b="1" i="0">
+                <a:solidFill>
+                  <a:srgbClr val="1E2761"/>
+                </a:solidFill>
+                <a:latin typeface="Cambria"/>
+              </a:rPr>
+              <a:t>Appendix · A sneaky error 5: SMB cipher negotiation</a:t>
+            </a:r>
+          </a:p>
+        </p:txBody>
+      </p:sp>
+      <p:sp>
+        <p:nvSpPr>
+          <p:cNvPr id="5" name="Rounded Rectangle 4"/>
+          <p:cNvSpPr/>
+          <p:nvPr/>
+        </p:nvSpPr>
+        <p:spPr>
+          <a:xfrm>
+            <a:off x="548640" y="1463040"/>
+            <a:ext cx="11064240" cy="1463040"/>
+          </a:xfrm>
+          <a:prstGeom prst="roundRect">
+            <a:avLst>
+              <a:gd name="adj" fmla="val 8000"/>
+            </a:avLst>
+          </a:prstGeom>
+          <a:solidFill>
+            <a:srgbClr val="FDECEC"/>
+          </a:solidFill>
+          <a:ln>
+            <a:noFill/>
+          </a:ln>
+          <a:effectLst/>
+        </p:spPr>
+        <p:style>
+          <a:lnRef idx="1">
+            <a:schemeClr val="accent1"/>
+          </a:lnRef>
+          <a:fillRef idx="3">
+            <a:schemeClr val="accent1"/>
+          </a:fillRef>
+          <a:effectRef idx="2">
+            <a:schemeClr val="accent1"/>
+          </a:effectRef>
+          <a:fontRef idx="minor">
+            <a:schemeClr val="lt1"/>
+          </a:fontRef>
+        </p:style>
+        <p:txBody>
+          <a:bodyPr rtlCol="0" anchor="ctr"/>
+          <a:lstStyle/>
+          <a:p>
+            <a:pPr algn="ctr"/>
+          </a:p>
+        </p:txBody>
+      </p:sp>
+      <p:sp>
+        <p:nvSpPr>
+          <p:cNvPr id="6" name="TextBox 5"/>
+          <p:cNvSpPr txBox="1"/>
+          <p:nvPr/>
+        </p:nvSpPr>
+        <p:spPr>
+          <a:xfrm>
+            <a:off x="868680" y="1664208"/>
+            <a:ext cx="10424160" cy="1097280"/>
+          </a:xfrm>
+          <a:prstGeom prst="rect">
+            <a:avLst/>
+          </a:prstGeom>
+          <a:noFill/>
+        </p:spPr>
+        <p:txBody>
+          <a:bodyPr wrap="square" anchor="t" lIns="0" rIns="0" tIns="0" bIns="0">
+            <a:spAutoFit/>
+          </a:bodyPr>
+          <a:lstStyle/>
+          <a:p>
+            <a:pPr algn="l">
+              <a:lnSpc>
+                <a:spcPct val="114000"/>
+              </a:lnSpc>
+              <a:spcAft>
+                <a:spcPts val="600"/>
+              </a:spcAft>
+            </a:pPr>
+            <a:r>
+              <a:rPr sz="1550" b="1" i="0">
+                <a:solidFill>
+                  <a:srgbClr val="1E2761"/>
+                </a:solidFill>
+                <a:latin typeface="Calibri"/>
+              </a:rPr>
+              <a:t>Access is denied (System error 5) — but every permission is correct. </a:t>
+            </a:r>
+            <a:r>
+              <a:rPr sz="1450" b="0" i="0">
+                <a:solidFill>
+                  <a:srgbClr val="202440"/>
+                </a:solidFill>
+                <a:latin typeface="Calibri"/>
+              </a:rPr>
+              <a:t>Cipher negotiation happens in the SMB Negotiate, BEFORE the client names the storage account — so Azure Files can't pick a per-account cipher. If the account allows only AES-256-GCM and the client offers a different one first, the connection dies before auth even starts.</a:t>
+            </a:r>
+          </a:p>
+        </p:txBody>
+      </p:sp>
+      <p:sp>
+        <p:nvSpPr>
+          <p:cNvPr id="7" name="TextBox 6"/>
+          <p:cNvSpPr txBox="1"/>
+          <p:nvPr/>
+        </p:nvSpPr>
+        <p:spPr>
+          <a:xfrm>
+            <a:off x="548640" y="3200400"/>
+            <a:ext cx="5394960" cy="365760"/>
+          </a:xfrm>
+          <a:prstGeom prst="rect">
+            <a:avLst/>
+          </a:prstGeom>
+          <a:noFill/>
+        </p:spPr>
+        <p:txBody>
+          <a:bodyPr wrap="square" anchor="t" lIns="0" rIns="0" tIns="0" bIns="0">
+            <a:spAutoFit/>
+          </a:bodyPr>
+          <a:lstStyle/>
+          <a:p>
+            <a:pPr algn="l">
+              <a:lnSpc>
+                <a:spcPct val="100000"/>
+              </a:lnSpc>
+              <a:spcAft>
+                <a:spcPts val="600"/>
+              </a:spcAft>
+            </a:pPr>
+            <a:r>
+              <a:rPr sz="1600" b="1" i="0">
+                <a:solidFill>
+                  <a:srgbClr val="1E2761"/>
+                </a:solidFill>
+                <a:latin typeface="Calibri"/>
+              </a:rPr>
+              <a:t>Detect</a:t>
+            </a:r>
+          </a:p>
+        </p:txBody>
+      </p:sp>
+      <p:sp>
+        <p:nvSpPr>
+          <p:cNvPr id="8" name="Rounded Rectangle 7"/>
+          <p:cNvSpPr/>
+          <p:nvPr/>
+        </p:nvSpPr>
+        <p:spPr>
+          <a:xfrm>
+            <a:off x="548640" y="3611880"/>
+            <a:ext cx="5394960" cy="1371600"/>
+          </a:xfrm>
+          <a:prstGeom prst="roundRect">
+            <a:avLst>
+              <a:gd name="adj" fmla="val 5000"/>
+            </a:avLst>
+          </a:prstGeom>
+          <a:solidFill>
+            <a:srgbClr val="161B38"/>
+          </a:solidFill>
+          <a:ln>
+            <a:noFill/>
+          </a:ln>
+          <a:effectLst/>
+        </p:spPr>
+        <p:style>
+          <a:lnRef idx="1">
+            <a:schemeClr val="accent1"/>
+          </a:lnRef>
+          <a:fillRef idx="3">
+            <a:schemeClr val="accent1"/>
+          </a:fillRef>
+          <a:effectRef idx="2">
+            <a:schemeClr val="accent1"/>
+          </a:effectRef>
+          <a:fontRef idx="minor">
+            <a:schemeClr val="lt1"/>
+          </a:fontRef>
+        </p:style>
+        <p:txBody>
+          <a:bodyPr rtlCol="0" anchor="t" wrap="square" lIns="201168" rIns="164592" tIns="128016" bIns="109728"/>
+          <a:lstStyle/>
+          <a:p>
+            <a:pPr algn="l">
+              <a:spcAft>
+                <a:spcPts val="200"/>
+              </a:spcAft>
+            </a:pPr>
+            <a:r>
+              <a:rPr sz="1200" b="0">
+                <a:solidFill>
+                  <a:srgbClr val="F2C14E"/>
+                </a:solidFill>
+                <a:latin typeface="Courier New"/>
+              </a:rPr>
+              <a:t># storage: Portal &gt; File service &gt; Security</a:t>
+            </a:r>
+          </a:p>
+          <a:p>
+            <a:pPr algn="l">
+              <a:spcAft>
+                <a:spcPts val="200"/>
+              </a:spcAft>
+            </a:pPr>
+            <a:r>
+              <a:rPr sz="1200" b="0">
+                <a:solidFill>
+                  <a:srgbClr val="F2C14E"/>
+                </a:solidFill>
+                <a:latin typeface="Courier New"/>
+              </a:rPr>
+              <a:t># client: which ciphers, in what order?</a:t>
+            </a:r>
+          </a:p>
+          <a:p>
+            <a:pPr algn="l">
+              <a:spcAft>
+                <a:spcPts val="200"/>
+              </a:spcAft>
+            </a:pPr>
+            <a:r>
+              <a:rPr sz="1200" b="0">
+                <a:solidFill>
+                  <a:srgbClr val="D8E4FF"/>
+                </a:solidFill>
+                <a:latin typeface="Courier New"/>
+              </a:rPr>
+              <a:t>Get-SmbClientConfiguration |</a:t>
+            </a:r>
+          </a:p>
+          <a:p>
+            <a:pPr algn="l">
+              <a:spcAft>
+                <a:spcPts val="200"/>
+              </a:spcAft>
+            </a:pPr>
+            <a:r>
+              <a:rPr sz="1200" b="0">
+                <a:solidFill>
+                  <a:srgbClr val="D8E4FF"/>
+                </a:solidFill>
+                <a:latin typeface="Courier New"/>
+              </a:rPr>
+              <a:t>  select EncryptionCiphers</a:t>
+            </a:r>
+          </a:p>
+        </p:txBody>
+      </p:sp>
+      <p:sp>
+        <p:nvSpPr>
+          <p:cNvPr id="9" name="TextBox 8"/>
+          <p:cNvSpPr txBox="1"/>
+          <p:nvPr/>
+        </p:nvSpPr>
+        <p:spPr>
+          <a:xfrm>
+            <a:off x="6217920" y="3200400"/>
+            <a:ext cx="5394960" cy="365760"/>
+          </a:xfrm>
+          <a:prstGeom prst="rect">
+            <a:avLst/>
+          </a:prstGeom>
+          <a:noFill/>
+        </p:spPr>
+        <p:txBody>
+          <a:bodyPr wrap="square" anchor="t" lIns="0" rIns="0" tIns="0" bIns="0">
+            <a:spAutoFit/>
+          </a:bodyPr>
+          <a:lstStyle/>
+          <a:p>
+            <a:pPr algn="l">
+              <a:lnSpc>
+                <a:spcPct val="100000"/>
+              </a:lnSpc>
+              <a:spcAft>
+                <a:spcPts val="600"/>
+              </a:spcAft>
+            </a:pPr>
+            <a:r>
+              <a:rPr sz="1600" b="1" i="0">
+                <a:solidFill>
+                  <a:srgbClr val="1E2761"/>
+                </a:solidFill>
+                <a:latin typeface="Calibri"/>
+              </a:rPr>
+              <a:t>Fix</a:t>
+            </a:r>
+          </a:p>
+        </p:txBody>
+      </p:sp>
+      <p:sp>
+        <p:nvSpPr>
+          <p:cNvPr id="10" name="Rounded Rectangle 9"/>
+          <p:cNvSpPr/>
+          <p:nvPr/>
+        </p:nvSpPr>
+        <p:spPr>
+          <a:xfrm>
+            <a:off x="6217920" y="3611880"/>
+            <a:ext cx="5394960" cy="1371600"/>
+          </a:xfrm>
+          <a:prstGeom prst="roundRect">
+            <a:avLst>
+              <a:gd name="adj" fmla="val 5000"/>
+            </a:avLst>
+          </a:prstGeom>
+          <a:solidFill>
+            <a:srgbClr val="161B38"/>
+          </a:solidFill>
+          <a:ln>
+            <a:noFill/>
+          </a:ln>
+          <a:effectLst/>
+        </p:spPr>
+        <p:style>
+          <a:lnRef idx="1">
+            <a:schemeClr val="accent1"/>
+          </a:lnRef>
+          <a:fillRef idx="3">
+            <a:schemeClr val="accent1"/>
+          </a:fillRef>
+          <a:effectRef idx="2">
+            <a:schemeClr val="accent1"/>
+          </a:effectRef>
+          <a:fontRef idx="minor">
+            <a:schemeClr val="lt1"/>
+          </a:fontRef>
+        </p:style>
+        <p:txBody>
+          <a:bodyPr rtlCol="0" anchor="t" wrap="square" lIns="201168" rIns="164592" tIns="128016" bIns="109728"/>
+          <a:lstStyle/>
+          <a:p>
+            <a:pPr algn="l">
+              <a:spcAft>
+                <a:spcPts val="200"/>
+              </a:spcAft>
+            </a:pPr>
+            <a:r>
+              <a:rPr sz="1200" b="0">
+                <a:solidFill>
+                  <a:srgbClr val="F2C14E"/>
+                </a:solidFill>
+                <a:latin typeface="Courier New"/>
+              </a:rPr>
+              <a:t># put the account's cipher first</a:t>
+            </a:r>
+          </a:p>
+          <a:p>
+            <a:pPr algn="l">
+              <a:spcAft>
+                <a:spcPts val="200"/>
+              </a:spcAft>
+            </a:pPr>
+            <a:r>
+              <a:rPr sz="1200" b="0">
+                <a:solidFill>
+                  <a:srgbClr val="D8E4FF"/>
+                </a:solidFill>
+                <a:latin typeface="Courier New"/>
+              </a:rPr>
+              <a:t>Set-SmbClientConfiguration `</a:t>
+            </a:r>
+          </a:p>
+          <a:p>
+            <a:pPr algn="l">
+              <a:spcAft>
+                <a:spcPts val="200"/>
+              </a:spcAft>
+            </a:pPr>
+            <a:r>
+              <a:rPr sz="1200" b="0">
+                <a:solidFill>
+                  <a:srgbClr val="D8E4FF"/>
+                </a:solidFill>
+                <a:latin typeface="Courier New"/>
+              </a:rPr>
+              <a:t>  -EncryptionCiphers `</a:t>
+            </a:r>
+          </a:p>
+          <a:p>
+            <a:pPr algn="l">
+              <a:spcAft>
+                <a:spcPts val="200"/>
+              </a:spcAft>
+            </a:pPr>
+            <a:r>
+              <a:rPr sz="1200" b="0">
+                <a:solidFill>
+                  <a:srgbClr val="D8E4FF"/>
+                </a:solidFill>
+                <a:latin typeface="Courier New"/>
+              </a:rPr>
+              <a:t>  "AES_256_GCM,AES_128_GCM,AES_128_CCM"</a:t>
+            </a:r>
+          </a:p>
+        </p:txBody>
+      </p:sp>
+      <p:sp>
+        <p:nvSpPr>
+          <p:cNvPr id="11" name="TextBox 10"/>
+          <p:cNvSpPr txBox="1"/>
+          <p:nvPr/>
+        </p:nvSpPr>
+        <p:spPr>
+          <a:xfrm>
+            <a:off x="548640" y="6446520"/>
+            <a:ext cx="11064240" cy="320040"/>
+          </a:xfrm>
+          <a:prstGeom prst="rect">
+            <a:avLst/>
+          </a:prstGeom>
+          <a:noFill/>
+        </p:spPr>
+        <p:txBody>
+          <a:bodyPr wrap="square" anchor="t" lIns="0" rIns="0" tIns="0" bIns="0">
+            <a:spAutoFit/>
+          </a:bodyPr>
+          <a:lstStyle/>
+          <a:p>
+            <a:pPr algn="l">
+              <a:lnSpc>
+                <a:spcPct val="100000"/>
+              </a:lnSpc>
+              <a:spcAft>
+                <a:spcPts val="0"/>
+              </a:spcAft>
+            </a:pPr>
+            <a:r>
+              <a:rPr sz="1100" b="0" i="0">
+                <a:solidFill>
+                  <a:srgbClr val="5A5A6E"/>
+                </a:solidFill>
+                <a:latin typeface="Calibri"/>
+              </a:rPr>
+              <a:t>AES-256-GCM needs Win 11 / WS2022+. The ORDER is what matters — put the account's allowed cipher first.</a:t>
+            </a:r>
+          </a:p>
+        </p:txBody>
+      </p:sp>
+    </p:spTree>
+  </p:cSld>
+  <p:clrMapOvr>
+    <a:masterClrMapping/>
+  </p:clrMapOvr>
+</p:sld>
+</file>
+
 <file path=ppt/slides/slide3.xml><?xml version="1.0" encoding="utf-8"?>
 <p:sld xmlns:a="http://schemas.openxmlformats.org/drawingml/2006/main" xmlns:p="http://schemas.openxmlformats.org/presentationml/2006/main" xmlns:r="http://schemas.openxmlformats.org/officeDocument/2006/relationships">
   <p:cSld>
@@ -17094,7 +18030,7 @@
                 </a:solidFill>
                 <a:latin typeface="Calibri"/>
               </a:rPr>
-              <a:t>Kerberos 101 · auth options · line of sight · RC4→AES-256 · 3 security layers</a:t>
+              <a:t>how the join works · how tickets are issued &amp; decrypted · line of sight · permissions</a:t>
             </a:r>
           </a:p>
         </p:txBody>
@@ -19389,7 +20325,7 @@
                 </a:solidFill>
                 <a:latin typeface="Calibri"/>
               </a:rPr>
-              <a:t>CONCEPTS</a:t>
+              <a:t>MECHANISM 1 OF 3</a:t>
             </a:r>
           </a:p>
         </p:txBody>
@@ -19431,22 +20367,1788 @@
                 </a:solidFill>
                 <a:latin typeface="Cambria"/>
               </a:rPr>
-              <a:t>The same story, with our actors</a:t>
+              <a:t>What "domain joining a storage account" actually does</a:t>
+            </a:r>
+          </a:p>
+        </p:txBody>
+      </p:sp>
+      <p:sp>
+        <p:nvSpPr>
+          <p:cNvPr id="5" name="Oval 4"/>
+          <p:cNvSpPr/>
+          <p:nvPr/>
+        </p:nvSpPr>
+        <p:spPr>
+          <a:xfrm>
+            <a:off x="640080" y="1426464"/>
+            <a:ext cx="512064" cy="512064"/>
+          </a:xfrm>
+          <a:prstGeom prst="ellipse">
+            <a:avLst/>
+          </a:prstGeom>
+          <a:solidFill>
+            <a:srgbClr val="2A367E"/>
+          </a:solidFill>
+          <a:ln>
+            <a:noFill/>
+          </a:ln>
+          <a:effectLst/>
+        </p:spPr>
+        <p:style>
+          <a:lnRef idx="1">
+            <a:schemeClr val="accent1"/>
+          </a:lnRef>
+          <a:fillRef idx="3">
+            <a:schemeClr val="accent1"/>
+          </a:fillRef>
+          <a:effectRef idx="2">
+            <a:schemeClr val="accent1"/>
+          </a:effectRef>
+          <a:fontRef idx="minor">
+            <a:schemeClr val="lt1"/>
+          </a:fontRef>
+        </p:style>
+        <p:txBody>
+          <a:bodyPr rtlCol="0" anchor="ctr" wrap="none" lIns="0" rIns="0"/>
+          <a:lstStyle/>
+          <a:p>
+            <a:pPr algn="ctr"/>
+            <a:r>
+              <a:rPr sz="1500" b="1">
+                <a:solidFill>
+                  <a:srgbClr val="FFFFFF"/>
+                </a:solidFill>
+                <a:latin typeface="Calibri"/>
+              </a:rPr>
+              <a:t>1</a:t>
+            </a:r>
+          </a:p>
+        </p:txBody>
+      </p:sp>
+      <p:sp>
+        <p:nvSpPr>
+          <p:cNvPr id="6" name="TextBox 5"/>
+          <p:cNvSpPr txBox="1"/>
+          <p:nvPr/>
+        </p:nvSpPr>
+        <p:spPr>
+          <a:xfrm>
+            <a:off x="1371600" y="1371600"/>
+            <a:ext cx="2651760" cy="786384"/>
+          </a:xfrm>
+          <a:prstGeom prst="rect">
+            <a:avLst/>
+          </a:prstGeom>
+          <a:noFill/>
+        </p:spPr>
+        <p:txBody>
+          <a:bodyPr wrap="square" anchor="ctr" lIns="0" rIns="0" tIns="0" bIns="0">
+            <a:spAutoFit/>
+          </a:bodyPr>
+          <a:lstStyle/>
+          <a:p>
+            <a:pPr algn="l">
+              <a:lnSpc>
+                <a:spcPct val="100000"/>
+              </a:lnSpc>
+              <a:spcAft>
+                <a:spcPts val="600"/>
+              </a:spcAft>
+            </a:pPr>
+            <a:r>
+              <a:rPr sz="1500" b="1" i="0">
+                <a:solidFill>
+                  <a:srgbClr val="1E2761"/>
+                </a:solidFill>
+                <a:latin typeface="Calibri"/>
+              </a:rPr>
+              <a:t>Generate kerb keys</a:t>
+            </a:r>
+          </a:p>
+        </p:txBody>
+      </p:sp>
+      <p:sp>
+        <p:nvSpPr>
+          <p:cNvPr id="7" name="TextBox 6"/>
+          <p:cNvSpPr txBox="1"/>
+          <p:nvPr/>
+        </p:nvSpPr>
+        <p:spPr>
+          <a:xfrm>
+            <a:off x="4206240" y="1371600"/>
+            <a:ext cx="7406640" cy="786384"/>
+          </a:xfrm>
+          <a:prstGeom prst="rect">
+            <a:avLst/>
+          </a:prstGeom>
+          <a:noFill/>
+        </p:spPr>
+        <p:txBody>
+          <a:bodyPr wrap="square" anchor="ctr" lIns="0" rIns="0" tIns="0" bIns="0">
+            <a:spAutoFit/>
+          </a:bodyPr>
+          <a:lstStyle/>
+          <a:p>
+            <a:pPr algn="l">
+              <a:lnSpc>
+                <a:spcPct val="106000"/>
+              </a:lnSpc>
+              <a:spcAft>
+                <a:spcPts val="600"/>
+              </a:spcAft>
+            </a:pPr>
+            <a:r>
+              <a:rPr sz="1250" b="0" i="0">
+                <a:solidFill>
+                  <a:srgbClr val="5A5A6E"/>
+                </a:solidFill>
+                <a:latin typeface="Calibri"/>
+              </a:rPr>
+              <a:t>Azure creates two Kerberos keys on the storage account — kerb1 and kerb2. These are the service's long-term secret.</a:t>
+            </a:r>
+          </a:p>
+        </p:txBody>
+      </p:sp>
+      <p:sp>
+        <p:nvSpPr>
+          <p:cNvPr id="8" name="Oval 7"/>
+          <p:cNvSpPr/>
+          <p:nvPr/>
+        </p:nvSpPr>
+        <p:spPr>
+          <a:xfrm>
+            <a:off x="640080" y="2322576"/>
+            <a:ext cx="512064" cy="512064"/>
+          </a:xfrm>
+          <a:prstGeom prst="ellipse">
+            <a:avLst/>
+          </a:prstGeom>
+          <a:solidFill>
+            <a:srgbClr val="2A367E"/>
+          </a:solidFill>
+          <a:ln>
+            <a:noFill/>
+          </a:ln>
+          <a:effectLst/>
+        </p:spPr>
+        <p:style>
+          <a:lnRef idx="1">
+            <a:schemeClr val="accent1"/>
+          </a:lnRef>
+          <a:fillRef idx="3">
+            <a:schemeClr val="accent1"/>
+          </a:fillRef>
+          <a:effectRef idx="2">
+            <a:schemeClr val="accent1"/>
+          </a:effectRef>
+          <a:fontRef idx="minor">
+            <a:schemeClr val="lt1"/>
+          </a:fontRef>
+        </p:style>
+        <p:txBody>
+          <a:bodyPr rtlCol="0" anchor="ctr" wrap="none" lIns="0" rIns="0"/>
+          <a:lstStyle/>
+          <a:p>
+            <a:pPr algn="ctr"/>
+            <a:r>
+              <a:rPr sz="1500" b="1">
+                <a:solidFill>
+                  <a:srgbClr val="FFFFFF"/>
+                </a:solidFill>
+                <a:latin typeface="Calibri"/>
+              </a:rPr>
+              <a:t>2</a:t>
+            </a:r>
+          </a:p>
+        </p:txBody>
+      </p:sp>
+      <p:sp>
+        <p:nvSpPr>
+          <p:cNvPr id="9" name="TextBox 8"/>
+          <p:cNvSpPr txBox="1"/>
+          <p:nvPr/>
+        </p:nvSpPr>
+        <p:spPr>
+          <a:xfrm>
+            <a:off x="1371600" y="2267712"/>
+            <a:ext cx="2651760" cy="786384"/>
+          </a:xfrm>
+          <a:prstGeom prst="rect">
+            <a:avLst/>
+          </a:prstGeom>
+          <a:noFill/>
+        </p:spPr>
+        <p:txBody>
+          <a:bodyPr wrap="square" anchor="ctr" lIns="0" rIns="0" tIns="0" bIns="0">
+            <a:spAutoFit/>
+          </a:bodyPr>
+          <a:lstStyle/>
+          <a:p>
+            <a:pPr algn="l">
+              <a:lnSpc>
+                <a:spcPct val="100000"/>
+              </a:lnSpc>
+              <a:spcAft>
+                <a:spcPts val="600"/>
+              </a:spcAft>
+            </a:pPr>
+            <a:r>
+              <a:rPr sz="1500" b="1" i="0">
+                <a:solidFill>
+                  <a:srgbClr val="1E2761"/>
+                </a:solidFill>
+                <a:latin typeface="Calibri"/>
+              </a:rPr>
+              <a:t>Create an AD account</a:t>
+            </a:r>
+          </a:p>
+        </p:txBody>
+      </p:sp>
+      <p:sp>
+        <p:nvSpPr>
+          <p:cNvPr id="10" name="TextBox 9"/>
+          <p:cNvSpPr txBox="1"/>
+          <p:nvPr/>
+        </p:nvSpPr>
+        <p:spPr>
+          <a:xfrm>
+            <a:off x="4206240" y="2267712"/>
+            <a:ext cx="7406640" cy="786384"/>
+          </a:xfrm>
+          <a:prstGeom prst="rect">
+            <a:avLst/>
+          </a:prstGeom>
+          <a:noFill/>
+        </p:spPr>
+        <p:txBody>
+          <a:bodyPr wrap="square" anchor="ctr" lIns="0" rIns="0" tIns="0" bIns="0">
+            <a:spAutoFit/>
+          </a:bodyPr>
+          <a:lstStyle/>
+          <a:p>
+            <a:pPr algn="l">
+              <a:lnSpc>
+                <a:spcPct val="106000"/>
+              </a:lnSpc>
+              <a:spcAft>
+                <a:spcPts val="600"/>
+              </a:spcAft>
+            </a:pPr>
+            <a:r>
+              <a:rPr sz="1250" b="0" i="0">
+                <a:solidFill>
+                  <a:srgbClr val="5A5A6E"/>
+                </a:solidFill>
+                <a:latin typeface="Calibri"/>
+              </a:rPr>
+              <a:t>An object representing the storage account is created in your AD — a computer object (or a service-logon user object; both are supported).</a:t>
+            </a:r>
+          </a:p>
+        </p:txBody>
+      </p:sp>
+      <p:sp>
+        <p:nvSpPr>
+          <p:cNvPr id="11" name="Oval 10"/>
+          <p:cNvSpPr/>
+          <p:nvPr/>
+        </p:nvSpPr>
+        <p:spPr>
+          <a:xfrm>
+            <a:off x="640080" y="3218688"/>
+            <a:ext cx="512064" cy="512064"/>
+          </a:xfrm>
+          <a:prstGeom prst="ellipse">
+            <a:avLst/>
+          </a:prstGeom>
+          <a:solidFill>
+            <a:srgbClr val="2A367E"/>
+          </a:solidFill>
+          <a:ln>
+            <a:noFill/>
+          </a:ln>
+          <a:effectLst/>
+        </p:spPr>
+        <p:style>
+          <a:lnRef idx="1">
+            <a:schemeClr val="accent1"/>
+          </a:lnRef>
+          <a:fillRef idx="3">
+            <a:schemeClr val="accent1"/>
+          </a:fillRef>
+          <a:effectRef idx="2">
+            <a:schemeClr val="accent1"/>
+          </a:effectRef>
+          <a:fontRef idx="minor">
+            <a:schemeClr val="lt1"/>
+          </a:fontRef>
+        </p:style>
+        <p:txBody>
+          <a:bodyPr rtlCol="0" anchor="ctr" wrap="none" lIns="0" rIns="0"/>
+          <a:lstStyle/>
+          <a:p>
+            <a:pPr algn="ctr"/>
+            <a:r>
+              <a:rPr sz="1500" b="1">
+                <a:solidFill>
+                  <a:srgbClr val="FFFFFF"/>
+                </a:solidFill>
+                <a:latin typeface="Calibri"/>
+              </a:rPr>
+              <a:t>3</a:t>
+            </a:r>
+          </a:p>
+        </p:txBody>
+      </p:sp>
+      <p:sp>
+        <p:nvSpPr>
+          <p:cNvPr id="12" name="TextBox 11"/>
+          <p:cNvSpPr txBox="1"/>
+          <p:nvPr/>
+        </p:nvSpPr>
+        <p:spPr>
+          <a:xfrm>
+            <a:off x="1371600" y="3163824"/>
+            <a:ext cx="2651760" cy="786384"/>
+          </a:xfrm>
+          <a:prstGeom prst="rect">
+            <a:avLst/>
+          </a:prstGeom>
+          <a:noFill/>
+        </p:spPr>
+        <p:txBody>
+          <a:bodyPr wrap="square" anchor="ctr" lIns="0" rIns="0" tIns="0" bIns="0">
+            <a:spAutoFit/>
+          </a:bodyPr>
+          <a:lstStyle/>
+          <a:p>
+            <a:pPr algn="l">
+              <a:lnSpc>
+                <a:spcPct val="100000"/>
+              </a:lnSpc>
+              <a:spcAft>
+                <a:spcPts val="600"/>
+              </a:spcAft>
+            </a:pPr>
+            <a:r>
+              <a:rPr sz="1500" b="1" i="0">
+                <a:solidFill>
+                  <a:srgbClr val="1E2761"/>
+                </a:solidFill>
+                <a:latin typeface="Calibri"/>
+              </a:rPr>
+              <a:t>Password = kerb key</a:t>
+            </a:r>
+          </a:p>
+        </p:txBody>
+      </p:sp>
+      <p:sp>
+        <p:nvSpPr>
+          <p:cNvPr id="13" name="TextBox 12"/>
+          <p:cNvSpPr txBox="1"/>
+          <p:nvPr/>
+        </p:nvSpPr>
+        <p:spPr>
+          <a:xfrm>
+            <a:off x="4206240" y="3163824"/>
+            <a:ext cx="7406640" cy="786384"/>
+          </a:xfrm>
+          <a:prstGeom prst="rect">
+            <a:avLst/>
+          </a:prstGeom>
+          <a:noFill/>
+        </p:spPr>
+        <p:txBody>
+          <a:bodyPr wrap="square" anchor="ctr" lIns="0" rIns="0" tIns="0" bIns="0">
+            <a:spAutoFit/>
+          </a:bodyPr>
+          <a:lstStyle/>
+          <a:p>
+            <a:pPr algn="l">
+              <a:lnSpc>
+                <a:spcPct val="106000"/>
+              </a:lnSpc>
+              <a:spcAft>
+                <a:spcPts val="600"/>
+              </a:spcAft>
+            </a:pPr>
+            <a:r>
+              <a:rPr sz="1250" b="0" i="0">
+                <a:solidFill>
+                  <a:srgbClr val="5A5A6E"/>
+                </a:solidFill>
+                <a:latin typeface="Calibri"/>
+              </a:rPr>
+              <a:t>That AD account's password is set to the kerb1 key. Now AD and Azure Files share one secret.</a:t>
+            </a:r>
+          </a:p>
+        </p:txBody>
+      </p:sp>
+      <p:sp>
+        <p:nvSpPr>
+          <p:cNvPr id="14" name="Oval 13"/>
+          <p:cNvSpPr/>
+          <p:nvPr/>
+        </p:nvSpPr>
+        <p:spPr>
+          <a:xfrm>
+            <a:off x="640080" y="4114799"/>
+            <a:ext cx="512064" cy="512064"/>
+          </a:xfrm>
+          <a:prstGeom prst="ellipse">
+            <a:avLst/>
+          </a:prstGeom>
+          <a:solidFill>
+            <a:srgbClr val="2A367E"/>
+          </a:solidFill>
+          <a:ln>
+            <a:noFill/>
+          </a:ln>
+          <a:effectLst/>
+        </p:spPr>
+        <p:style>
+          <a:lnRef idx="1">
+            <a:schemeClr val="accent1"/>
+          </a:lnRef>
+          <a:fillRef idx="3">
+            <a:schemeClr val="accent1"/>
+          </a:fillRef>
+          <a:effectRef idx="2">
+            <a:schemeClr val="accent1"/>
+          </a:effectRef>
+          <a:fontRef idx="minor">
+            <a:schemeClr val="lt1"/>
+          </a:fontRef>
+        </p:style>
+        <p:txBody>
+          <a:bodyPr rtlCol="0" anchor="ctr" wrap="none" lIns="0" rIns="0"/>
+          <a:lstStyle/>
+          <a:p>
+            <a:pPr algn="ctr"/>
+            <a:r>
+              <a:rPr sz="1500" b="1">
+                <a:solidFill>
+                  <a:srgbClr val="FFFFFF"/>
+                </a:solidFill>
+                <a:latin typeface="Calibri"/>
+              </a:rPr>
+              <a:t>4</a:t>
+            </a:r>
+          </a:p>
+        </p:txBody>
+      </p:sp>
+      <p:sp>
+        <p:nvSpPr>
+          <p:cNvPr id="15" name="TextBox 14"/>
+          <p:cNvSpPr txBox="1"/>
+          <p:nvPr/>
+        </p:nvSpPr>
+        <p:spPr>
+          <a:xfrm>
+            <a:off x="1371600" y="4059935"/>
+            <a:ext cx="2651760" cy="786384"/>
+          </a:xfrm>
+          <a:prstGeom prst="rect">
+            <a:avLst/>
+          </a:prstGeom>
+          <a:noFill/>
+        </p:spPr>
+        <p:txBody>
+          <a:bodyPr wrap="square" anchor="ctr" lIns="0" rIns="0" tIns="0" bIns="0">
+            <a:spAutoFit/>
+          </a:bodyPr>
+          <a:lstStyle/>
+          <a:p>
+            <a:pPr algn="l">
+              <a:lnSpc>
+                <a:spcPct val="100000"/>
+              </a:lnSpc>
+              <a:spcAft>
+                <a:spcPts val="600"/>
+              </a:spcAft>
+            </a:pPr>
+            <a:r>
+              <a:rPr sz="1500" b="1" i="0">
+                <a:solidFill>
+                  <a:srgbClr val="1E2761"/>
+                </a:solidFill>
+                <a:latin typeface="Calibri"/>
+              </a:rPr>
+              <a:t>Register the SPN</a:t>
+            </a:r>
+          </a:p>
+        </p:txBody>
+      </p:sp>
+      <p:sp>
+        <p:nvSpPr>
+          <p:cNvPr id="16" name="TextBox 15"/>
+          <p:cNvSpPr txBox="1"/>
+          <p:nvPr/>
+        </p:nvSpPr>
+        <p:spPr>
+          <a:xfrm>
+            <a:off x="4206240" y="4059935"/>
+            <a:ext cx="7406640" cy="786384"/>
+          </a:xfrm>
+          <a:prstGeom prst="rect">
+            <a:avLst/>
+          </a:prstGeom>
+          <a:noFill/>
+        </p:spPr>
+        <p:txBody>
+          <a:bodyPr wrap="square" anchor="ctr" lIns="0" rIns="0" tIns="0" bIns="0">
+            <a:spAutoFit/>
+          </a:bodyPr>
+          <a:lstStyle/>
+          <a:p>
+            <a:pPr algn="l">
+              <a:lnSpc>
+                <a:spcPct val="106000"/>
+              </a:lnSpc>
+              <a:spcAft>
+                <a:spcPts val="600"/>
+              </a:spcAft>
+            </a:pPr>
+            <a:r>
+              <a:rPr sz="1250" b="0" i="0">
+                <a:solidFill>
+                  <a:srgbClr val="5A5A6E"/>
+                </a:solidFill>
+                <a:latin typeface="Calibri"/>
+              </a:rPr>
+              <a:t>cifs/&lt;sa&gt;.file.core.windows.net is registered on the account — the name the KDC looks up to find this service.</a:t>
+            </a:r>
+          </a:p>
+        </p:txBody>
+      </p:sp>
+      <p:sp>
+        <p:nvSpPr>
+          <p:cNvPr id="17" name="Oval 16"/>
+          <p:cNvSpPr/>
+          <p:nvPr/>
+        </p:nvSpPr>
+        <p:spPr>
+          <a:xfrm>
+            <a:off x="640080" y="5010912"/>
+            <a:ext cx="512064" cy="512064"/>
+          </a:xfrm>
+          <a:prstGeom prst="ellipse">
+            <a:avLst/>
+          </a:prstGeom>
+          <a:solidFill>
+            <a:srgbClr val="2A367E"/>
+          </a:solidFill>
+          <a:ln>
+            <a:noFill/>
+          </a:ln>
+          <a:effectLst/>
+        </p:spPr>
+        <p:style>
+          <a:lnRef idx="1">
+            <a:schemeClr val="accent1"/>
+          </a:lnRef>
+          <a:fillRef idx="3">
+            <a:schemeClr val="accent1"/>
+          </a:fillRef>
+          <a:effectRef idx="2">
+            <a:schemeClr val="accent1"/>
+          </a:effectRef>
+          <a:fontRef idx="minor">
+            <a:schemeClr val="lt1"/>
+          </a:fontRef>
+        </p:style>
+        <p:txBody>
+          <a:bodyPr rtlCol="0" anchor="ctr" wrap="none" lIns="0" rIns="0"/>
+          <a:lstStyle/>
+          <a:p>
+            <a:pPr algn="ctr"/>
+            <a:r>
+              <a:rPr sz="1500" b="1">
+                <a:solidFill>
+                  <a:srgbClr val="FFFFFF"/>
+                </a:solidFill>
+                <a:latin typeface="Calibri"/>
+              </a:rPr>
+              <a:t>5</a:t>
+            </a:r>
+          </a:p>
+        </p:txBody>
+      </p:sp>
+      <p:sp>
+        <p:nvSpPr>
+          <p:cNvPr id="18" name="TextBox 17"/>
+          <p:cNvSpPr txBox="1"/>
+          <p:nvPr/>
+        </p:nvSpPr>
+        <p:spPr>
+          <a:xfrm>
+            <a:off x="1371600" y="4956048"/>
+            <a:ext cx="2651760" cy="786384"/>
+          </a:xfrm>
+          <a:prstGeom prst="rect">
+            <a:avLst/>
+          </a:prstGeom>
+          <a:noFill/>
+        </p:spPr>
+        <p:txBody>
+          <a:bodyPr wrap="square" anchor="ctr" lIns="0" rIns="0" tIns="0" bIns="0">
+            <a:spAutoFit/>
+          </a:bodyPr>
+          <a:lstStyle/>
+          <a:p>
+            <a:pPr algn="l">
+              <a:lnSpc>
+                <a:spcPct val="100000"/>
+              </a:lnSpc>
+              <a:spcAft>
+                <a:spcPts val="600"/>
+              </a:spcAft>
+            </a:pPr>
+            <a:r>
+              <a:rPr sz="1500" b="1" i="0">
+                <a:solidFill>
+                  <a:srgbClr val="1E2761"/>
+                </a:solidFill>
+                <a:latin typeface="Calibri"/>
+              </a:rPr>
+              <a:t>Tell the storage account</a:t>
+            </a:r>
+          </a:p>
+        </p:txBody>
+      </p:sp>
+      <p:sp>
+        <p:nvSpPr>
+          <p:cNvPr id="19" name="TextBox 18"/>
+          <p:cNvSpPr txBox="1"/>
+          <p:nvPr/>
+        </p:nvSpPr>
+        <p:spPr>
+          <a:xfrm>
+            <a:off x="4206240" y="4956048"/>
+            <a:ext cx="7406640" cy="786384"/>
+          </a:xfrm>
+          <a:prstGeom prst="rect">
+            <a:avLst/>
+          </a:prstGeom>
+          <a:noFill/>
+        </p:spPr>
+        <p:txBody>
+          <a:bodyPr wrap="square" anchor="ctr" lIns="0" rIns="0" tIns="0" bIns="0">
+            <a:spAutoFit/>
+          </a:bodyPr>
+          <a:lstStyle/>
+          <a:p>
+            <a:pPr algn="l">
+              <a:lnSpc>
+                <a:spcPct val="106000"/>
+              </a:lnSpc>
+              <a:spcAft>
+                <a:spcPts val="600"/>
+              </a:spcAft>
+            </a:pPr>
+            <a:r>
+              <a:rPr sz="1250" b="0" i="0">
+                <a:solidFill>
+                  <a:srgbClr val="5A5A6E"/>
+                </a:solidFill>
+                <a:latin typeface="Calibri"/>
+              </a:rPr>
+              <a:t>Set-AzStorageAccount writes the domain metadata (domain name/GUID/SID, SamAccountName) so Azure Files knows which AD identity it is.</a:t>
+            </a:r>
+          </a:p>
+        </p:txBody>
+      </p:sp>
+      <p:sp>
+        <p:nvSpPr>
+          <p:cNvPr id="20" name="Rounded Rectangle 19"/>
+          <p:cNvSpPr/>
+          <p:nvPr/>
+        </p:nvSpPr>
+        <p:spPr>
+          <a:xfrm>
+            <a:off x="548640" y="5897880"/>
+            <a:ext cx="11091672" cy="658368"/>
+          </a:xfrm>
+          <a:prstGeom prst="roundRect">
+            <a:avLst>
+              <a:gd name="adj" fmla="val 8000"/>
+            </a:avLst>
+          </a:prstGeom>
+          <a:solidFill>
+            <a:srgbClr val="F3F6FD"/>
+          </a:solidFill>
+          <a:ln>
+            <a:noFill/>
+          </a:ln>
+          <a:effectLst/>
+        </p:spPr>
+        <p:style>
+          <a:lnRef idx="1">
+            <a:schemeClr val="accent1"/>
+          </a:lnRef>
+          <a:fillRef idx="3">
+            <a:schemeClr val="accent1"/>
+          </a:fillRef>
+          <a:effectRef idx="2">
+            <a:schemeClr val="accent1"/>
+          </a:effectRef>
+          <a:fontRef idx="minor">
+            <a:schemeClr val="lt1"/>
+          </a:fontRef>
+        </p:style>
+        <p:txBody>
+          <a:bodyPr rtlCol="0" anchor="ctr"/>
+          <a:lstStyle/>
+          <a:p>
+            <a:pPr algn="ctr"/>
+          </a:p>
+        </p:txBody>
+      </p:sp>
+      <p:sp>
+        <p:nvSpPr>
+          <p:cNvPr id="21" name="TextBox 20"/>
+          <p:cNvSpPr txBox="1"/>
+          <p:nvPr/>
+        </p:nvSpPr>
+        <p:spPr>
+          <a:xfrm>
+            <a:off x="822960" y="6035040"/>
+            <a:ext cx="10515600" cy="457200"/>
+          </a:xfrm>
+          <a:prstGeom prst="rect">
+            <a:avLst/>
+          </a:prstGeom>
+          <a:noFill/>
+        </p:spPr>
+        <p:txBody>
+          <a:bodyPr wrap="square" anchor="ctr" lIns="0" rIns="0" tIns="0" bIns="0">
+            <a:spAutoFit/>
+          </a:bodyPr>
+          <a:lstStyle/>
+          <a:p>
+            <a:pPr algn="l">
+              <a:lnSpc>
+                <a:spcPct val="100000"/>
+              </a:lnSpc>
+              <a:spcAft>
+                <a:spcPts val="600"/>
+              </a:spcAft>
+            </a:pPr>
+            <a:r>
+              <a:rPr sz="1450" b="1" i="0">
+                <a:solidFill>
+                  <a:srgbClr val="1E2761"/>
+                </a:solidFill>
+                <a:latin typeface="Calibri"/>
+              </a:rPr>
+              <a:t>To the DC, your storage account is just another domain server: </a:t>
+            </a:r>
+            <a:r>
+              <a:rPr sz="1450" b="0" i="0">
+                <a:solidFill>
+                  <a:srgbClr val="202440"/>
+                </a:solidFill>
+                <a:latin typeface="Calibri"/>
+              </a:rPr>
+              <a:t>an account with a password and an SPN. Nothing Azure-specific.</a:t>
+            </a:r>
+          </a:p>
+        </p:txBody>
+      </p:sp>
+    </p:spTree>
+  </p:cSld>
+  <p:clrMapOvr>
+    <a:masterClrMapping/>
+  </p:clrMapOvr>
+</p:sld>
+</file>
+
+<file path=ppt/slides/slide7.xml><?xml version="1.0" encoding="utf-8"?>
+<p:sld xmlns:a="http://schemas.openxmlformats.org/drawingml/2006/main" xmlns:p="http://schemas.openxmlformats.org/presentationml/2006/main" xmlns:r="http://schemas.openxmlformats.org/officeDocument/2006/relationships">
+  <p:cSld>
+    <p:spTree>
+      <p:nvGrpSpPr>
+        <p:cNvPr id="1" name=""/>
+        <p:cNvGrpSpPr/>
+        <p:nvPr/>
+      </p:nvGrpSpPr>
+      <p:grpSpPr/>
+      <p:sp>
+        <p:nvSpPr>
+          <p:cNvPr id="2" name="Rectangle 1"/>
+          <p:cNvSpPr/>
+          <p:nvPr/>
+        </p:nvSpPr>
+        <p:spPr>
+          <a:xfrm>
+            <a:off x="0" y="0"/>
+            <a:ext cx="12191695" cy="6858000"/>
+          </a:xfrm>
+          <a:prstGeom prst="rect">
+            <a:avLst/>
+          </a:prstGeom>
+          <a:solidFill>
+            <a:srgbClr val="FFFFFF"/>
+          </a:solidFill>
+          <a:ln>
+            <a:noFill/>
+          </a:ln>
+          <a:effectLst/>
+        </p:spPr>
+        <p:style>
+          <a:lnRef idx="1">
+            <a:schemeClr val="accent1"/>
+          </a:lnRef>
+          <a:fillRef idx="3">
+            <a:schemeClr val="accent1"/>
+          </a:fillRef>
+          <a:effectRef idx="2">
+            <a:schemeClr val="accent1"/>
+          </a:effectRef>
+          <a:fontRef idx="minor">
+            <a:schemeClr val="lt1"/>
+          </a:fontRef>
+        </p:style>
+        <p:txBody>
+          <a:bodyPr rtlCol="0" anchor="ctr"/>
+          <a:lstStyle/>
+          <a:p>
+            <a:pPr algn="ctr"/>
+          </a:p>
+        </p:txBody>
+      </p:sp>
+      <p:sp>
+        <p:nvSpPr>
+          <p:cNvPr id="3" name="TextBox 2"/>
+          <p:cNvSpPr txBox="1"/>
+          <p:nvPr/>
+        </p:nvSpPr>
+        <p:spPr>
+          <a:xfrm>
+            <a:off x="548640" y="292608"/>
+            <a:ext cx="11064240" cy="320040"/>
+          </a:xfrm>
+          <a:prstGeom prst="rect">
+            <a:avLst/>
+          </a:prstGeom>
+          <a:noFill/>
+        </p:spPr>
+        <p:txBody>
+          <a:bodyPr wrap="square" anchor="t" lIns="0" rIns="0" tIns="0" bIns="0">
+            <a:spAutoFit/>
+          </a:bodyPr>
+          <a:lstStyle/>
+          <a:p>
+            <a:pPr algn="l">
+              <a:lnSpc>
+                <a:spcPct val="100000"/>
+              </a:lnSpc>
+              <a:spcAft>
+                <a:spcPts val="600"/>
+              </a:spcAft>
+            </a:pPr>
+            <a:r>
+              <a:rPr sz="1300" b="1" i="0">
+                <a:solidFill>
+                  <a:srgbClr val="2A367E"/>
+                </a:solidFill>
+                <a:latin typeface="Calibri"/>
+              </a:rPr>
+              <a:t>MECHANISM 2 OF 3</a:t>
+            </a:r>
+          </a:p>
+        </p:txBody>
+      </p:sp>
+      <p:sp>
+        <p:nvSpPr>
+          <p:cNvPr id="4" name="TextBox 3"/>
+          <p:cNvSpPr txBox="1"/>
+          <p:nvPr/>
+        </p:nvSpPr>
+        <p:spPr>
+          <a:xfrm>
+            <a:off x="548640" y="566928"/>
+            <a:ext cx="11064240" cy="777240"/>
+          </a:xfrm>
+          <a:prstGeom prst="rect">
+            <a:avLst/>
+          </a:prstGeom>
+          <a:noFill/>
+        </p:spPr>
+        <p:txBody>
+          <a:bodyPr wrap="square" anchor="t" lIns="0" rIns="0" tIns="0" bIns="0">
+            <a:spAutoFit/>
+          </a:bodyPr>
+          <a:lstStyle/>
+          <a:p>
+            <a:pPr algn="l">
+              <a:lnSpc>
+                <a:spcPct val="100000"/>
+              </a:lnSpc>
+              <a:spcAft>
+                <a:spcPts val="600"/>
+              </a:spcAft>
+            </a:pPr>
+            <a:r>
+              <a:rPr sz="3300" b="1" i="0">
+                <a:solidFill>
+                  <a:srgbClr val="1E2761"/>
+                </a:solidFill>
+                <a:latin typeface="Cambria"/>
+              </a:rPr>
+              <a:t>Where tickets come from — and where they live</a:t>
+            </a:r>
+          </a:p>
+        </p:txBody>
+      </p:sp>
+      <p:sp>
+        <p:nvSpPr>
+          <p:cNvPr id="5" name="Rounded Rectangle 4"/>
+          <p:cNvSpPr/>
+          <p:nvPr/>
+        </p:nvSpPr>
+        <p:spPr>
+          <a:xfrm>
+            <a:off x="548640" y="1417320"/>
+            <a:ext cx="5760720" cy="2057400"/>
+          </a:xfrm>
+          <a:prstGeom prst="roundRect">
+            <a:avLst>
+              <a:gd name="adj" fmla="val 8000"/>
+            </a:avLst>
+          </a:prstGeom>
+          <a:solidFill>
+            <a:srgbClr val="F3F6FD"/>
+          </a:solidFill>
+          <a:ln>
+            <a:noFill/>
+          </a:ln>
+          <a:effectLst/>
+        </p:spPr>
+        <p:style>
+          <a:lnRef idx="1">
+            <a:schemeClr val="accent1"/>
+          </a:lnRef>
+          <a:fillRef idx="3">
+            <a:schemeClr val="accent1"/>
+          </a:fillRef>
+          <a:effectRef idx="2">
+            <a:schemeClr val="accent1"/>
+          </a:effectRef>
+          <a:fontRef idx="minor">
+            <a:schemeClr val="lt1"/>
+          </a:fontRef>
+        </p:style>
+        <p:txBody>
+          <a:bodyPr rtlCol="0" anchor="ctr"/>
+          <a:lstStyle/>
+          <a:p>
+            <a:pPr algn="ctr"/>
+          </a:p>
+        </p:txBody>
+      </p:sp>
+      <p:sp>
+        <p:nvSpPr>
+          <p:cNvPr id="6" name="TextBox 5"/>
+          <p:cNvSpPr txBox="1"/>
+          <p:nvPr/>
+        </p:nvSpPr>
+        <p:spPr>
+          <a:xfrm>
+            <a:off x="822960" y="1600200"/>
+            <a:ext cx="5212080" cy="365760"/>
+          </a:xfrm>
+          <a:prstGeom prst="rect">
+            <a:avLst/>
+          </a:prstGeom>
+          <a:noFill/>
+        </p:spPr>
+        <p:txBody>
+          <a:bodyPr wrap="square" anchor="t" lIns="0" rIns="0" tIns="0" bIns="0">
+            <a:spAutoFit/>
+          </a:bodyPr>
+          <a:lstStyle/>
+          <a:p>
+            <a:pPr algn="l">
+              <a:lnSpc>
+                <a:spcPct val="100000"/>
+              </a:lnSpc>
+              <a:spcAft>
+                <a:spcPts val="600"/>
+              </a:spcAft>
+            </a:pPr>
+            <a:r>
+              <a:rPr sz="1650" b="1" i="0">
+                <a:solidFill>
+                  <a:srgbClr val="1E2761"/>
+                </a:solidFill>
+                <a:latin typeface="Calibri"/>
+              </a:rPr>
+              <a:t>At sign-in → you get a TGT</a:t>
+            </a:r>
+          </a:p>
+        </p:txBody>
+      </p:sp>
+      <p:sp>
+        <p:nvSpPr>
+          <p:cNvPr id="7" name="TextBox 6"/>
+          <p:cNvSpPr txBox="1"/>
+          <p:nvPr/>
+        </p:nvSpPr>
+        <p:spPr>
+          <a:xfrm>
+            <a:off x="822960" y="2011680"/>
+            <a:ext cx="5212080" cy="1280160"/>
+          </a:xfrm>
+          <a:prstGeom prst="rect">
+            <a:avLst/>
+          </a:prstGeom>
+          <a:noFill/>
+        </p:spPr>
+        <p:txBody>
+          <a:bodyPr wrap="square" anchor="t" lIns="0" rIns="0" tIns="0" bIns="0">
+            <a:spAutoFit/>
+          </a:bodyPr>
+          <a:lstStyle/>
+          <a:p>
+            <a:pPr algn="l">
+              <a:lnSpc>
+                <a:spcPct val="110000"/>
+              </a:lnSpc>
+              <a:spcAft>
+                <a:spcPts val="600"/>
+              </a:spcAft>
+            </a:pPr>
+            <a:r>
+              <a:rPr sz="1350" b="0" i="0">
+                <a:solidFill>
+                  <a:srgbClr val="202440"/>
+                </a:solidFill>
+                <a:latin typeface="Calibri"/>
+              </a:rPr>
+              <a:t>AS-REQ/REP with the DC. The </a:t>
+            </a:r>
+            <a:r>
+              <a:rPr sz="1350" b="1" i="0">
+                <a:solidFill>
+                  <a:srgbClr val="202440"/>
+                </a:solidFill>
+                <a:latin typeface="Calibri"/>
+              </a:rPr>
+              <a:t>TGT</a:t>
+            </a:r>
+            <a:r>
+              <a:rPr sz="1350" b="0" i="0">
+                <a:solidFill>
+                  <a:srgbClr val="202440"/>
+                </a:solidFill>
+                <a:latin typeface="Calibri"/>
+              </a:rPr>
+              <a:t> is your proof of identity for the rest of the session — it is NOT tied to any one service. Windows stores it in the LSA ticket cache.</a:t>
+            </a:r>
+          </a:p>
+        </p:txBody>
+      </p:sp>
+      <p:sp>
+        <p:nvSpPr>
+          <p:cNvPr id="8" name="Rounded Rectangle 7"/>
+          <p:cNvSpPr/>
+          <p:nvPr/>
+        </p:nvSpPr>
+        <p:spPr>
+          <a:xfrm>
+            <a:off x="548640" y="3611880"/>
+            <a:ext cx="5760720" cy="2148840"/>
+          </a:xfrm>
+          <a:prstGeom prst="roundRect">
+            <a:avLst>
+              <a:gd name="adj" fmla="val 8000"/>
+            </a:avLst>
+          </a:prstGeom>
+          <a:solidFill>
+            <a:srgbClr val="F3F6FD"/>
+          </a:solidFill>
+          <a:ln>
+            <a:noFill/>
+          </a:ln>
+          <a:effectLst/>
+        </p:spPr>
+        <p:style>
+          <a:lnRef idx="1">
+            <a:schemeClr val="accent1"/>
+          </a:lnRef>
+          <a:fillRef idx="3">
+            <a:schemeClr val="accent1"/>
+          </a:fillRef>
+          <a:effectRef idx="2">
+            <a:schemeClr val="accent1"/>
+          </a:effectRef>
+          <a:fontRef idx="minor">
+            <a:schemeClr val="lt1"/>
+          </a:fontRef>
+        </p:style>
+        <p:txBody>
+          <a:bodyPr rtlCol="0" anchor="ctr"/>
+          <a:lstStyle/>
+          <a:p>
+            <a:pPr algn="ctr"/>
+          </a:p>
+        </p:txBody>
+      </p:sp>
+      <p:sp>
+        <p:nvSpPr>
+          <p:cNvPr id="9" name="TextBox 8"/>
+          <p:cNvSpPr txBox="1"/>
+          <p:nvPr/>
+        </p:nvSpPr>
+        <p:spPr>
+          <a:xfrm>
+            <a:off x="822960" y="3794760"/>
+            <a:ext cx="5212080" cy="365760"/>
+          </a:xfrm>
+          <a:prstGeom prst="rect">
+            <a:avLst/>
+          </a:prstGeom>
+          <a:noFill/>
+        </p:spPr>
+        <p:txBody>
+          <a:bodyPr wrap="square" anchor="t" lIns="0" rIns="0" tIns="0" bIns="0">
+            <a:spAutoFit/>
+          </a:bodyPr>
+          <a:lstStyle/>
+          <a:p>
+            <a:pPr algn="l">
+              <a:lnSpc>
+                <a:spcPct val="100000"/>
+              </a:lnSpc>
+              <a:spcAft>
+                <a:spcPts val="600"/>
+              </a:spcAft>
+            </a:pPr>
+            <a:r>
+              <a:rPr sz="1650" b="1" i="0">
+                <a:solidFill>
+                  <a:srgbClr val="1E2761"/>
+                </a:solidFill>
+                <a:latin typeface="Calibri"/>
+              </a:rPr>
+              <a:t>At mount → you get a service ticket</a:t>
+            </a:r>
+          </a:p>
+        </p:txBody>
+      </p:sp>
+      <p:sp>
+        <p:nvSpPr>
+          <p:cNvPr id="10" name="TextBox 9"/>
+          <p:cNvSpPr txBox="1"/>
+          <p:nvPr/>
+        </p:nvSpPr>
+        <p:spPr>
+          <a:xfrm>
+            <a:off x="822960" y="4206240"/>
+            <a:ext cx="5212080" cy="1371600"/>
+          </a:xfrm>
+          <a:prstGeom prst="rect">
+            <a:avLst/>
+          </a:prstGeom>
+          <a:noFill/>
+        </p:spPr>
+        <p:txBody>
+          <a:bodyPr wrap="square" anchor="t" lIns="0" rIns="0" tIns="0" bIns="0">
+            <a:spAutoFit/>
+          </a:bodyPr>
+          <a:lstStyle/>
+          <a:p>
+            <a:pPr algn="l">
+              <a:lnSpc>
+                <a:spcPct val="110000"/>
+              </a:lnSpc>
+              <a:spcAft>
+                <a:spcPts val="600"/>
+              </a:spcAft>
+            </a:pPr>
+            <a:r>
+              <a:rPr sz="1350" b="0" i="0">
+                <a:solidFill>
+                  <a:srgbClr val="202440"/>
+                </a:solidFill>
+                <a:latin typeface="Calibri"/>
+              </a:rPr>
+              <a:t>TGS-REQ/REP: the client presents the TGT and asks for </a:t>
+            </a:r>
+            <a:r>
+              <a:rPr sz="1250" b="0" i="0">
+                <a:solidFill>
+                  <a:srgbClr val="202440"/>
+                </a:solidFill>
+                <a:latin typeface="Courier New"/>
+              </a:rPr>
+              <a:t>cifs/&lt;sa&gt;…</a:t>
+            </a:r>
+            <a:r>
+              <a:rPr sz="1350" b="0" i="0">
+                <a:solidFill>
+                  <a:srgbClr val="202440"/>
+                </a:solidFill>
+                <a:latin typeface="Calibri"/>
+              </a:rPr>
+              <a:t>. The returned </a:t>
+            </a:r>
+            <a:r>
+              <a:rPr sz="1350" b="1" i="0">
+                <a:solidFill>
+                  <a:srgbClr val="202440"/>
+                </a:solidFill>
+                <a:latin typeface="Calibri"/>
+              </a:rPr>
+              <a:t>service ticket</a:t>
+            </a:r>
+            <a:r>
+              <a:rPr sz="1350" b="0" i="0">
+                <a:solidFill>
+                  <a:srgbClr val="202440"/>
+                </a:solidFill>
+                <a:latin typeface="Calibri"/>
+              </a:rPr>
+              <a:t> is cached too — one per service you touch.</a:t>
+            </a:r>
+          </a:p>
+        </p:txBody>
+      </p:sp>
+      <p:sp>
+        <p:nvSpPr>
+          <p:cNvPr id="11" name="TextBox 10"/>
+          <p:cNvSpPr txBox="1"/>
+          <p:nvPr/>
+        </p:nvSpPr>
+        <p:spPr>
+          <a:xfrm>
+            <a:off x="6583680" y="1417320"/>
+            <a:ext cx="5029200" cy="365760"/>
+          </a:xfrm>
+          <a:prstGeom prst="rect">
+            <a:avLst/>
+          </a:prstGeom>
+          <a:noFill/>
+        </p:spPr>
+        <p:txBody>
+          <a:bodyPr wrap="square" anchor="t" lIns="0" rIns="0" tIns="0" bIns="0">
+            <a:spAutoFit/>
+          </a:bodyPr>
+          <a:lstStyle/>
+          <a:p>
+            <a:pPr algn="l">
+              <a:lnSpc>
+                <a:spcPct val="100000"/>
+              </a:lnSpc>
+              <a:spcAft>
+                <a:spcPts val="600"/>
+              </a:spcAft>
+            </a:pPr>
+            <a:r>
+              <a:rPr sz="1650" b="1" i="0">
+                <a:solidFill>
+                  <a:srgbClr val="1E2761"/>
+                </a:solidFill>
+                <a:latin typeface="Calibri"/>
+              </a:rPr>
+              <a:t>That's why klist looks busy</a:t>
+            </a:r>
+          </a:p>
+        </p:txBody>
+      </p:sp>
+      <p:sp>
+        <p:nvSpPr>
+          <p:cNvPr id="12" name="Rounded Rectangle 11"/>
+          <p:cNvSpPr/>
+          <p:nvPr/>
+        </p:nvSpPr>
+        <p:spPr>
+          <a:xfrm>
+            <a:off x="6583680" y="1874519"/>
+            <a:ext cx="5029200" cy="2606040"/>
+          </a:xfrm>
+          <a:prstGeom prst="roundRect">
+            <a:avLst>
+              <a:gd name="adj" fmla="val 5000"/>
+            </a:avLst>
+          </a:prstGeom>
+          <a:solidFill>
+            <a:srgbClr val="161B38"/>
+          </a:solidFill>
+          <a:ln>
+            <a:noFill/>
+          </a:ln>
+          <a:effectLst/>
+        </p:spPr>
+        <p:style>
+          <a:lnRef idx="1">
+            <a:schemeClr val="accent1"/>
+          </a:lnRef>
+          <a:fillRef idx="3">
+            <a:schemeClr val="accent1"/>
+          </a:fillRef>
+          <a:effectRef idx="2">
+            <a:schemeClr val="accent1"/>
+          </a:effectRef>
+          <a:fontRef idx="minor">
+            <a:schemeClr val="lt1"/>
+          </a:fontRef>
+        </p:style>
+        <p:txBody>
+          <a:bodyPr rtlCol="0" anchor="t" wrap="square" lIns="201168" rIns="164592" tIns="128016" bIns="109728"/>
+          <a:lstStyle/>
+          <a:p>
+            <a:pPr algn="l">
+              <a:spcAft>
+                <a:spcPts val="200"/>
+              </a:spcAft>
+            </a:pPr>
+            <a:r>
+              <a:rPr sz="1200" b="0">
+                <a:solidFill>
+                  <a:srgbClr val="F2C14E"/>
+                </a:solidFill>
+                <a:latin typeface="Courier New"/>
+              </a:rPr>
+              <a:t>klist   # right after logon</a:t>
+            </a:r>
+          </a:p>
+          <a:p>
+            <a:pPr algn="l">
+              <a:spcAft>
+                <a:spcPts val="200"/>
+              </a:spcAft>
+            </a:pPr>
+            <a:r>
+              <a:rPr sz="1200" b="0">
+                <a:solidFill>
+                  <a:srgbClr val="D8E4FF"/>
+                </a:solidFill>
+                <a:latin typeface="Courier New"/>
+              </a:rPr>
+              <a:t>#0  krbtgt/CONTOSO.LOCAL      &lt;- the TGT</a:t>
+            </a:r>
+          </a:p>
+          <a:p>
+            <a:pPr algn="l">
+              <a:spcAft>
+                <a:spcPts val="200"/>
+              </a:spcAft>
+            </a:pPr>
+            <a:r>
+              <a:rPr sz="1200" b="0">
+                <a:solidFill>
+                  <a:srgbClr val="D8E4FF"/>
+                </a:solidFill>
+                <a:latin typeface="Courier New"/>
+              </a:rPr>
+              <a:t>#1  LDAP/dc.contoso.local</a:t>
+            </a:r>
+          </a:p>
+          <a:p>
+            <a:pPr algn="l">
+              <a:spcAft>
+                <a:spcPts val="200"/>
+              </a:spcAft>
+            </a:pPr>
+            <a:r>
+              <a:rPr sz="1200" b="0">
+                <a:solidFill>
+                  <a:srgbClr val="D8E4FF"/>
+                </a:solidFill>
+                <a:latin typeface="Courier New"/>
+              </a:rPr>
+              <a:t>#2  cifs/dc.contoso.local     &lt;- GPO read</a:t>
+            </a:r>
+          </a:p>
+          <a:p>
+            <a:pPr algn="l">
+              <a:spcAft>
+                <a:spcPts val="200"/>
+              </a:spcAft>
+            </a:pPr>
+            <a:r>
+              <a:rPr sz="1200" b="0">
+                <a:solidFill>
+                  <a:srgbClr val="F2C14E"/>
+                </a:solidFill>
+                <a:latin typeface="Courier New"/>
+              </a:rPr>
+              <a:t>klist   # after mounting the share</a:t>
+            </a:r>
+          </a:p>
+          <a:p>
+            <a:pPr algn="l">
+              <a:spcAft>
+                <a:spcPts val="200"/>
+              </a:spcAft>
+            </a:pPr>
+            <a:r>
+              <a:rPr sz="1200" b="0">
+                <a:solidFill>
+                  <a:srgbClr val="3DA56E"/>
+                </a:solidFill>
+                <a:latin typeface="Courier New"/>
+              </a:rPr>
+              <a:t>#3  cifs/&lt;sa&gt;.file.core.windows.net</a:t>
+            </a:r>
+          </a:p>
+          <a:p>
+            <a:pPr algn="l">
+              <a:spcAft>
+                <a:spcPts val="200"/>
+              </a:spcAft>
+            </a:pPr>
+            <a:r>
+              <a:rPr sz="1200" b="0">
+                <a:solidFill>
+                  <a:srgbClr val="3DA56E"/>
+                </a:solidFill>
+                <a:latin typeface="Courier New"/>
+              </a:rPr>
+              <a:t>    KerbTicket Encryption Type: AES-256</a:t>
+            </a:r>
+          </a:p>
+        </p:txBody>
+      </p:sp>
+      <p:sp>
+        <p:nvSpPr>
+          <p:cNvPr id="13" name="TextBox 12"/>
+          <p:cNvSpPr txBox="1"/>
+          <p:nvPr/>
+        </p:nvSpPr>
+        <p:spPr>
+          <a:xfrm>
+            <a:off x="6583680" y="4617720"/>
+            <a:ext cx="5029200" cy="1463040"/>
+          </a:xfrm>
+          <a:prstGeom prst="rect">
+            <a:avLst/>
+          </a:prstGeom>
+          <a:noFill/>
+        </p:spPr>
+        <p:txBody>
+          <a:bodyPr wrap="square" lIns="0" rIns="0" tIns="0">
+            <a:spAutoFit/>
+          </a:bodyPr>
+          <a:lstStyle/>
+          <a:p>
+            <a:pPr>
+              <a:lnSpc>
+                <a:spcPct val="105000"/>
+              </a:lnSpc>
+              <a:spcAft>
+                <a:spcPts val="800"/>
+              </a:spcAft>
+            </a:pPr>
+            <a:r>
+              <a:rPr sz="1300">
+                <a:solidFill>
+                  <a:srgbClr val="2A367E"/>
+                </a:solidFill>
+                <a:latin typeface="Calibri"/>
+              </a:rPr>
+              <a:t>▪  </a:t>
+            </a:r>
+            <a:r>
+              <a:rPr b="1" sz="1300">
+                <a:solidFill>
+                  <a:srgbClr val="202440"/>
+                </a:solidFill>
+                <a:latin typeface="Calibri"/>
+              </a:rPr>
+              <a:t>Lifetime:</a:t>
+            </a:r>
+            <a:r>
+              <a:rPr sz="1300">
+                <a:solidFill>
+                  <a:srgbClr val="202440"/>
+                </a:solidFill>
+                <a:latin typeface="Calibri"/>
+              </a:rPr>
+              <a:t> ~10 h, renewable ~7 days</a:t>
+            </a:r>
+          </a:p>
+          <a:p>
+            <a:pPr>
+              <a:lnSpc>
+                <a:spcPct val="105000"/>
+              </a:lnSpc>
+              <a:spcAft>
+                <a:spcPts val="800"/>
+              </a:spcAft>
+            </a:pPr>
+            <a:r>
+              <a:rPr sz="1300">
+                <a:solidFill>
+                  <a:srgbClr val="2A367E"/>
+                </a:solidFill>
+                <a:latin typeface="Calibri"/>
+              </a:rPr>
+              <a:t>▪  </a:t>
+            </a:r>
+            <a:r>
+              <a:rPr b="1" sz="1300">
+                <a:solidFill>
+                  <a:srgbClr val="202440"/>
+                </a:solidFill>
+                <a:latin typeface="Calibri"/>
+              </a:rPr>
+              <a:t>klist purge</a:t>
+            </a:r>
+            <a:r>
+              <a:rPr sz="1300">
+                <a:solidFill>
+                  <a:srgbClr val="202440"/>
+                </a:solidFill>
+                <a:latin typeface="Calibri"/>
+              </a:rPr>
+              <a:t> empties the cache — the next access just gets fresh tickets</a:t>
+            </a:r>
+          </a:p>
+        </p:txBody>
+      </p:sp>
+      <p:sp>
+        <p:nvSpPr>
+          <p:cNvPr id="14" name="TextBox 13"/>
+          <p:cNvSpPr txBox="1"/>
+          <p:nvPr/>
+        </p:nvSpPr>
+        <p:spPr>
+          <a:xfrm>
+            <a:off x="548640" y="6446520"/>
+            <a:ext cx="11064240" cy="320040"/>
+          </a:xfrm>
+          <a:prstGeom prst="rect">
+            <a:avLst/>
+          </a:prstGeom>
+          <a:noFill/>
+        </p:spPr>
+        <p:txBody>
+          <a:bodyPr wrap="square" anchor="t" lIns="0" rIns="0" tIns="0" bIns="0">
+            <a:spAutoFit/>
+          </a:bodyPr>
+          <a:lstStyle/>
+          <a:p>
+            <a:pPr algn="l">
+              <a:lnSpc>
+                <a:spcPct val="100000"/>
+              </a:lnSpc>
+              <a:spcAft>
+                <a:spcPts val="0"/>
+              </a:spcAft>
+            </a:pPr>
+            <a:r>
+              <a:rPr sz="1100" b="0" i="0">
+                <a:solidFill>
+                  <a:srgbClr val="5A5A6E"/>
+                </a:solidFill>
+                <a:latin typeface="Calibri"/>
+              </a:rPr>
+              <a:t>Tickets are per-user and per-session, held in memory by LSA — never written to disk. A reboot or sign-out clears them.</a:t>
+            </a:r>
+          </a:p>
+        </p:txBody>
+      </p:sp>
+    </p:spTree>
+  </p:cSld>
+  <p:clrMapOvr>
+    <a:masterClrMapping/>
+  </p:clrMapOvr>
+</p:sld>
+</file>
+
+<file path=ppt/slides/slide8.xml><?xml version="1.0" encoding="utf-8"?>
+<p:sld xmlns:a="http://schemas.openxmlformats.org/drawingml/2006/main" xmlns:p="http://schemas.openxmlformats.org/presentationml/2006/main" xmlns:r="http://schemas.openxmlformats.org/officeDocument/2006/relationships">
+  <p:cSld>
+    <p:spTree>
+      <p:nvGrpSpPr>
+        <p:cNvPr id="1" name=""/>
+        <p:cNvGrpSpPr/>
+        <p:nvPr/>
+      </p:nvGrpSpPr>
+      <p:grpSpPr/>
+      <p:sp>
+        <p:nvSpPr>
+          <p:cNvPr id="2" name="Rectangle 1"/>
+          <p:cNvSpPr/>
+          <p:nvPr/>
+        </p:nvSpPr>
+        <p:spPr>
+          <a:xfrm>
+            <a:off x="0" y="0"/>
+            <a:ext cx="12191695" cy="6858000"/>
+          </a:xfrm>
+          <a:prstGeom prst="rect">
+            <a:avLst/>
+          </a:prstGeom>
+          <a:solidFill>
+            <a:srgbClr val="FFFFFF"/>
+          </a:solidFill>
+          <a:ln>
+            <a:noFill/>
+          </a:ln>
+          <a:effectLst/>
+        </p:spPr>
+        <p:style>
+          <a:lnRef idx="1">
+            <a:schemeClr val="accent1"/>
+          </a:lnRef>
+          <a:fillRef idx="3">
+            <a:schemeClr val="accent1"/>
+          </a:fillRef>
+          <a:effectRef idx="2">
+            <a:schemeClr val="accent1"/>
+          </a:effectRef>
+          <a:fontRef idx="minor">
+            <a:schemeClr val="lt1"/>
+          </a:fontRef>
+        </p:style>
+        <p:txBody>
+          <a:bodyPr rtlCol="0" anchor="ctr"/>
+          <a:lstStyle/>
+          <a:p>
+            <a:pPr algn="ctr"/>
+          </a:p>
+        </p:txBody>
+      </p:sp>
+      <p:sp>
+        <p:nvSpPr>
+          <p:cNvPr id="3" name="TextBox 2"/>
+          <p:cNvSpPr txBox="1"/>
+          <p:nvPr/>
+        </p:nvSpPr>
+        <p:spPr>
+          <a:xfrm>
+            <a:off x="548640" y="292608"/>
+            <a:ext cx="11064240" cy="320040"/>
+          </a:xfrm>
+          <a:prstGeom prst="rect">
+            <a:avLst/>
+          </a:prstGeom>
+          <a:noFill/>
+        </p:spPr>
+        <p:txBody>
+          <a:bodyPr wrap="square" anchor="t" lIns="0" rIns="0" tIns="0" bIns="0">
+            <a:spAutoFit/>
+          </a:bodyPr>
+          <a:lstStyle/>
+          <a:p>
+            <a:pPr algn="l">
+              <a:lnSpc>
+                <a:spcPct val="100000"/>
+              </a:lnSpc>
+              <a:spcAft>
+                <a:spcPts val="600"/>
+              </a:spcAft>
+            </a:pPr>
+            <a:r>
+              <a:rPr sz="1300" b="1" i="0">
+                <a:solidFill>
+                  <a:srgbClr val="2A367E"/>
+                </a:solidFill>
+                <a:latin typeface="Calibri"/>
+              </a:rPr>
+              <a:t>MECHANISM 3 OF 3</a:t>
+            </a:r>
+          </a:p>
+        </p:txBody>
+      </p:sp>
+      <p:sp>
+        <p:nvSpPr>
+          <p:cNvPr id="4" name="TextBox 3"/>
+          <p:cNvSpPr txBox="1"/>
+          <p:nvPr/>
+        </p:nvSpPr>
+        <p:spPr>
+          <a:xfrm>
+            <a:off x="548640" y="566928"/>
+            <a:ext cx="11064240" cy="777240"/>
+          </a:xfrm>
+          <a:prstGeom prst="rect">
+            <a:avLst/>
+          </a:prstGeom>
+          <a:noFill/>
+        </p:spPr>
+        <p:txBody>
+          <a:bodyPr wrap="square" anchor="t" lIns="0" rIns="0" tIns="0" bIns="0">
+            <a:spAutoFit/>
+          </a:bodyPr>
+          <a:lstStyle/>
+          <a:p>
+            <a:pPr algn="l">
+              <a:lnSpc>
+                <a:spcPct val="100000"/>
+              </a:lnSpc>
+              <a:spcAft>
+                <a:spcPts val="600"/>
+              </a:spcAft>
+            </a:pPr>
+            <a:r>
+              <a:rPr sz="3300" b="1" i="0">
+                <a:solidFill>
+                  <a:srgbClr val="1E2761"/>
+                </a:solidFill>
+                <a:latin typeface="Cambria"/>
+              </a:rPr>
+              <a:t>Who can open what — and why 1396 happens</a:t>
+            </a:r>
+          </a:p>
+        </p:txBody>
+      </p:sp>
+      <p:sp>
+        <p:nvSpPr>
+          <p:cNvPr id="5" name="TextBox 4"/>
+          <p:cNvSpPr txBox="1"/>
+          <p:nvPr/>
+        </p:nvSpPr>
+        <p:spPr>
+          <a:xfrm>
+            <a:off x="548640" y="1371600"/>
+            <a:ext cx="11064240" cy="411480"/>
+          </a:xfrm>
+          <a:prstGeom prst="rect">
+            <a:avLst/>
+          </a:prstGeom>
+          <a:noFill/>
+        </p:spPr>
+        <p:txBody>
+          <a:bodyPr wrap="square" anchor="t" lIns="0" rIns="0" tIns="0" bIns="0">
+            <a:spAutoFit/>
+          </a:bodyPr>
+          <a:lstStyle/>
+          <a:p>
+            <a:pPr algn="l">
+              <a:lnSpc>
+                <a:spcPct val="100000"/>
+              </a:lnSpc>
+              <a:spcAft>
+                <a:spcPts val="600"/>
+              </a:spcAft>
+            </a:pPr>
+            <a:r>
+              <a:rPr sz="1550" b="0" i="0">
+                <a:solidFill>
+                  <a:srgbClr val="202440"/>
+                </a:solidFill>
+                <a:latin typeface="Calibri"/>
+              </a:rPr>
+              <a:t>Kerberos is symmetric-key: a ticket is locked with the key of the party it is meant for.</a:t>
             </a:r>
           </a:p>
         </p:txBody>
       </p:sp>
       <p:graphicFrame>
         <p:nvGraphicFramePr>
-          <p:cNvPr id="5" name="Table 4"/>
+          <p:cNvPr id="6" name="Table 5"/>
           <p:cNvGraphicFramePr>
             <a:graphicFrameLocks noGrp="1"/>
           </p:cNvGraphicFramePr>
           <p:nvPr/>
         </p:nvGraphicFramePr>
         <p:xfrm>
-          <a:off x="548640" y="1554480"/>
-          <a:ext cx="11064240" cy="3264408"/>
+          <a:off x="548640" y="1874519"/>
+          <a:ext cx="11064240" cy="1837944"/>
         </p:xfrm>
         <a:graphic>
           <a:graphicData uri="http://schemas.openxmlformats.org/drawingml/2006/table">
@@ -19455,9 +22157,9 @@
                 <a:tableStyleId>{5C22544A-7EE6-4342-B048-85BDC9FD1C3A}</a:tableStyleId>
               </a:tblPr>
               <a:tblGrid>
-                <a:gridCol w="2834640"/>
-                <a:gridCol w="4937760"/>
-                <a:gridCol w="3291840"/>
+                <a:gridCol w="2103120"/>
+                <a:gridCol w="3657600"/>
+                <a:gridCol w="5303520"/>
               </a:tblGrid>
               <a:tr h="411480">
                 <a:tc>
@@ -19472,7 +22174,7 @@
                           </a:solidFill>
                           <a:latin typeface="Calibri"/>
                         </a:rPr>
-                        <a:t>Kerberos role</a:t>
+                        <a:t>Ticket</a:t>
                       </a:r>
                     </a:p>
                   </a:txBody>
@@ -19494,7 +22196,7 @@
                           </a:solidFill>
                           <a:latin typeface="Calibri"/>
                         </a:rPr>
-                        <a:t>In this lab</a:t>
+                        <a:t>Locked with</a:t>
                       </a:r>
                     </a:p>
                   </a:txBody>
@@ -19516,7 +22218,7 @@
                           </a:solidFill>
                           <a:latin typeface="Calibri"/>
                         </a:rPr>
-                        <a:t>Key material</a:t>
+                        <a:t>Who can open it</a:t>
                       </a:r>
                     </a:p>
                   </a:txBody>
@@ -19534,13 +22236,13 @@
                     <a:lstStyle/>
                     <a:p>
                       <a:r>
-                        <a:rPr sz="1400" b="0">
+                        <a:rPr sz="1350" b="0">
                           <a:solidFill>
                             <a:srgbClr val="202440"/>
                           </a:solidFill>
                           <a:latin typeface="Calibri"/>
                         </a:rPr>
-                        <a:t>KDC (AS + TGS)</a:t>
+                        <a:t>TGT</a:t>
                       </a:r>
                     </a:p>
                   </a:txBody>
@@ -19556,13 +22258,22 @@
                     <a:lstStyle/>
                     <a:p>
                       <a:r>
-                        <a:rPr sz="1400" b="0">
+                        <a:rPr sz="1200" b="0">
+                          <a:solidFill>
+                            <a:srgbClr val="202440"/>
+                          </a:solidFill>
+                          <a:latin typeface="Courier New"/>
+                        </a:rPr>
+                        <a:t>krbtgt</a:t>
+                      </a:r>
+                      <a:r>
+                        <a:rPr sz="1350" b="0">
                           <a:solidFill>
                             <a:srgbClr val="202440"/>
                           </a:solidFill>
                           <a:latin typeface="Calibri"/>
                         </a:rPr>
-                        <a:t>Your DC — contoso.local domain controller</a:t>
+                        <a:t> account key</a:t>
                       </a:r>
                     </a:p>
                   </a:txBody>
@@ -19578,13 +22289,13 @@
                     <a:lstStyle/>
                     <a:p>
                       <a:r>
-                        <a:rPr sz="1400" b="0">
+                        <a:rPr sz="1350" b="0">
                           <a:solidFill>
                             <a:srgbClr val="202440"/>
                           </a:solidFill>
                           <a:latin typeface="Calibri"/>
                         </a:rPr>
-                        <a:t>krbtgt account</a:t>
+                        <a:t>Only the KDC. The client just carries it — it can't read inside.</a:t>
                       </a:r>
                     </a:p>
                   </a:txBody>
@@ -19602,13 +22313,13 @@
                     <a:lstStyle/>
                     <a:p>
                       <a:r>
-                        <a:rPr sz="1400" b="0">
+                        <a:rPr sz="1350" b="0">
                           <a:solidFill>
                             <a:srgbClr val="202440"/>
                           </a:solidFill>
                           <a:latin typeface="Calibri"/>
                         </a:rPr>
-                        <a:t>Client</a:t>
+                        <a:t>Service ticket</a:t>
                       </a:r>
                     </a:p>
                   </a:txBody>
@@ -19624,13 +22335,13 @@
                     <a:lstStyle/>
                     <a:p>
                       <a:r>
-                        <a:rPr sz="1400" b="0">
+                        <a:rPr sz="1350" b="1">
                           <a:solidFill>
                             <a:srgbClr val="202440"/>
                           </a:solidFill>
                           <a:latin typeface="Calibri"/>
                         </a:rPr>
-                        <a:t>Client VM, logged on as CONTOSO\labuser1</a:t>
+                        <a:t>the storage account's kerb key</a:t>
                       </a:r>
                     </a:p>
                   </a:txBody>
@@ -19646,185 +22357,13 @@
                     <a:lstStyle/>
                     <a:p>
                       <a:r>
-                        <a:rPr sz="1400" b="0">
+                        <a:rPr sz="1350" b="0">
                           <a:solidFill>
                             <a:srgbClr val="202440"/>
                           </a:solidFill>
                           <a:latin typeface="Calibri"/>
                         </a:rPr>
-                        <a:t>user password hash</a:t>
-                      </a:r>
-                    </a:p>
-                  </a:txBody>
-                  <a:tcPr marL="73152" marR="73152" marT="27432" marB="27432" anchor="ctr">
-                    <a:solidFill>
-                      <a:srgbClr val="F3F6FD"/>
-                    </a:solidFill>
-                  </a:tcPr>
-                </a:tc>
-              </a:tr>
-              <a:tr h="713232">
-                <a:tc>
-                  <a:txBody>
-                    <a:bodyPr wrap="square"/>
-                    <a:lstStyle/>
-                    <a:p>
-                      <a:r>
-                        <a:rPr sz="1400" b="0">
-                          <a:solidFill>
-                            <a:srgbClr val="202440"/>
-                          </a:solidFill>
-                          <a:latin typeface="Calibri"/>
-                        </a:rPr>
-                        <a:t>Service </a:t>
-                      </a:r>
-                      <a:r>
-                        <a:rPr sz="1400" b="1">
-                          <a:solidFill>
-                            <a:srgbClr val="202440"/>
-                          </a:solidFill>
-                          <a:latin typeface="Calibri"/>
-                        </a:rPr>
-                        <a:t>(the interesting one!)</a:t>
-                      </a:r>
-                    </a:p>
-                  </a:txBody>
-                  <a:tcPr marL="73152" marR="73152" marT="27432" marB="27432" anchor="ctr">
-                    <a:solidFill>
-                      <a:srgbClr val="FFFFFF"/>
-                    </a:solidFill>
-                  </a:tcPr>
-                </a:tc>
-                <a:tc>
-                  <a:txBody>
-                    <a:bodyPr wrap="square"/>
-                    <a:lstStyle/>
-                    <a:p>
-                      <a:r>
-                        <a:rPr sz="1400" b="0">
-                          <a:solidFill>
-                            <a:srgbClr val="202440"/>
-                          </a:solidFill>
-                          <a:latin typeface="Calibri"/>
-                        </a:rPr>
-                        <a:t>Storage account — an AD </a:t>
-                      </a:r>
-                      <a:r>
-                        <a:rPr sz="1400" b="1">
-                          <a:solidFill>
-                            <a:srgbClr val="202440"/>
-                          </a:solidFill>
-                          <a:latin typeface="Calibri"/>
-                        </a:rPr>
-                        <a:t>computer account</a:t>
-                      </a:r>
-                      <a:r>
-                        <a:rPr sz="1400" b="0">
-                          <a:solidFill>
-                            <a:srgbClr val="202440"/>
-                          </a:solidFill>
-                          <a:latin typeface="Calibri"/>
-                        </a:rPr>
-                        <a:t> named after it</a:t>
-                      </a:r>
-                    </a:p>
-                  </a:txBody>
-                  <a:tcPr marL="73152" marR="73152" marT="27432" marB="27432" anchor="ctr">
-                    <a:solidFill>
-                      <a:srgbClr val="FFFFFF"/>
-                    </a:solidFill>
-                  </a:tcPr>
-                </a:tc>
-                <a:tc>
-                  <a:txBody>
-                    <a:bodyPr wrap="square"/>
-                    <a:lstStyle/>
-                    <a:p>
-                      <a:r>
-                        <a:rPr sz="1400" b="0">
-                          <a:solidFill>
-                            <a:srgbClr val="202440"/>
-                          </a:solidFill>
-                          <a:latin typeface="Calibri"/>
-                        </a:rPr>
-                        <a:t>its password = the SA's </a:t>
-                      </a:r>
-                      <a:r>
-                        <a:rPr sz="1400" b="1">
-                          <a:solidFill>
-                            <a:srgbClr val="202440"/>
-                          </a:solidFill>
-                          <a:latin typeface="Calibri"/>
-                        </a:rPr>
-                        <a:t>kerb1 key</a:t>
-                      </a:r>
-                    </a:p>
-                  </a:txBody>
-                  <a:tcPr marL="73152" marR="73152" marT="27432" marB="27432" anchor="ctr">
-                    <a:solidFill>
-                      <a:srgbClr val="FFFFFF"/>
-                    </a:solidFill>
-                  </a:tcPr>
-                </a:tc>
-              </a:tr>
-              <a:tr h="713232">
-                <a:tc>
-                  <a:txBody>
-                    <a:bodyPr wrap="square"/>
-                    <a:lstStyle/>
-                    <a:p>
-                      <a:r>
-                        <a:rPr sz="1400" b="0">
-                          <a:solidFill>
-                            <a:srgbClr val="202440"/>
-                          </a:solidFill>
-                          <a:latin typeface="Calibri"/>
-                        </a:rPr>
-                        <a:t>Service Principal Name</a:t>
-                      </a:r>
-                    </a:p>
-                  </a:txBody>
-                  <a:tcPr marL="73152" marR="73152" marT="27432" marB="27432" anchor="ctr">
-                    <a:solidFill>
-                      <a:srgbClr val="F3F6FD"/>
-                    </a:solidFill>
-                  </a:tcPr>
-                </a:tc>
-                <a:tc>
-                  <a:txBody>
-                    <a:bodyPr wrap="square"/>
-                    <a:lstStyle/>
-                    <a:p>
-                      <a:r>
-                        <a:rPr sz="1200" b="0">
-                          <a:solidFill>
-                            <a:srgbClr val="202440"/>
-                          </a:solidFill>
-                          <a:latin typeface="Courier New"/>
-                        </a:rPr>
-                        <a:t>cifs/&lt;sa&gt;.file.core.windows.net</a:t>
-                      </a:r>
-                    </a:p>
-                  </a:txBody>
-                  <a:tcPr marL="73152" marR="73152" marT="27432" marB="27432" anchor="ctr">
-                    <a:solidFill>
-                      <a:srgbClr val="F3F6FD"/>
-                    </a:solidFill>
-                  </a:tcPr>
-                </a:tc>
-                <a:tc>
-                  <a:txBody>
-                    <a:bodyPr wrap="square"/>
-                    <a:lstStyle/>
-                    <a:p>
-                      <a:r>
-                        <a:rPr sz="1400" b="0">
-                          <a:solidFill>
-                            <a:srgbClr val="202440"/>
-                          </a:solidFill>
-                          <a:latin typeface="Calibri"/>
-                        </a:rPr>
-                        <a:t>how the TGS finds the service</a:t>
+                        <a:t>Only Azure Files — using kerb1, then kerb2 if that fails.</a:t>
                       </a:r>
                     </a:p>
                   </a:txBody>
@@ -19841,14 +22380,14 @@
       </p:graphicFrame>
       <p:sp>
         <p:nvSpPr>
-          <p:cNvPr id="6" name="Rounded Rectangle 5"/>
+          <p:cNvPr id="7" name="Rounded Rectangle 6"/>
           <p:cNvSpPr/>
           <p:nvPr/>
         </p:nvSpPr>
         <p:spPr>
           <a:xfrm>
-            <a:off x="548640" y="4892040"/>
-            <a:ext cx="11064240" cy="1234440"/>
+            <a:off x="548640" y="3977639"/>
+            <a:ext cx="11091672" cy="1371600"/>
           </a:xfrm>
           <a:prstGeom prst="roundRect">
             <a:avLst>
@@ -19856,7 +22395,7 @@
             </a:avLst>
           </a:prstGeom>
           <a:solidFill>
-            <a:srgbClr val="F3F6FD"/>
+            <a:srgbClr val="FDECEC"/>
           </a:solidFill>
           <a:ln>
             <a:noFill/>
@@ -19887,14 +22426,14 @@
       </p:sp>
       <p:sp>
         <p:nvSpPr>
-          <p:cNvPr id="7" name="TextBox 6"/>
+          <p:cNvPr id="8" name="TextBox 7"/>
           <p:cNvSpPr txBox="1"/>
           <p:nvPr/>
         </p:nvSpPr>
         <p:spPr>
           <a:xfrm>
-            <a:off x="822960" y="5074920"/>
-            <a:ext cx="10515600" cy="914400"/>
+            <a:off x="822960" y="4160520"/>
+            <a:ext cx="10515600" cy="1051560"/>
           </a:xfrm>
           <a:prstGeom prst="rect">
             <a:avLst/>
@@ -19909,20 +22448,38 @@
           <a:p>
             <a:pPr algn="l">
               <a:lnSpc>
-                <a:spcPct val="112000"/>
+                <a:spcPct val="115000"/>
               </a:lnSpc>
               <a:spcAft>
                 <a:spcPts val="600"/>
               </a:spcAft>
             </a:pPr>
             <a:r>
+              <a:rPr sz="1550" b="1" i="0">
+                <a:solidFill>
+                  <a:srgbClr val="1E2761"/>
+                </a:solidFill>
+                <a:latin typeface="Calibri"/>
+              </a:rPr>
+              <a:t>If neither kerb key opens the ticket → </a:t>
+            </a:r>
+            <a:r>
+              <a:rPr sz="1500" b="0" i="0">
+                <a:solidFill>
+                  <a:srgbClr val="202440"/>
+                </a:solidFill>
+                <a:latin typeface="Calibri"/>
+              </a:rPr>
+              <a:t>the AD account password and the storage kerb keys have drifted apart. The KDC did its job (you HAVE a valid ticket), but the service can't decrypt it. That is KRB5KRB_AP_ERR_MODIFIED — </a:t>
+            </a:r>
+            <a:r>
               <a:rPr sz="1500" b="1" i="0">
                 <a:solidFill>
-                  <a:srgbClr val="1E2761"/>
-                </a:solidFill>
-                <a:latin typeface="Calibri"/>
-              </a:rPr>
-              <a:t>This is the whole trick: </a:t>
+                  <a:srgbClr val="F96167"/>
+                </a:solidFill>
+                <a:latin typeface="Calibri"/>
+              </a:rPr>
+              <a:t>System error 1396</a:t>
             </a:r>
             <a:r>
               <a:rPr sz="1500" b="0" i="0">
@@ -19931,7 +22488,104 @@
                 </a:solidFill>
                 <a:latin typeface="Calibri"/>
               </a:rPr>
-              <a:t>"domain joining a storage account" just means creating an AD account (computer object — or a service-logon user account — either works) whose password is the storage kerb key and whose SPN points at the file endpoint. Every fault we inject today attacks one edge of this triangle.</a:t>
+              <a:t>. We'll cause exactly this in Lab 2.</a:t>
+            </a:r>
+          </a:p>
+        </p:txBody>
+      </p:sp>
+      <p:sp>
+        <p:nvSpPr>
+          <p:cNvPr id="9" name="TextBox 8"/>
+          <p:cNvSpPr txBox="1"/>
+          <p:nvPr/>
+        </p:nvSpPr>
+        <p:spPr>
+          <a:xfrm>
+            <a:off x="548640" y="5532120"/>
+            <a:ext cx="11064240" cy="1005840"/>
+          </a:xfrm>
+          <a:prstGeom prst="rect">
+            <a:avLst/>
+          </a:prstGeom>
+          <a:noFill/>
+        </p:spPr>
+        <p:txBody>
+          <a:bodyPr wrap="square" lIns="0" rIns="0" tIns="0">
+            <a:spAutoFit/>
+          </a:bodyPr>
+          <a:lstStyle/>
+          <a:p>
+            <a:pPr>
+              <a:lnSpc>
+                <a:spcPct val="105000"/>
+              </a:lnSpc>
+              <a:spcAft>
+                <a:spcPts val="700"/>
+              </a:spcAft>
+            </a:pPr>
+            <a:r>
+              <a:rPr sz="1300">
+                <a:solidFill>
+                  <a:srgbClr val="2A367E"/>
+                </a:solidFill>
+                <a:latin typeface="Calibri"/>
+              </a:rPr>
+              <a:t>▪  </a:t>
+            </a:r>
+            <a:r>
+              <a:rPr b="1" sz="1300">
+                <a:solidFill>
+                  <a:srgbClr val="202440"/>
+                </a:solidFill>
+                <a:latin typeface="Calibri"/>
+              </a:rPr>
+              <a:t>The key itself is derived from the password</a:t>
+            </a:r>
+            <a:r>
+              <a:rPr sz="1300">
+                <a:solidFill>
+                  <a:srgbClr val="202440"/>
+                </a:solidFill>
+                <a:latin typeface="Calibri"/>
+              </a:rPr>
+              <a:t> — with AES-256 the derivation is salted, which is why encryption type and password rotation must be changed in the right order.</a:t>
+            </a:r>
+          </a:p>
+          <a:p>
+            <a:pPr>
+              <a:lnSpc>
+                <a:spcPct val="105000"/>
+              </a:lnSpc>
+              <a:spcAft>
+                <a:spcPts val="700"/>
+              </a:spcAft>
+            </a:pPr>
+            <a:r>
+              <a:rPr sz="1300">
+                <a:solidFill>
+                  <a:srgbClr val="2A367E"/>
+                </a:solidFill>
+                <a:latin typeface="Calibri"/>
+              </a:rPr>
+              <a:t>▪  </a:t>
+            </a:r>
+            <a:r>
+              <a:rPr b="1" sz="1300">
+                <a:solidFill>
+                  <a:srgbClr val="202440"/>
+                </a:solidFill>
+                <a:latin typeface="Calibri"/>
+              </a:rPr>
+              <a:t>Inside the ticket is a session key</a:t>
+            </a:r>
+            <a:r>
+              <a:rPr sz="1300">
+                <a:solidFill>
+                  <a:srgbClr val="202440"/>
+                </a:solidFill>
+                <a:latin typeface="Calibri"/>
+              </a:rPr>
+              <a:t> that then protects the SMB session.</a:t>
             </a:r>
           </a:p>
         </p:txBody>
@@ -19944,7 +22598,7 @@
 </p:sld>
 </file>
 
-<file path=ppt/slides/slide7.xml><?xml version="1.0" encoding="utf-8"?>
+<file path=ppt/slides/slide9.xml><?xml version="1.0" encoding="utf-8"?>
 <p:sld xmlns:a="http://schemas.openxmlformats.org/drawingml/2006/main" xmlns:p="http://schemas.openxmlformats.org/presentationml/2006/main" xmlns:r="http://schemas.openxmlformats.org/officeDocument/2006/relationships">
   <p:cSld>
     <p:spTree>
@@ -20077,7 +22731,7 @@
                 </a:solidFill>
                 <a:latin typeface="Cambria"/>
               </a:rPr>
-              <a:t>Which identity source fits which client?</a:t>
+              <a:t>Three identity sources — today we use the first</a:t>
             </a:r>
           </a:p>
         </p:txBody>
@@ -20091,8 +22745,8 @@
           <p:nvPr/>
         </p:nvGraphicFramePr>
         <p:xfrm>
-          <a:off x="548640" y="1508760"/>
-          <a:ext cx="11064240" cy="3703320"/>
+          <a:off x="548640" y="1600200"/>
+          <a:ext cx="11064240" cy="3337560"/>
         </p:xfrm>
         <a:graphic>
           <a:graphicData uri="http://schemas.openxmlformats.org/drawingml/2006/table">
@@ -20101,10 +22755,10 @@
                 <a:tableStyleId>{5C22544A-7EE6-4342-B048-85BDC9FD1C3A}</a:tableStyleId>
               </a:tblPr>
               <a:tblGrid>
-                <a:gridCol w="2377440"/>
-                <a:gridCol w="3017520"/>
-                <a:gridCol w="2743200"/>
-                <a:gridCol w="2926080"/>
+                <a:gridCol w="2468880"/>
+                <a:gridCol w="3108960"/>
+                <a:gridCol w="2651760"/>
+                <a:gridCol w="2834640"/>
               </a:tblGrid>
               <a:tr h="411480">
                 <a:tc>
@@ -20196,20 +22850,20 @@
                   </a:tcPr>
                 </a:tc>
               </a:tr>
-              <a:tr h="658368">
+              <a:tr h="731520">
                 <a:tc>
                   <a:txBody>
                     <a:bodyPr wrap="square"/>
                     <a:lstStyle/>
                     <a:p>
                       <a:r>
-                        <a:rPr sz="1250" b="0">
+                        <a:rPr sz="1300" b="0">
                           <a:solidFill>
                             <a:srgbClr val="202440"/>
                           </a:solidFill>
                           <a:latin typeface="Calibri"/>
                         </a:rPr>
-                        <a:t>Client joined to</a:t>
+                        <a:t>Who issues tickets</a:t>
                       </a:r>
                     </a:p>
                   </a:txBody>
@@ -20225,13 +22879,13 @@
                     <a:lstStyle/>
                     <a:p>
                       <a:r>
-                        <a:rPr sz="1250" b="0">
+                        <a:rPr sz="1300" b="0">
                           <a:solidFill>
                             <a:srgbClr val="202440"/>
                           </a:solidFill>
                           <a:latin typeface="Calibri"/>
                         </a:rPr>
-                        <a:t>AD domain (or line of sight + creds)</a:t>
+                        <a:t>Your domain controller</a:t>
                       </a:r>
                     </a:p>
                   </a:txBody>
@@ -20247,13 +22901,13 @@
                     <a:lstStyle/>
                     <a:p>
                       <a:r>
-                        <a:rPr sz="1250" b="0">
+                        <a:rPr sz="1300" b="0">
                           <a:solidFill>
                             <a:srgbClr val="202440"/>
                           </a:solidFill>
                           <a:latin typeface="Calibri"/>
                         </a:rPr>
-                        <a:t>Entra DS managed domain</a:t>
+                        <a:t>Managed domain DCs</a:t>
                       </a:r>
                     </a:p>
                   </a:txBody>
@@ -20269,13 +22923,13 @@
                     <a:lstStyle/>
                     <a:p>
                       <a:r>
-                        <a:rPr sz="1250" b="0">
+                        <a:rPr sz="1300" b="0">
                           <a:solidFill>
                             <a:srgbClr val="202440"/>
                           </a:solidFill>
                           <a:latin typeface="Calibri"/>
                         </a:rPr>
-                        <a:t>Entra joined / hybrid joined</a:t>
+                        <a:t>Microsoft Entra ID</a:t>
                       </a:r>
                     </a:p>
                   </a:txBody>
@@ -20286,20 +22940,20 @@
                   </a:tcPr>
                 </a:tc>
               </a:tr>
-              <a:tr h="658368">
+              <a:tr h="731520">
                 <a:tc>
                   <a:txBody>
                     <a:bodyPr wrap="square"/>
                     <a:lstStyle/>
                     <a:p>
                       <a:r>
-                        <a:rPr sz="1250" b="0">
+                        <a:rPr sz="1300" b="0">
                           <a:solidFill>
                             <a:srgbClr val="202440"/>
                           </a:solidFill>
                           <a:latin typeface="Calibri"/>
                         </a:rPr>
-                        <a:t>Line of sight to DC</a:t>
+                        <a:t>Client must be</a:t>
                       </a:r>
                     </a:p>
                   </a:txBody>
@@ -20315,13 +22969,13 @@
                     <a:lstStyle/>
                     <a:p>
                       <a:r>
-                        <a:rPr sz="1250" b="0">
+                        <a:rPr sz="1300" b="0">
                           <a:solidFill>
                             <a:srgbClr val="202440"/>
                           </a:solidFill>
                           <a:latin typeface="Calibri"/>
                         </a:rPr>
-                        <a:t>Required</a:t>
+                        <a:t>AD joined (or line of sight + creds)</a:t>
                       </a:r>
                     </a:p>
                   </a:txBody>
@@ -20337,13 +22991,13 @@
                     <a:lstStyle/>
                     <a:p>
                       <a:r>
-                        <a:rPr sz="1250" b="0">
+                        <a:rPr sz="1300" b="0">
                           <a:solidFill>
                             <a:srgbClr val="202440"/>
                           </a:solidFill>
                           <a:latin typeface="Calibri"/>
                         </a:rPr>
-                        <a:t>Required (to managed DCs)</a:t>
+                        <a:t>Entra DS joined</a:t>
                       </a:r>
                     </a:p>
                   </a:txBody>
@@ -20359,13 +23013,13 @@
                     <a:lstStyle/>
                     <a:p>
                       <a:r>
-                        <a:rPr sz="1250" b="0">
+                        <a:rPr sz="1300" b="0">
                           <a:solidFill>
                             <a:srgbClr val="202440"/>
                           </a:solidFill>
                           <a:latin typeface="Calibri"/>
                         </a:rPr>
-                        <a:t>Not required for access</a:t>
+                        <a:t>Entra / hybrid joined</a:t>
                       </a:r>
                     </a:p>
                   </a:txBody>
@@ -20376,20 +23030,20 @@
                   </a:tcPr>
                 </a:tc>
               </a:tr>
-              <a:tr h="658368">
+              <a:tr h="731520">
                 <a:tc>
                   <a:txBody>
                     <a:bodyPr wrap="square"/>
                     <a:lstStyle/>
                     <a:p>
                       <a:r>
-                        <a:rPr sz="1250" b="0">
+                        <a:rPr sz="1300" b="0">
                           <a:solidFill>
                             <a:srgbClr val="202440"/>
                           </a:solidFill>
                           <a:latin typeface="Calibri"/>
                         </a:rPr>
-                        <a:t>User type</a:t>
+                        <a:t>Line of sight to a DC</a:t>
                       </a:r>
                     </a:p>
                   </a:txBody>
@@ -20405,13 +23059,13 @@
                     <a:lstStyle/>
                     <a:p>
                       <a:r>
-                        <a:rPr sz="1250" b="0">
+                        <a:rPr sz="1300" b="0">
                           <a:solidFill>
                             <a:srgbClr val="202440"/>
                           </a:solidFill>
                           <a:latin typeface="Calibri"/>
                         </a:rPr>
-                        <a:t>AD users (sync optional*)</a:t>
+                        <a:t>Required</a:t>
                       </a:r>
                     </a:p>
                   </a:txBody>
@@ -20427,13 +23081,13 @@
                     <a:lstStyle/>
                     <a:p>
                       <a:r>
-                        <a:rPr sz="1250" b="0">
+                        <a:rPr sz="1300" b="0">
                           <a:solidFill>
                             <a:srgbClr val="202440"/>
                           </a:solidFill>
                           <a:latin typeface="Calibri"/>
                         </a:rPr>
-                        <a:t>Synced to Entra DS</a:t>
+                        <a:t>Required</a:t>
                       </a:r>
                     </a:p>
                   </a:txBody>
@@ -20449,13 +23103,13 @@
                     <a:lstStyle/>
                     <a:p>
                       <a:r>
-                        <a:rPr sz="1250" b="0">
+                        <a:rPr sz="1300" b="0">
                           <a:solidFill>
                             <a:srgbClr val="202440"/>
                           </a:solidFill>
                           <a:latin typeface="Calibri"/>
                         </a:rPr>
-                        <a:t>Hybrid (Entra-only: Win11 25H2+/WS2025)</a:t>
+                        <a:t>Not required for access</a:t>
                       </a:r>
                     </a:p>
                   </a:txBody>
@@ -20466,20 +23120,20 @@
                   </a:tcPr>
                 </a:tc>
               </a:tr>
-              <a:tr h="658368">
+              <a:tr h="731520">
                 <a:tc>
                   <a:txBody>
                     <a:bodyPr wrap="square"/>
                     <a:lstStyle/>
                     <a:p>
                       <a:r>
-                        <a:rPr sz="1250" b="0">
+                        <a:rPr sz="1300" b="0">
                           <a:solidFill>
                             <a:srgbClr val="202440"/>
                           </a:solidFill>
                           <a:latin typeface="Calibri"/>
                         </a:rPr>
-                        <a:t>Storage acct joined to</a:t>
+                        <a:t>Typical scenario</a:t>
                       </a:r>
                     </a:p>
                   </a:txBody>
@@ -20495,13 +23149,13 @@
                     <a:lstStyle/>
                     <a:p>
                       <a:r>
-                        <a:rPr sz="1250" b="0">
+                        <a:rPr sz="1300" b="0">
                           <a:solidFill>
                             <a:srgbClr val="202440"/>
                           </a:solidFill>
                           <a:latin typeface="Calibri"/>
                         </a:rPr>
-                        <a:t>Your AD</a:t>
+                        <a:t>Lift-and-shift file servers</a:t>
                       </a:r>
                     </a:p>
                   </a:txBody>
@@ -20517,13 +23171,13 @@
                     <a:lstStyle/>
                     <a:p>
                       <a:r>
-                        <a:rPr sz="1250" b="0">
+                        <a:rPr sz="1300" b="0">
                           <a:solidFill>
                             <a:srgbClr val="202440"/>
                           </a:solidFill>
                           <a:latin typeface="Calibri"/>
                         </a:rPr>
-                        <a:t>Managed domain</a:t>
+                        <a:t>No on-prem AD</a:t>
                       </a:r>
                     </a:p>
                   </a:txBody>
@@ -20539,97 +23193,7 @@
                     <a:lstStyle/>
                     <a:p>
                       <a:r>
-                        <a:rPr sz="1250" b="0">
-                          <a:solidFill>
-                            <a:srgbClr val="202440"/>
-                          </a:solidFill>
-                          <a:latin typeface="Calibri"/>
-                        </a:rPr>
-                        <a:t>Entra ID (auto app)</a:t>
-                      </a:r>
-                    </a:p>
-                  </a:txBody>
-                  <a:tcPr marL="73152" marR="73152" marT="27432" marB="27432" anchor="ctr">
-                    <a:solidFill>
-                      <a:srgbClr val="F3F6FD"/>
-                    </a:solidFill>
-                  </a:tcPr>
-                </a:tc>
-              </a:tr>
-              <a:tr h="658368">
-                <a:tc>
-                  <a:txBody>
-                    <a:bodyPr wrap="square"/>
-                    <a:lstStyle/>
-                    <a:p>
-                      <a:r>
-                        <a:rPr sz="1250" b="0">
-                          <a:solidFill>
-                            <a:srgbClr val="202440"/>
-                          </a:solidFill>
-                          <a:latin typeface="Calibri"/>
-                        </a:rPr>
-                        <a:t>Typical scenario</a:t>
-                      </a:r>
-                    </a:p>
-                  </a:txBody>
-                  <a:tcPr marL="73152" marR="73152" marT="27432" marB="27432" anchor="ctr">
-                    <a:solidFill>
-                      <a:srgbClr val="FFFFFF"/>
-                    </a:solidFill>
-                  </a:tcPr>
-                </a:tc>
-                <a:tc>
-                  <a:txBody>
-                    <a:bodyPr wrap="square"/>
-                    <a:lstStyle/>
-                    <a:p>
-                      <a:r>
-                        <a:rPr sz="1250" b="0">
-                          <a:solidFill>
-                            <a:srgbClr val="202440"/>
-                          </a:solidFill>
-                          <a:latin typeface="Calibri"/>
-                        </a:rPr>
-                        <a:t>Lift-and-shift file servers</a:t>
-                      </a:r>
-                    </a:p>
-                  </a:txBody>
-                  <a:tcPr marL="73152" marR="73152" marT="27432" marB="27432" anchor="ctr">
-                    <a:solidFill>
-                      <a:srgbClr val="FFFFFF"/>
-                    </a:solidFill>
-                  </a:tcPr>
-                </a:tc>
-                <a:tc>
-                  <a:txBody>
-                    <a:bodyPr wrap="square"/>
-                    <a:lstStyle/>
-                    <a:p>
-                      <a:r>
-                        <a:rPr sz="1250" b="0">
-                          <a:solidFill>
-                            <a:srgbClr val="202440"/>
-                          </a:solidFill>
-                          <a:latin typeface="Calibri"/>
-                        </a:rPr>
-                        <a:t>No on-prem AD, legacy apps</a:t>
-                      </a:r>
-                    </a:p>
-                  </a:txBody>
-                  <a:tcPr marL="73152" marR="73152" marT="27432" marB="27432" anchor="ctr">
-                    <a:solidFill>
-                      <a:srgbClr val="FFFFFF"/>
-                    </a:solidFill>
-                  </a:tcPr>
-                </a:tc>
-                <a:tc>
-                  <a:txBody>
-                    <a:bodyPr wrap="square"/>
-                    <a:lstStyle/>
-                    <a:p>
-                      <a:r>
-                        <a:rPr sz="1250" b="0">
+                        <a:rPr sz="1300" b="0">
                           <a:solidFill>
                             <a:srgbClr val="202440"/>
                           </a:solidFill>
@@ -20641,7 +23205,7 @@
                   </a:txBody>
                   <a:tcPr marL="73152" marR="73152" marT="27432" marB="27432" anchor="ctr">
                     <a:solidFill>
-                      <a:srgbClr val="FFFFFF"/>
+                      <a:srgbClr val="F3F6FD"/>
                     </a:solidFill>
                   </a:tcPr>
                 </a:tc>
@@ -20687,1380 +23251,7 @@
                 </a:solidFill>
                 <a:latin typeface="Calibri"/>
               </a:rPr>
-              <a:t>* share-level RBAC needs the user in Entra — or use a default share permission, which is what our lab automation does</a:t>
-            </a:r>
-          </a:p>
-        </p:txBody>
-      </p:sp>
-    </p:spTree>
-  </p:cSld>
-  <p:clrMapOvr>
-    <a:masterClrMapping/>
-  </p:clrMapOvr>
-</p:sld>
-</file>
-
-<file path=ppt/slides/slide8.xml><?xml version="1.0" encoding="utf-8"?>
-<p:sld xmlns:a="http://schemas.openxmlformats.org/drawingml/2006/main" xmlns:p="http://schemas.openxmlformats.org/presentationml/2006/main" xmlns:r="http://schemas.openxmlformats.org/officeDocument/2006/relationships">
-  <p:cSld>
-    <p:spTree>
-      <p:nvGrpSpPr>
-        <p:cNvPr id="1" name=""/>
-        <p:cNvGrpSpPr/>
-        <p:nvPr/>
-      </p:nvGrpSpPr>
-      <p:grpSpPr/>
-      <p:sp>
-        <p:nvSpPr>
-          <p:cNvPr id="2" name="Rectangle 1"/>
-          <p:cNvSpPr/>
-          <p:nvPr/>
-        </p:nvSpPr>
-        <p:spPr>
-          <a:xfrm>
-            <a:off x="0" y="0"/>
-            <a:ext cx="12191695" cy="6858000"/>
-          </a:xfrm>
-          <a:prstGeom prst="rect">
-            <a:avLst/>
-          </a:prstGeom>
-          <a:solidFill>
-            <a:srgbClr val="FFFFFF"/>
-          </a:solidFill>
-          <a:ln>
-            <a:noFill/>
-          </a:ln>
-          <a:effectLst/>
-        </p:spPr>
-        <p:style>
-          <a:lnRef idx="1">
-            <a:schemeClr val="accent1"/>
-          </a:lnRef>
-          <a:fillRef idx="3">
-            <a:schemeClr val="accent1"/>
-          </a:fillRef>
-          <a:effectRef idx="2">
-            <a:schemeClr val="accent1"/>
-          </a:effectRef>
-          <a:fontRef idx="minor">
-            <a:schemeClr val="lt1"/>
-          </a:fontRef>
-        </p:style>
-        <p:txBody>
-          <a:bodyPr rtlCol="0" anchor="ctr"/>
-          <a:lstStyle/>
-          <a:p>
-            <a:pPr algn="ctr"/>
-          </a:p>
-        </p:txBody>
-      </p:sp>
-      <p:sp>
-        <p:nvSpPr>
-          <p:cNvPr id="3" name="TextBox 2"/>
-          <p:cNvSpPr txBox="1"/>
-          <p:nvPr/>
-        </p:nvSpPr>
-        <p:spPr>
-          <a:xfrm>
-            <a:off x="548640" y="292608"/>
-            <a:ext cx="11064240" cy="320040"/>
-          </a:xfrm>
-          <a:prstGeom prst="rect">
-            <a:avLst/>
-          </a:prstGeom>
-          <a:noFill/>
-        </p:spPr>
-        <p:txBody>
-          <a:bodyPr wrap="square" anchor="t" lIns="0" rIns="0" tIns="0" bIns="0">
-            <a:spAutoFit/>
-          </a:bodyPr>
-          <a:lstStyle/>
-          <a:p>
-            <a:pPr algn="l">
-              <a:lnSpc>
-                <a:spcPct val="100000"/>
-              </a:lnSpc>
-              <a:spcAft>
-                <a:spcPts val="600"/>
-              </a:spcAft>
-            </a:pPr>
-            <a:r>
-              <a:rPr sz="1300" b="1" i="0">
-                <a:solidFill>
-                  <a:srgbClr val="2A367E"/>
-                </a:solidFill>
-                <a:latin typeface="Calibri"/>
-              </a:rPr>
-              <a:t>CONCEPTS</a:t>
-            </a:r>
-          </a:p>
-        </p:txBody>
-      </p:sp>
-      <p:sp>
-        <p:nvSpPr>
-          <p:cNvPr id="4" name="TextBox 3"/>
-          <p:cNvSpPr txBox="1"/>
-          <p:nvPr/>
-        </p:nvSpPr>
-        <p:spPr>
-          <a:xfrm>
-            <a:off x="548640" y="566928"/>
-            <a:ext cx="11064240" cy="777240"/>
-          </a:xfrm>
-          <a:prstGeom prst="rect">
-            <a:avLst/>
-          </a:prstGeom>
-          <a:noFill/>
-        </p:spPr>
-        <p:txBody>
-          <a:bodyPr wrap="square" anchor="t" lIns="0" rIns="0" tIns="0" bIns="0">
-            <a:spAutoFit/>
-          </a:bodyPr>
-          <a:lstStyle/>
-          <a:p>
-            <a:pPr algn="l">
-              <a:lnSpc>
-                <a:spcPct val="100000"/>
-              </a:lnSpc>
-              <a:spcAft>
-                <a:spcPts val="600"/>
-              </a:spcAft>
-            </a:pPr>
-            <a:r>
-              <a:rPr sz="3300" b="1" i="0">
-                <a:solidFill>
-                  <a:srgbClr val="1E2761"/>
-                </a:solidFill>
-                <a:latin typeface="Cambria"/>
-              </a:rPr>
-              <a:t>"Line of sight" — what it actually means</a:t>
-            </a:r>
-          </a:p>
-        </p:txBody>
-      </p:sp>
-      <p:sp>
-        <p:nvSpPr>
-          <p:cNvPr id="5" name="Oval 4"/>
-          <p:cNvSpPr/>
-          <p:nvPr/>
-        </p:nvSpPr>
-        <p:spPr>
-          <a:xfrm>
-            <a:off x="640080" y="1554480"/>
-            <a:ext cx="548640" cy="548640"/>
-          </a:xfrm>
-          <a:prstGeom prst="ellipse">
-            <a:avLst/>
-          </a:prstGeom>
-          <a:solidFill>
-            <a:srgbClr val="2A367E"/>
-          </a:solidFill>
-          <a:ln>
-            <a:noFill/>
-          </a:ln>
-          <a:effectLst/>
-        </p:spPr>
-        <p:style>
-          <a:lnRef idx="1">
-            <a:schemeClr val="accent1"/>
-          </a:lnRef>
-          <a:fillRef idx="3">
-            <a:schemeClr val="accent1"/>
-          </a:fillRef>
-          <a:effectRef idx="2">
-            <a:schemeClr val="accent1"/>
-          </a:effectRef>
-          <a:fontRef idx="minor">
-            <a:schemeClr val="lt1"/>
-          </a:fontRef>
-        </p:style>
-        <p:txBody>
-          <a:bodyPr rtlCol="0" anchor="ctr" wrap="none" lIns="0" rIns="0"/>
-          <a:lstStyle/>
-          <a:p>
-            <a:pPr algn="ctr"/>
-            <a:r>
-              <a:rPr sz="1500" b="1">
-                <a:solidFill>
-                  <a:srgbClr val="FFFFFF"/>
-                </a:solidFill>
-                <a:latin typeface="Calibri"/>
-              </a:rPr>
-              <a:t>1</a:t>
-            </a:r>
-          </a:p>
-        </p:txBody>
-      </p:sp>
-      <p:sp>
-        <p:nvSpPr>
-          <p:cNvPr id="6" name="TextBox 5"/>
-          <p:cNvSpPr txBox="1"/>
-          <p:nvPr/>
-        </p:nvSpPr>
-        <p:spPr>
-          <a:xfrm>
-            <a:off x="1417320" y="1463040"/>
-            <a:ext cx="2377440" cy="960120"/>
-          </a:xfrm>
-          <a:prstGeom prst="rect">
-            <a:avLst/>
-          </a:prstGeom>
-          <a:noFill/>
-        </p:spPr>
-        <p:txBody>
-          <a:bodyPr wrap="square" anchor="ctr" lIns="0" rIns="0" tIns="0" bIns="0">
-            <a:spAutoFit/>
-          </a:bodyPr>
-          <a:lstStyle/>
-          <a:p>
-            <a:pPr algn="l">
-              <a:lnSpc>
-                <a:spcPct val="100000"/>
-              </a:lnSpc>
-              <a:spcAft>
-                <a:spcPts val="600"/>
-              </a:spcAft>
-            </a:pPr>
-            <a:r>
-              <a:rPr sz="1550" b="1" i="0">
-                <a:solidFill>
-                  <a:srgbClr val="1E2761"/>
-                </a:solidFill>
-                <a:latin typeface="Calibri"/>
-              </a:rPr>
-              <a:t>DNS</a:t>
-            </a:r>
-          </a:p>
-        </p:txBody>
-      </p:sp>
-      <p:sp>
-        <p:nvSpPr>
-          <p:cNvPr id="7" name="TextBox 6"/>
-          <p:cNvSpPr txBox="1"/>
-          <p:nvPr/>
-        </p:nvSpPr>
-        <p:spPr>
-          <a:xfrm>
-            <a:off x="3977639" y="1463040"/>
-            <a:ext cx="7635240" cy="960120"/>
-          </a:xfrm>
-          <a:prstGeom prst="rect">
-            <a:avLst/>
-          </a:prstGeom>
-          <a:noFill/>
-        </p:spPr>
-        <p:txBody>
-          <a:bodyPr wrap="square" anchor="ctr" lIns="0" rIns="0" tIns="0" bIns="0">
-            <a:spAutoFit/>
-          </a:bodyPr>
-          <a:lstStyle/>
-          <a:p>
-            <a:pPr algn="l">
-              <a:lnSpc>
-                <a:spcPct val="108000"/>
-              </a:lnSpc>
-              <a:spcAft>
-                <a:spcPts val="600"/>
-              </a:spcAft>
-            </a:pPr>
-            <a:r>
-              <a:rPr sz="1300" b="0" i="0">
-                <a:solidFill>
-                  <a:srgbClr val="5A5A6E"/>
-                </a:solidFill>
-                <a:latin typeface="Calibri"/>
-              </a:rPr>
-              <a:t>The client must RESOLVE the AD domain — its DNS must point at (or forward to) a DC. In our lab the VNet's DNS server is the DC itself.</a:t>
-            </a:r>
-          </a:p>
-        </p:txBody>
-      </p:sp>
-      <p:sp>
-        <p:nvSpPr>
-          <p:cNvPr id="8" name="Oval 7"/>
-          <p:cNvSpPr/>
-          <p:nvPr/>
-        </p:nvSpPr>
-        <p:spPr>
-          <a:xfrm>
-            <a:off x="640080" y="2670048"/>
-            <a:ext cx="548640" cy="548640"/>
-          </a:xfrm>
-          <a:prstGeom prst="ellipse">
-            <a:avLst/>
-          </a:prstGeom>
-          <a:solidFill>
-            <a:srgbClr val="2A367E"/>
-          </a:solidFill>
-          <a:ln>
-            <a:noFill/>
-          </a:ln>
-          <a:effectLst/>
-        </p:spPr>
-        <p:style>
-          <a:lnRef idx="1">
-            <a:schemeClr val="accent1"/>
-          </a:lnRef>
-          <a:fillRef idx="3">
-            <a:schemeClr val="accent1"/>
-          </a:fillRef>
-          <a:effectRef idx="2">
-            <a:schemeClr val="accent1"/>
-          </a:effectRef>
-          <a:fontRef idx="minor">
-            <a:schemeClr val="lt1"/>
-          </a:fontRef>
-        </p:style>
-        <p:txBody>
-          <a:bodyPr rtlCol="0" anchor="ctr" wrap="none" lIns="0" rIns="0"/>
-          <a:lstStyle/>
-          <a:p>
-            <a:pPr algn="ctr"/>
-            <a:r>
-              <a:rPr sz="1500" b="1">
-                <a:solidFill>
-                  <a:srgbClr val="FFFFFF"/>
-                </a:solidFill>
-                <a:latin typeface="Calibri"/>
-              </a:rPr>
-              <a:t>2</a:t>
-            </a:r>
-          </a:p>
-        </p:txBody>
-      </p:sp>
-      <p:sp>
-        <p:nvSpPr>
-          <p:cNvPr id="9" name="TextBox 8"/>
-          <p:cNvSpPr txBox="1"/>
-          <p:nvPr/>
-        </p:nvSpPr>
-        <p:spPr>
-          <a:xfrm>
-            <a:off x="1417320" y="2578608"/>
-            <a:ext cx="2377440" cy="960120"/>
-          </a:xfrm>
-          <a:prstGeom prst="rect">
-            <a:avLst/>
-          </a:prstGeom>
-          <a:noFill/>
-        </p:spPr>
-        <p:txBody>
-          <a:bodyPr wrap="square" anchor="ctr" lIns="0" rIns="0" tIns="0" bIns="0">
-            <a:spAutoFit/>
-          </a:bodyPr>
-          <a:lstStyle/>
-          <a:p>
-            <a:pPr algn="l">
-              <a:lnSpc>
-                <a:spcPct val="100000"/>
-              </a:lnSpc>
-              <a:spcAft>
-                <a:spcPts val="600"/>
-              </a:spcAft>
-            </a:pPr>
-            <a:r>
-              <a:rPr sz="1550" b="1" i="0">
-                <a:solidFill>
-                  <a:srgbClr val="1E2761"/>
-                </a:solidFill>
-                <a:latin typeface="Calibri"/>
-              </a:rPr>
-              <a:t>DC locator</a:t>
-            </a:r>
-          </a:p>
-        </p:txBody>
-      </p:sp>
-      <p:sp>
-        <p:nvSpPr>
-          <p:cNvPr id="10" name="TextBox 9"/>
-          <p:cNvSpPr txBox="1"/>
-          <p:nvPr/>
-        </p:nvSpPr>
-        <p:spPr>
-          <a:xfrm>
-            <a:off x="3977639" y="2578608"/>
-            <a:ext cx="7635240" cy="960120"/>
-          </a:xfrm>
-          <a:prstGeom prst="rect">
-            <a:avLst/>
-          </a:prstGeom>
-          <a:noFill/>
-        </p:spPr>
-        <p:txBody>
-          <a:bodyPr wrap="square" anchor="ctr" lIns="0" rIns="0" tIns="0" bIns="0">
-            <a:spAutoFit/>
-          </a:bodyPr>
-          <a:lstStyle/>
-          <a:p>
-            <a:pPr algn="l">
-              <a:lnSpc>
-                <a:spcPct val="108000"/>
-              </a:lnSpc>
-              <a:spcAft>
-                <a:spcPts val="600"/>
-              </a:spcAft>
-            </a:pPr>
-            <a:r>
-              <a:rPr sz="1300" b="0" i="0">
-                <a:solidFill>
-                  <a:srgbClr val="5A5A6E"/>
-                </a:solidFill>
-                <a:latin typeface="Calibri"/>
-              </a:rPr>
-              <a:t>Windows finds a DC via DNS SRV records (_ldap._tcp.dc._msdcs.&lt;domain&gt;) — nltest /dsgetdc:&lt;domain&gt; shows the result.</a:t>
-            </a:r>
-          </a:p>
-        </p:txBody>
-      </p:sp>
-      <p:sp>
-        <p:nvSpPr>
-          <p:cNvPr id="11" name="Oval 10"/>
-          <p:cNvSpPr/>
-          <p:nvPr/>
-        </p:nvSpPr>
-        <p:spPr>
-          <a:xfrm>
-            <a:off x="640080" y="3785615"/>
-            <a:ext cx="548640" cy="548640"/>
-          </a:xfrm>
-          <a:prstGeom prst="ellipse">
-            <a:avLst/>
-          </a:prstGeom>
-          <a:solidFill>
-            <a:srgbClr val="2A367E"/>
-          </a:solidFill>
-          <a:ln>
-            <a:noFill/>
-          </a:ln>
-          <a:effectLst/>
-        </p:spPr>
-        <p:style>
-          <a:lnRef idx="1">
-            <a:schemeClr val="accent1"/>
-          </a:lnRef>
-          <a:fillRef idx="3">
-            <a:schemeClr val="accent1"/>
-          </a:fillRef>
-          <a:effectRef idx="2">
-            <a:schemeClr val="accent1"/>
-          </a:effectRef>
-          <a:fontRef idx="minor">
-            <a:schemeClr val="lt1"/>
-          </a:fontRef>
-        </p:style>
-        <p:txBody>
-          <a:bodyPr rtlCol="0" anchor="ctr" wrap="none" lIns="0" rIns="0"/>
-          <a:lstStyle/>
-          <a:p>
-            <a:pPr algn="ctr"/>
-            <a:r>
-              <a:rPr sz="1500" b="1">
-                <a:solidFill>
-                  <a:srgbClr val="FFFFFF"/>
-                </a:solidFill>
-                <a:latin typeface="Calibri"/>
-              </a:rPr>
-              <a:t>3</a:t>
-            </a:r>
-          </a:p>
-        </p:txBody>
-      </p:sp>
-      <p:sp>
-        <p:nvSpPr>
-          <p:cNvPr id="12" name="TextBox 11"/>
-          <p:cNvSpPr txBox="1"/>
-          <p:nvPr/>
-        </p:nvSpPr>
-        <p:spPr>
-          <a:xfrm>
-            <a:off x="1417320" y="3694176"/>
-            <a:ext cx="2377440" cy="960120"/>
-          </a:xfrm>
-          <a:prstGeom prst="rect">
-            <a:avLst/>
-          </a:prstGeom>
-          <a:noFill/>
-        </p:spPr>
-        <p:txBody>
-          <a:bodyPr wrap="square" anchor="ctr" lIns="0" rIns="0" tIns="0" bIns="0">
-            <a:spAutoFit/>
-          </a:bodyPr>
-          <a:lstStyle/>
-          <a:p>
-            <a:pPr algn="l">
-              <a:lnSpc>
-                <a:spcPct val="100000"/>
-              </a:lnSpc>
-              <a:spcAft>
-                <a:spcPts val="600"/>
-              </a:spcAft>
-            </a:pPr>
-            <a:r>
-              <a:rPr sz="1550" b="1" i="0">
-                <a:solidFill>
-                  <a:srgbClr val="1E2761"/>
-                </a:solidFill>
-                <a:latin typeface="Calibri"/>
-              </a:rPr>
-              <a:t>The ports</a:t>
-            </a:r>
-          </a:p>
-        </p:txBody>
-      </p:sp>
-      <p:sp>
-        <p:nvSpPr>
-          <p:cNvPr id="13" name="TextBox 12"/>
-          <p:cNvSpPr txBox="1"/>
-          <p:nvPr/>
-        </p:nvSpPr>
-        <p:spPr>
-          <a:xfrm>
-            <a:off x="3977639" y="3694176"/>
-            <a:ext cx="7635240" cy="960120"/>
-          </a:xfrm>
-          <a:prstGeom prst="rect">
-            <a:avLst/>
-          </a:prstGeom>
-          <a:noFill/>
-        </p:spPr>
-        <p:txBody>
-          <a:bodyPr wrap="square" anchor="ctr" lIns="0" rIns="0" tIns="0" bIns="0">
-            <a:spAutoFit/>
-          </a:bodyPr>
-          <a:lstStyle/>
-          <a:p>
-            <a:pPr algn="l">
-              <a:lnSpc>
-                <a:spcPct val="108000"/>
-              </a:lnSpc>
-              <a:spcAft>
-                <a:spcPts val="600"/>
-              </a:spcAft>
-            </a:pPr>
-            <a:r>
-              <a:rPr sz="1300" b="0" i="0">
-                <a:solidFill>
-                  <a:srgbClr val="5A5A6E"/>
-                </a:solidFill>
-                <a:latin typeface="Calibri"/>
-              </a:rPr>
-              <a:t>DNS 53 · Kerberos 88 · LDAP 389 · SMB 445 must be reachable (VPN/ExpressRoute for remote clients). Domain JOIN and GPO additionally need RPC 135 + dynamic ports.</a:t>
-            </a:r>
-          </a:p>
-        </p:txBody>
-      </p:sp>
-      <p:sp>
-        <p:nvSpPr>
-          <p:cNvPr id="14" name="Oval 13"/>
-          <p:cNvSpPr/>
-          <p:nvPr/>
-        </p:nvSpPr>
-        <p:spPr>
-          <a:xfrm>
-            <a:off x="640080" y="4901183"/>
-            <a:ext cx="548640" cy="548640"/>
-          </a:xfrm>
-          <a:prstGeom prst="ellipse">
-            <a:avLst/>
-          </a:prstGeom>
-          <a:solidFill>
-            <a:srgbClr val="2A367E"/>
-          </a:solidFill>
-          <a:ln>
-            <a:noFill/>
-          </a:ln>
-          <a:effectLst/>
-        </p:spPr>
-        <p:style>
-          <a:lnRef idx="1">
-            <a:schemeClr val="accent1"/>
-          </a:lnRef>
-          <a:fillRef idx="3">
-            <a:schemeClr val="accent1"/>
-          </a:fillRef>
-          <a:effectRef idx="2">
-            <a:schemeClr val="accent1"/>
-          </a:effectRef>
-          <a:fontRef idx="minor">
-            <a:schemeClr val="lt1"/>
-          </a:fontRef>
-        </p:style>
-        <p:txBody>
-          <a:bodyPr rtlCol="0" anchor="ctr" wrap="none" lIns="0" rIns="0"/>
-          <a:lstStyle/>
-          <a:p>
-            <a:pPr algn="ctr"/>
-            <a:r>
-              <a:rPr sz="1500" b="1">
-                <a:solidFill>
-                  <a:srgbClr val="FFFFFF"/>
-                </a:solidFill>
-                <a:latin typeface="Calibri"/>
-              </a:rPr>
-              <a:t>4</a:t>
-            </a:r>
-          </a:p>
-        </p:txBody>
-      </p:sp>
-      <p:sp>
-        <p:nvSpPr>
-          <p:cNvPr id="15" name="TextBox 14"/>
-          <p:cNvSpPr txBox="1"/>
-          <p:nvPr/>
-        </p:nvSpPr>
-        <p:spPr>
-          <a:xfrm>
-            <a:off x="1417320" y="4809744"/>
-            <a:ext cx="2377440" cy="960120"/>
-          </a:xfrm>
-          <a:prstGeom prst="rect">
-            <a:avLst/>
-          </a:prstGeom>
-          <a:noFill/>
-        </p:spPr>
-        <p:txBody>
-          <a:bodyPr wrap="square" anchor="ctr" lIns="0" rIns="0" tIns="0" bIns="0">
-            <a:spAutoFit/>
-          </a:bodyPr>
-          <a:lstStyle/>
-          <a:p>
-            <a:pPr algn="l">
-              <a:lnSpc>
-                <a:spcPct val="100000"/>
-              </a:lnSpc>
-              <a:spcAft>
-                <a:spcPts val="600"/>
-              </a:spcAft>
-            </a:pPr>
-            <a:r>
-              <a:rPr sz="1550" b="1" i="0">
-                <a:solidFill>
-                  <a:srgbClr val="1E2761"/>
-                </a:solidFill>
-                <a:latin typeface="Calibri"/>
-              </a:rPr>
-              <a:t>No domain join needed</a:t>
-            </a:r>
-          </a:p>
-        </p:txBody>
-      </p:sp>
-      <p:sp>
-        <p:nvSpPr>
-          <p:cNvPr id="16" name="TextBox 15"/>
-          <p:cNvSpPr txBox="1"/>
-          <p:nvPr/>
-        </p:nvSpPr>
-        <p:spPr>
-          <a:xfrm>
-            <a:off x="3977639" y="4809744"/>
-            <a:ext cx="7635240" cy="960120"/>
-          </a:xfrm>
-          <a:prstGeom prst="rect">
-            <a:avLst/>
-          </a:prstGeom>
-          <a:noFill/>
-        </p:spPr>
-        <p:txBody>
-          <a:bodyPr wrap="square" anchor="ctr" lIns="0" rIns="0" tIns="0" bIns="0">
-            <a:spAutoFit/>
-          </a:bodyPr>
-          <a:lstStyle/>
-          <a:p>
-            <a:pPr algn="l">
-              <a:lnSpc>
-                <a:spcPct val="108000"/>
-              </a:lnSpc>
-              <a:spcAft>
-                <a:spcPts val="600"/>
-              </a:spcAft>
-            </a:pPr>
-            <a:r>
-              <a:rPr sz="1300" b="0" i="0">
-                <a:solidFill>
-                  <a:srgbClr val="5A5A6E"/>
-                </a:solidFill>
-                <a:latin typeface="Calibri"/>
-              </a:rPr>
-              <a:t>A non-joined machine CAN mount with explicit AD credentials — as long as steps 1–3 work. Domain join is about the machine, line of sight is about the network.</a:t>
-            </a:r>
-          </a:p>
-        </p:txBody>
-      </p:sp>
-      <p:sp>
-        <p:nvSpPr>
-          <p:cNvPr id="17" name="TextBox 16"/>
-          <p:cNvSpPr txBox="1"/>
-          <p:nvPr/>
-        </p:nvSpPr>
-        <p:spPr>
-          <a:xfrm>
-            <a:off x="548640" y="6446520"/>
-            <a:ext cx="11064240" cy="320040"/>
-          </a:xfrm>
-          <a:prstGeom prst="rect">
-            <a:avLst/>
-          </a:prstGeom>
-          <a:noFill/>
-        </p:spPr>
-        <p:txBody>
-          <a:bodyPr wrap="square" anchor="t" lIns="0" rIns="0" tIns="0" bIns="0">
-            <a:spAutoFit/>
-          </a:bodyPr>
-          <a:lstStyle/>
-          <a:p>
-            <a:pPr algn="l">
-              <a:lnSpc>
-                <a:spcPct val="100000"/>
-              </a:lnSpc>
-              <a:spcAft>
-                <a:spcPts val="0"/>
-              </a:spcAft>
-            </a:pPr>
-            <a:r>
-              <a:rPr sz="1100" b="0" i="0">
-                <a:solidFill>
-                  <a:srgbClr val="5A5A6E"/>
-                </a:solidFill>
-                <a:latin typeface="Calibri"/>
-              </a:rPr>
-              <a:t>Multi-forest bonus: the share joins ONE domain in ONE forest — other forests need a trust + name-suffix routing (or an SPN alias + CNAME)</a:t>
-            </a:r>
-          </a:p>
-        </p:txBody>
-      </p:sp>
-    </p:spTree>
-  </p:cSld>
-  <p:clrMapOvr>
-    <a:masterClrMapping/>
-  </p:clrMapOvr>
-</p:sld>
-</file>
-
-<file path=ppt/slides/slide9.xml><?xml version="1.0" encoding="utf-8"?>
-<p:sld xmlns:a="http://schemas.openxmlformats.org/drawingml/2006/main" xmlns:p="http://schemas.openxmlformats.org/presentationml/2006/main" xmlns:r="http://schemas.openxmlformats.org/officeDocument/2006/relationships">
-  <p:cSld>
-    <p:spTree>
-      <p:nvGrpSpPr>
-        <p:cNvPr id="1" name=""/>
-        <p:cNvGrpSpPr/>
-        <p:nvPr/>
-      </p:nvGrpSpPr>
-      <p:grpSpPr/>
-      <p:sp>
-        <p:nvSpPr>
-          <p:cNvPr id="2" name="Rectangle 1"/>
-          <p:cNvSpPr/>
-          <p:nvPr/>
-        </p:nvSpPr>
-        <p:spPr>
-          <a:xfrm>
-            <a:off x="0" y="0"/>
-            <a:ext cx="12191695" cy="6858000"/>
-          </a:xfrm>
-          <a:prstGeom prst="rect">
-            <a:avLst/>
-          </a:prstGeom>
-          <a:solidFill>
-            <a:srgbClr val="FFFFFF"/>
-          </a:solidFill>
-          <a:ln>
-            <a:noFill/>
-          </a:ln>
-          <a:effectLst/>
-        </p:spPr>
-        <p:style>
-          <a:lnRef idx="1">
-            <a:schemeClr val="accent1"/>
-          </a:lnRef>
-          <a:fillRef idx="3">
-            <a:schemeClr val="accent1"/>
-          </a:fillRef>
-          <a:effectRef idx="2">
-            <a:schemeClr val="accent1"/>
-          </a:effectRef>
-          <a:fontRef idx="minor">
-            <a:schemeClr val="lt1"/>
-          </a:fontRef>
-        </p:style>
-        <p:txBody>
-          <a:bodyPr rtlCol="0" anchor="ctr"/>
-          <a:lstStyle/>
-          <a:p>
-            <a:pPr algn="ctr"/>
-          </a:p>
-        </p:txBody>
-      </p:sp>
-      <p:sp>
-        <p:nvSpPr>
-          <p:cNvPr id="3" name="TextBox 2"/>
-          <p:cNvSpPr txBox="1"/>
-          <p:nvPr/>
-        </p:nvSpPr>
-        <p:spPr>
-          <a:xfrm>
-            <a:off x="548640" y="292608"/>
-            <a:ext cx="11064240" cy="320040"/>
-          </a:xfrm>
-          <a:prstGeom prst="rect">
-            <a:avLst/>
-          </a:prstGeom>
-          <a:noFill/>
-        </p:spPr>
-        <p:txBody>
-          <a:bodyPr wrap="square" anchor="t" lIns="0" rIns="0" tIns="0" bIns="0">
-            <a:spAutoFit/>
-          </a:bodyPr>
-          <a:lstStyle/>
-          <a:p>
-            <a:pPr algn="l">
-              <a:lnSpc>
-                <a:spcPct val="100000"/>
-              </a:lnSpc>
-              <a:spcAft>
-                <a:spcPts val="600"/>
-              </a:spcAft>
-            </a:pPr>
-            <a:r>
-              <a:rPr sz="1300" b="1" i="0">
-                <a:solidFill>
-                  <a:srgbClr val="2A367E"/>
-                </a:solidFill>
-                <a:latin typeface="Calibri"/>
-              </a:rPr>
-              <a:t>CONCEPTS · 2026 HARDENING</a:t>
-            </a:r>
-          </a:p>
-        </p:txBody>
-      </p:sp>
-      <p:sp>
-        <p:nvSpPr>
-          <p:cNvPr id="4" name="TextBox 3"/>
-          <p:cNvSpPr txBox="1"/>
-          <p:nvPr/>
-        </p:nvSpPr>
-        <p:spPr>
-          <a:xfrm>
-            <a:off x="548640" y="566928"/>
-            <a:ext cx="11064240" cy="777240"/>
-          </a:xfrm>
-          <a:prstGeom prst="rect">
-            <a:avLst/>
-          </a:prstGeom>
-          <a:noFill/>
-        </p:spPr>
-        <p:txBody>
-          <a:bodyPr wrap="square" anchor="t" lIns="0" rIns="0" tIns="0" bIns="0">
-            <a:spAutoFit/>
-          </a:bodyPr>
-          <a:lstStyle/>
-          <a:p>
-            <a:pPr algn="l">
-              <a:lnSpc>
-                <a:spcPct val="100000"/>
-              </a:lnSpc>
-              <a:spcAft>
-                <a:spcPts val="600"/>
-              </a:spcAft>
-            </a:pPr>
-            <a:r>
-              <a:rPr sz="3300" b="1" i="0">
-                <a:solidFill>
-                  <a:srgbClr val="1E2761"/>
-                </a:solidFill>
-                <a:latin typeface="Cambria"/>
-              </a:rPr>
-              <a:t>Happening right now: the RC4 retirement</a:t>
-            </a:r>
-          </a:p>
-        </p:txBody>
-      </p:sp>
-      <p:sp>
-        <p:nvSpPr>
-          <p:cNvPr id="5" name="Rounded Rectangle 4"/>
-          <p:cNvSpPr/>
-          <p:nvPr/>
-        </p:nvSpPr>
-        <p:spPr>
-          <a:xfrm>
-            <a:off x="548640" y="1463040"/>
-            <a:ext cx="11064240" cy="1600200"/>
-          </a:xfrm>
-          <a:prstGeom prst="roundRect">
-            <a:avLst>
-              <a:gd name="adj" fmla="val 8000"/>
-            </a:avLst>
-          </a:prstGeom>
-          <a:solidFill>
-            <a:srgbClr val="FDF4E0"/>
-          </a:solidFill>
-          <a:ln>
-            <a:noFill/>
-          </a:ln>
-          <a:effectLst/>
-        </p:spPr>
-        <p:style>
-          <a:lnRef idx="1">
-            <a:schemeClr val="accent1"/>
-          </a:lnRef>
-          <a:fillRef idx="3">
-            <a:schemeClr val="accent1"/>
-          </a:fillRef>
-          <a:effectRef idx="2">
-            <a:schemeClr val="accent1"/>
-          </a:effectRef>
-          <a:fontRef idx="minor">
-            <a:schemeClr val="lt1"/>
-          </a:fontRef>
-        </p:style>
-        <p:txBody>
-          <a:bodyPr rtlCol="0" anchor="ctr"/>
-          <a:lstStyle/>
-          <a:p>
-            <a:pPr algn="ctr"/>
-          </a:p>
-        </p:txBody>
-      </p:sp>
-      <p:sp>
-        <p:nvSpPr>
-          <p:cNvPr id="6" name="TextBox 5"/>
-          <p:cNvSpPr txBox="1"/>
-          <p:nvPr/>
-        </p:nvSpPr>
-        <p:spPr>
-          <a:xfrm>
-            <a:off x="868680" y="1664208"/>
-            <a:ext cx="10424160" cy="1234440"/>
-          </a:xfrm>
-          <a:prstGeom prst="rect">
-            <a:avLst/>
-          </a:prstGeom>
-          <a:noFill/>
-        </p:spPr>
-        <p:txBody>
-          <a:bodyPr wrap="square" anchor="t" lIns="0" rIns="0" tIns="0" bIns="0">
-            <a:spAutoFit/>
-          </a:bodyPr>
-          <a:lstStyle/>
-          <a:p>
-            <a:pPr algn="l">
-              <a:lnSpc>
-                <a:spcPct val="118000"/>
-              </a:lnSpc>
-              <a:spcAft>
-                <a:spcPts val="600"/>
-              </a:spcAft>
-            </a:pPr>
-            <a:r>
-              <a:rPr sz="1550" b="1" i="0">
-                <a:solidFill>
-                  <a:srgbClr val="1E2761"/>
-                </a:solidFill>
-                <a:latin typeface="Calibri"/>
-              </a:rPr>
-              <a:t>Windows hardening has been phasing out RC4-HMAC since April 2026, and the July 2026 servicing wave flipped AD DS defaults to AES-256 — enforcement is live now. </a:t>
-            </a:r>
-            <a:r>
-              <a:rPr sz="1500" b="0" i="0">
-                <a:solidFill>
-                  <a:srgbClr val="202440"/>
-                </a:solidFill>
-                <a:latin typeface="Calibri"/>
-              </a:rPr>
-              <a:t>Storage accounts domain-joined before 2023 — or joined manually with RC4 — are failing mounts as patched clients and DCs refuse RC4 tickets.</a:t>
-            </a:r>
-          </a:p>
-        </p:txBody>
-      </p:sp>
-      <p:sp>
-        <p:nvSpPr>
-          <p:cNvPr id="7" name="TextBox 6"/>
-          <p:cNvSpPr txBox="1"/>
-          <p:nvPr/>
-        </p:nvSpPr>
-        <p:spPr>
-          <a:xfrm>
-            <a:off x="548640" y="3291840"/>
-            <a:ext cx="5394960" cy="365760"/>
-          </a:xfrm>
-          <a:prstGeom prst="rect">
-            <a:avLst/>
-          </a:prstGeom>
-          <a:noFill/>
-        </p:spPr>
-        <p:txBody>
-          <a:bodyPr wrap="square" anchor="t" lIns="0" rIns="0" tIns="0" bIns="0">
-            <a:spAutoFit/>
-          </a:bodyPr>
-          <a:lstStyle/>
-          <a:p>
-            <a:pPr algn="l">
-              <a:lnSpc>
-                <a:spcPct val="100000"/>
-              </a:lnSpc>
-              <a:spcAft>
-                <a:spcPts val="600"/>
-              </a:spcAft>
-            </a:pPr>
-            <a:r>
-              <a:rPr sz="1600" b="1" i="0">
-                <a:solidFill>
-                  <a:srgbClr val="1E2761"/>
-                </a:solidFill>
-                <a:latin typeface="Calibri"/>
-              </a:rPr>
-              <a:t>Am I affected? (AD DS auth only)</a:t>
-            </a:r>
-          </a:p>
-        </p:txBody>
-      </p:sp>
-      <p:sp>
-        <p:nvSpPr>
-          <p:cNvPr id="8" name="TextBox 7"/>
-          <p:cNvSpPr txBox="1"/>
-          <p:nvPr/>
-        </p:nvSpPr>
-        <p:spPr>
-          <a:xfrm>
-            <a:off x="548640" y="3703320"/>
-            <a:ext cx="5394960" cy="2194560"/>
-          </a:xfrm>
-          <a:prstGeom prst="rect">
-            <a:avLst/>
-          </a:prstGeom>
-          <a:noFill/>
-        </p:spPr>
-        <p:txBody>
-          <a:bodyPr wrap="square" lIns="0" rIns="0" tIns="0">
-            <a:spAutoFit/>
-          </a:bodyPr>
-          <a:lstStyle/>
-          <a:p>
-            <a:pPr>
-              <a:lnSpc>
-                <a:spcPct val="105000"/>
-              </a:lnSpc>
-              <a:spcAft>
-                <a:spcPts val="1000"/>
-              </a:spcAft>
-            </a:pPr>
-            <a:r>
-              <a:rPr sz="1300">
-                <a:solidFill>
-                  <a:srgbClr val="2A367E"/>
-                </a:solidFill>
-                <a:latin typeface="Calibri"/>
-              </a:rPr>
-              <a:t>▪  </a:t>
-            </a:r>
-            <a:r>
-              <a:rPr b="1" sz="1300">
-                <a:solidFill>
-                  <a:srgbClr val="202440"/>
-                </a:solidFill>
-                <a:latin typeface="Calibri"/>
-              </a:rPr>
-              <a:t>Check the AD object:</a:t>
-            </a:r>
-            <a:r>
-              <a:rPr sz="1300">
-                <a:solidFill>
-                  <a:srgbClr val="202440"/>
-                </a:solidFill>
-                <a:latin typeface="Calibri"/>
-              </a:rPr>
-              <a:t> Get-ADComputer &lt;sa&gt; -Properties msDS-SupportedEncryptionTypes · KerberosEncryptionType</a:t>
-            </a:r>
-          </a:p>
-          <a:p>
-            <a:pPr>
-              <a:lnSpc>
-                <a:spcPct val="105000"/>
-              </a:lnSpc>
-              <a:spcAft>
-                <a:spcPts val="1000"/>
-              </a:spcAft>
-            </a:pPr>
-            <a:r>
-              <a:rPr sz="1300">
-                <a:solidFill>
-                  <a:srgbClr val="2A367E"/>
-                </a:solidFill>
-                <a:latin typeface="Calibri"/>
-              </a:rPr>
-              <a:t>▪  </a:t>
-            </a:r>
-            <a:r>
-              <a:rPr b="1" sz="1300">
-                <a:solidFill>
-                  <a:srgbClr val="202440"/>
-                </a:solidFill>
-                <a:latin typeface="Calibri"/>
-              </a:rPr>
-              <a:t>Check the ticket:</a:t>
-            </a:r>
-            <a:r>
-              <a:rPr sz="1300">
-                <a:solidFill>
-                  <a:srgbClr val="202440"/>
-                </a:solidFill>
-                <a:latin typeface="Calibri"/>
-              </a:rPr>
-              <a:t> klist → the cifs ticket's etype after a mount</a:t>
-            </a:r>
-          </a:p>
-          <a:p>
-            <a:pPr>
-              <a:lnSpc>
-                <a:spcPct val="105000"/>
-              </a:lnSpc>
-              <a:spcAft>
-                <a:spcPts val="1000"/>
-              </a:spcAft>
-            </a:pPr>
-            <a:r>
-              <a:rPr sz="1300">
-                <a:solidFill>
-                  <a:srgbClr val="2A367E"/>
-                </a:solidFill>
-                <a:latin typeface="Calibri"/>
-              </a:rPr>
-              <a:t>▪  </a:t>
-            </a:r>
-            <a:r>
-              <a:rPr b="1" sz="1300">
-                <a:solidFill>
-                  <a:srgbClr val="202440"/>
-                </a:solidFill>
-                <a:latin typeface="Calibri"/>
-              </a:rPr>
-              <a:t>Check the SA:</a:t>
-            </a:r>
-            <a:r>
-              <a:rPr sz="1300">
-                <a:solidFill>
-                  <a:srgbClr val="202440"/>
-                </a:solidFill>
-                <a:latin typeface="Calibri"/>
-              </a:rPr>
-              <a:t> old deployments may miss SamAccountName — required for AES-256</a:t>
-            </a:r>
-          </a:p>
-        </p:txBody>
-      </p:sp>
-      <p:sp>
-        <p:nvSpPr>
-          <p:cNvPr id="9" name="TextBox 8"/>
-          <p:cNvSpPr txBox="1"/>
-          <p:nvPr/>
-        </p:nvSpPr>
-        <p:spPr>
-          <a:xfrm>
-            <a:off x="6309360" y="3291840"/>
-            <a:ext cx="5303520" cy="365760"/>
-          </a:xfrm>
-          <a:prstGeom prst="rect">
-            <a:avLst/>
-          </a:prstGeom>
-          <a:noFill/>
-        </p:spPr>
-        <p:txBody>
-          <a:bodyPr wrap="square" anchor="t" lIns="0" rIns="0" tIns="0" bIns="0">
-            <a:spAutoFit/>
-          </a:bodyPr>
-          <a:lstStyle/>
-          <a:p>
-            <a:pPr algn="l">
-              <a:lnSpc>
-                <a:spcPct val="100000"/>
-              </a:lnSpc>
-              <a:spcAft>
-                <a:spcPts val="600"/>
-              </a:spcAft>
-            </a:pPr>
-            <a:r>
-              <a:rPr sz="1600" b="1" i="0">
-                <a:solidFill>
-                  <a:srgbClr val="1E2761"/>
-                </a:solidFill>
-                <a:latin typeface="Calibri"/>
-              </a:rPr>
-              <a:t>Migrate</a:t>
-            </a:r>
-          </a:p>
-        </p:txBody>
-      </p:sp>
-      <p:sp>
-        <p:nvSpPr>
-          <p:cNvPr id="10" name="TextBox 9"/>
-          <p:cNvSpPr txBox="1"/>
-          <p:nvPr/>
-        </p:nvSpPr>
-        <p:spPr>
-          <a:xfrm>
-            <a:off x="6309360" y="3703320"/>
-            <a:ext cx="5303520" cy="2194560"/>
-          </a:xfrm>
-          <a:prstGeom prst="rect">
-            <a:avLst/>
-          </a:prstGeom>
-          <a:noFill/>
-        </p:spPr>
-        <p:txBody>
-          <a:bodyPr wrap="square" lIns="0" rIns="0" tIns="0">
-            <a:spAutoFit/>
-          </a:bodyPr>
-          <a:lstStyle/>
-          <a:p>
-            <a:pPr>
-              <a:lnSpc>
-                <a:spcPct val="105000"/>
-              </a:lnSpc>
-              <a:spcAft>
-                <a:spcPts val="1000"/>
-              </a:spcAft>
-            </a:pPr>
-            <a:r>
-              <a:rPr sz="1300">
-                <a:solidFill>
-                  <a:srgbClr val="2A367E"/>
-                </a:solidFill>
-                <a:latin typeface="Calibri"/>
-              </a:rPr>
-              <a:t>▪  </a:t>
-            </a:r>
-            <a:r>
-              <a:rPr b="1" sz="1300">
-                <a:solidFill>
-                  <a:srgbClr val="202440"/>
-                </a:solidFill>
-                <a:latin typeface="Calibri"/>
-              </a:rPr>
-              <a:t>AzFilesHybrid:</a:t>
-            </a:r>
-            <a:r>
-              <a:rPr sz="1300">
-                <a:solidFill>
-                  <a:srgbClr val="202440"/>
-                </a:solidFill>
-                <a:latin typeface="Calibri"/>
-              </a:rPr>
-              <a:t> Update-AzStorageAccountAuthForAES256 does the whole dance</a:t>
-            </a:r>
-          </a:p>
-          <a:p>
-            <a:pPr>
-              <a:lnSpc>
-                <a:spcPct val="105000"/>
-              </a:lnSpc>
-              <a:spcAft>
-                <a:spcPts val="1000"/>
-              </a:spcAft>
-            </a:pPr>
-            <a:r>
-              <a:rPr sz="1300">
-                <a:solidFill>
-                  <a:srgbClr val="2A367E"/>
-                </a:solidFill>
-                <a:latin typeface="Calibri"/>
-              </a:rPr>
-              <a:t>▪  </a:t>
-            </a:r>
-            <a:r>
-              <a:rPr b="1" sz="1300">
-                <a:solidFill>
-                  <a:srgbClr val="202440"/>
-                </a:solidFill>
-                <a:latin typeface="Calibri"/>
-              </a:rPr>
-              <a:t>Manually:</a:t>
-            </a:r>
-            <a:r>
-              <a:rPr sz="1300">
-                <a:solidFill>
-                  <a:srgbClr val="202440"/>
-                </a:solidFill>
-                <a:latin typeface="Calibri"/>
-              </a:rPr>
-              <a:t> set AES256 on the account, register SamAccountName, THEN rotate the kerb key — order matters (AES keys derive from the password at set time)</a:t>
-            </a:r>
-          </a:p>
-          <a:p>
-            <a:pPr>
-              <a:lnSpc>
-                <a:spcPct val="105000"/>
-              </a:lnSpc>
-              <a:spcAft>
-                <a:spcPts val="1000"/>
-              </a:spcAft>
-            </a:pPr>
-            <a:r>
-              <a:rPr sz="1300">
-                <a:solidFill>
-                  <a:srgbClr val="2A367E"/>
-                </a:solidFill>
-                <a:latin typeface="Calibri"/>
-              </a:rPr>
-              <a:t>▪  </a:t>
-            </a:r>
-            <a:r>
-              <a:rPr b="1" sz="1300">
-                <a:solidFill>
-                  <a:srgbClr val="202440"/>
-                </a:solidFill>
-                <a:latin typeface="Calibri"/>
-              </a:rPr>
-              <a:t>Our lab</a:t>
-            </a:r>
-            <a:r>
-              <a:rPr sz="1300">
-                <a:solidFill>
-                  <a:srgbClr val="202440"/>
-                </a:solidFill>
-                <a:latin typeface="Calibri"/>
-              </a:rPr>
-              <a:t> deploys AES-256 from the start — you'll see it in klist</a:t>
-            </a:r>
-          </a:p>
-        </p:txBody>
-      </p:sp>
-      <p:sp>
-        <p:nvSpPr>
-          <p:cNvPr id="11" name="TextBox 10"/>
-          <p:cNvSpPr txBox="1"/>
-          <p:nvPr/>
-        </p:nvSpPr>
-        <p:spPr>
-          <a:xfrm>
-            <a:off x="548640" y="6446520"/>
-            <a:ext cx="11064240" cy="320040"/>
-          </a:xfrm>
-          <a:prstGeom prst="rect">
-            <a:avLst/>
-          </a:prstGeom>
-          <a:noFill/>
-        </p:spPr>
-        <p:txBody>
-          <a:bodyPr wrap="square" anchor="t" lIns="0" rIns="0" tIns="0" bIns="0">
-            <a:spAutoFit/>
-          </a:bodyPr>
-          <a:lstStyle/>
-          <a:p>
-            <a:pPr algn="l">
-              <a:lnSpc>
-                <a:spcPct val="100000"/>
-              </a:lnSpc>
-              <a:spcAft>
-                <a:spcPts val="0"/>
-              </a:spcAft>
-            </a:pPr>
-            <a:r>
-              <a:rPr sz="1100" b="0" i="0">
-                <a:solidFill>
-                  <a:srgbClr val="5A5A6E"/>
-                </a:solidFill>
-                <a:latin typeface="Calibri"/>
-              </a:rPr>
-              <a:t>Entra Kerberos / Entra DS accounts are not affected — this hardening only bites the on-prem AD DS path</a:t>
+              <a:t>One storage account = one identity source. Session 2 switches this same account from AD DS to Entra Kerberos.</a:t>
             </a:r>
           </a:p>
         </p:txBody>
